--- a/lecons/F2/16_F2_M2_PW04_Location_of_the_Regional_and_Divisional_Headquarters_of_Came.pptx
+++ b/lecons/F2/16_F2_M2_PW04_Location_of_the_Regional_and_Divisional_Headquarters_of_Came.pptx
@@ -57,9 +57,16 @@
     <p:sldId id="305" r:id="rId51"/>
     <p:sldId id="306" r:id="rId52"/>
     <p:sldId id="307" r:id="rId53"/>
+    <p:sldId id="308" r:id="rId54"/>
+    <p:sldId id="309" r:id="rId55"/>
+    <p:sldId id="310" r:id="rId56"/>
+    <p:sldId id="311" r:id="rId57"/>
+    <p:sldId id="312" r:id="rId58"/>
+    <p:sldId id="313" r:id="rId59"/>
+    <p:sldId id="314" r:id="rId60"/>
   </p:sldIdLst>
   <p:notesMasterIdLst>
-    <p:notesMasterId r:id="rId54"/>
+    <p:notesMasterId r:id="rId61"/>
   </p:notesMasterIdLst>
   <p:sldSz cx="12192000" cy="6858000"/>
   <p:notesSz cx="6858000" cy="12192000"/>
@@ -641,7 +648,7 @@
           <a:p>
             <a:r>
               <a:rPr lang="en-US" dirty="0"/>
-              <a:t>Listen carefully to this situation from real life. A new student from Bafoussam asks the class the headquarters of the North Region and of the divisions around Garoua. Nobody can show them correctly on a map. Think about it, because I am going to ask you some questions.</a:t>
+              <a:t>Listen carefully to this situation from real life. A new student from Bafoussam asks the class the headquarters of the West Region and of the divisions around Garoua. Nobody can show them correctly on the map of Cameroon. He asks: "How can we know and locate the headquarters of our regions and divisions?" Think about it, because I am going to ask you some questions.</a:t>
             </a:r>
             <a:endParaRPr lang="en-US" dirty="0"/>
           </a:p>
@@ -817,7 +824,7 @@
           <a:p>
             <a:r>
               <a:rPr lang="en-US" dirty="0"/>
-              <a:t>Good. The class cannot locate the headquarters on a map.</a:t>
+              <a:t>Good. The class cannot name and locate the headquarters on a map.</a:t>
             </a:r>
             <a:endParaRPr lang="en-US" dirty="0"/>
           </a:p>
@@ -1257,7 +1264,7 @@
           <a:p>
             <a:r>
               <a:rPr lang="en-US" dirty="0"/>
-              <a:t>From this situation, the action we are working towards in this lesson is the following: draw neat maps with a title, a key and a north arrow.</a:t>
+              <a:t>From this situation, the action we are working towards in this lesson is the following: locate places carefully on your maps and name them correctly.</a:t>
             </a:r>
             <a:endParaRPr lang="en-US" dirty="0"/>
           </a:p>
@@ -1609,7 +1616,7 @@
           <a:p>
             <a:r>
               <a:rPr lang="en-US" dirty="0"/>
-              <a:t>Here is the question for Activity 1: Name the ten regions of Cameroon. Take one minute to think and write your answer in your rough notebook.</a:t>
+              <a:t>Here is the question for Activity 1: How many regions does Cameroon have? Take one minute to think and write your answer in your rough notebook.</a:t>
             </a:r>
             <a:endParaRPr lang="en-US" dirty="0"/>
           </a:p>
@@ -1697,7 +1704,7 @@
           <a:p>
             <a:r>
               <a:rPr lang="en-US" dirty="0"/>
-              <a:t>Let us check the answer together. Adamawa, Centre, East, Far North, Littoral, North, North-West, South, South-West and West.</a:t>
+              <a:t>Let us check the answer together. Ten regions.</a:t>
             </a:r>
             <a:endParaRPr lang="en-US" dirty="0"/>
           </a:p>
@@ -1873,7 +1880,7 @@
           <a:p>
             <a:r>
               <a:rPr lang="en-US" dirty="0"/>
-              <a:t>Here is the question for Activity 2: Give the headquarters of the Far North, Adamawa and South-West Regions. Take one minute to think and write your answer in your rough notebook.</a:t>
+              <a:t>Here is the question for Activity 2: What is the headquarters of the Far North Region? Take one minute to think and write your answer in your rough notebook.</a:t>
             </a:r>
             <a:endParaRPr lang="en-US" dirty="0"/>
           </a:p>
@@ -1961,7 +1968,7 @@
           <a:p>
             <a:r>
               <a:rPr lang="en-US" dirty="0"/>
-              <a:t>Let us check the answer together. Maroua, Ngaoundéré and Buea.</a:t>
+              <a:t>Let us check the answer together. Maroua.</a:t>
             </a:r>
             <a:endParaRPr lang="en-US" dirty="0"/>
           </a:p>
@@ -2137,7 +2144,7 @@
           <a:p>
             <a:r>
               <a:rPr lang="en-US" dirty="0"/>
-              <a:t>Here is the question for Activity 3: Which regional headquarters is on the coast? Take one minute to think and write your answer in your rough notebook.</a:t>
+              <a:t>Here is the question for Activity 3: Which regional headquarters is a sea port? Take one minute to think and write your answer in your rough notebook.</a:t>
             </a:r>
             <a:endParaRPr lang="en-US" dirty="0"/>
           </a:p>
@@ -2225,7 +2232,7 @@
           <a:p>
             <a:r>
               <a:rPr lang="en-US" dirty="0"/>
-              <a:t>Let us check the answer together. Douala (Littoral); Buea is near the coast at the foot of Mount Cameroon.</a:t>
+              <a:t>Let us check the answer together. Douala, headquarters of the Littoral Region.</a:t>
             </a:r>
             <a:endParaRPr lang="en-US" dirty="0"/>
           </a:p>
@@ -2401,7 +2408,7 @@
           <a:p>
             <a:r>
               <a:rPr lang="en-US" dirty="0"/>
-              <a:t>Here is the question for Activity 4: Name the four divisions of the North Region and their headquarters. Take one minute to think and write your answer in your rough notebook.</a:t>
+              <a:t>Here is the question for Activity 4: How many divisions does the North Region have? Take one minute to think and write your answer in your rough notebook.</a:t>
             </a:r>
             <a:endParaRPr lang="en-US" dirty="0"/>
           </a:p>
@@ -2577,7 +2584,7 @@
           <a:p>
             <a:r>
               <a:rPr lang="en-US" dirty="0"/>
-              <a:t>Let us check the answer together. Bénoué (Garoua), Faro (Poli), Mayo-Louti (Guider) and Mayo-Rey (Tcholliré).</a:t>
+              <a:t>Let us check the answer together. Four divisions.</a:t>
             </a:r>
             <a:endParaRPr lang="en-US" dirty="0"/>
           </a:p>
@@ -2665,7 +2672,7 @@
           <a:p>
             <a:r>
               <a:rPr lang="en-US" dirty="0"/>
-              <a:t>Activity 5. Look carefully at this diagram: elements of a map. Observe every detail before I ask the question.</a:t>
+              <a:t>Here is the next question: What is the headquarters of the Mayo-Louti division? Take one minute to think and write your answer in your rough notebook.</a:t>
             </a:r>
             <a:endParaRPr lang="en-US" dirty="0"/>
           </a:p>
@@ -2753,7 +2760,7 @@
           <a:p>
             <a:r>
               <a:rPr lang="en-US" dirty="0"/>
-              <a:t>Here is the question for Activity 5: How do we show the headquarters on the base map? Take one minute to think and write your answer in your rough notebook.</a:t>
+              <a:t>Let us check the answer together. Guider.</a:t>
             </a:r>
             <a:endParaRPr lang="en-US" dirty="0"/>
           </a:p>
@@ -2841,7 +2848,7 @@
           <a:p>
             <a:r>
               <a:rPr lang="en-US" dirty="0"/>
-              <a:t>Let us check the answer together. With a star for regional and a dot for divisional headquarters, named, with a key, title and north arrow.</a:t>
+              <a:t>Activity 5. Look carefully at this diagram: elements of a map. Observe every detail before I ask the question.</a:t>
             </a:r>
             <a:endParaRPr lang="en-US" dirty="0"/>
           </a:p>
@@ -2929,7 +2936,7 @@
           <a:p>
             <a:r>
               <a:rPr lang="en-US" dirty="0"/>
-              <a:t>Now we are going to copy the board summary. Write the title and the headings neatly in your notebooks. I will give you enough time for each slide, so do not rush.</a:t>
+              <a:t>Here is the question for Activity 5: How can we show the difference between a regional and a divisional headquarters on the base map? Take one minute to think and write your answer in your rough notebook.</a:t>
             </a:r>
             <a:endParaRPr lang="en-US" dirty="0"/>
           </a:p>
@@ -3017,7 +3024,7 @@
           <a:p>
             <a:r>
               <a:rPr lang="en-US" dirty="0"/>
-              <a:t>Let us copy the definitions. The key terms of this lesson are defined as follows. On this slide we have Regional headquarters and Divisional headquarters. Write each point on a new line, with the key term first, and explain it in your own words when we revise.</a:t>
+              <a:t>Let us check the answer together. With two different symbols explained in the key, for example a star and a dot.</a:t>
             </a:r>
             <a:endParaRPr lang="en-US" dirty="0"/>
           </a:p>
@@ -3105,7 +3112,7 @@
           <a:p>
             <a:r>
               <a:rPr lang="en-US" dirty="0"/>
-              <a:t>Let us copy Regional Headquarters of Cameroon. The ten regions and their headquarters are the following. On this slide we have North and Far North and Adamawa and East. Write each point on a new line, with the key term first, and explain it in your own words when we revise. When you finish, we go to the next slide.</a:t>
+              <a:t>Now we are going to copy the board summary. Write the title and the headings neatly in your notebooks. I will give you enough time for each slide, so do not rush.</a:t>
             </a:r>
             <a:endParaRPr lang="en-US" dirty="0"/>
           </a:p>
@@ -3193,7 +3200,7 @@
           <a:p>
             <a:r>
               <a:rPr lang="en-US" dirty="0"/>
-              <a:t>We continue with Regional Headquarters of Cameroon. On this slide we have Centre and South, Littoral and South-West and West and North-West. Write each point on a new line, with the key term first, and explain it in your own words when we revise.</a:t>
+              <a:t>Let us copy the definitions. The key terms of this lesson are defined as follows. On this slide we have Region and Division. Write each point on a new line, with the key term first, and explain it in your own words when we revise. When you finish, we go to the next slide.</a:t>
             </a:r>
             <a:endParaRPr lang="en-US" dirty="0"/>
           </a:p>
@@ -3281,7 +3288,7 @@
           <a:p>
             <a:r>
               <a:rPr lang="en-US" dirty="0"/>
-              <a:t>Now draw this illustration in your notebook: regions and regional headquarters. Give it a title and label it clearly.</a:t>
+              <a:t>We continue with the definitions. On this slide we have Regional headquarters and Divisional headquarters. Write each point on a new line, with the key term first, and explain it in your own words when we revise.</a:t>
             </a:r>
             <a:endParaRPr lang="en-US" dirty="0"/>
           </a:p>
@@ -3369,7 +3376,7 @@
           <a:p>
             <a:r>
               <a:rPr lang="en-US" dirty="0"/>
-              <a:t>Let us copy Divisional Headquarters of the North Region. The North Region has the following divisions. On this slide we have Bénoué, Faro, Mayo-Louti and Mayo-Rey. Write each point on a new line, with the key term first, and explain it in your own words when we revise.</a:t>
+              <a:t>Let us copy The Regional Headquarters of Cameroon. The ten regions of Cameroon and their headquarters are the following. Copy the point on Far North on the left, then draw the diagram on the right: regions and regional headquarters. Give it a title and label it clearly.</a:t>
             </a:r>
             <a:endParaRPr lang="en-US" dirty="0"/>
           </a:p>
@@ -3457,7 +3464,7 @@
           <a:p>
             <a:r>
               <a:rPr lang="en-US" dirty="0"/>
-              <a:t>Before we start the new lesson, let us correct the homework I gave you at the end of Further Study 5: Informal Sector Activities in African Cities. The question was: Interview one informal worker: his job, his income and his main problem. Take out your exercise books.</a:t>
+              <a:t>Before we start the new lesson, let us correct the homework I gave you at the end of Further Study 5: Informal Sector Activities in African Cities. The question was: Interview one informal worker: his or her job, income and main problem. Take out your exercise books.</a:t>
             </a:r>
             <a:endParaRPr lang="en-US" dirty="0"/>
           </a:p>
@@ -3545,7 +3552,7 @@
           <a:p>
             <a:r>
               <a:rPr lang="en-US" dirty="0"/>
-              <a:t>Now let us check what you have understood. Question 1: Give the headquarters of the West and North-West Regions. Answer in your exercise book.</a:t>
+              <a:t>We continue with The Regional Headquarters of Cameroon. On this slide we have North, Adamawa, East and Centre. Write each point on a new line, with the key term first, and explain it in your own words when we revise. When you finish, we go to the next slide.</a:t>
             </a:r>
             <a:endParaRPr lang="en-US" dirty="0"/>
           </a:p>
@@ -3633,7 +3640,7 @@
           <a:p>
             <a:r>
               <a:rPr lang="en-US" dirty="0"/>
-              <a:t>The expected answer is: bafoussam and Bamenda. If you got it right, well done.</a:t>
+              <a:t>We continue with The Regional Headquarters of Cameroon. On this slide we have South, Littoral, South-West and West. Write each point on a new line, with the key term first, and explain it in your own words when we revise. When you finish, we go to the next slide.</a:t>
             </a:r>
             <a:endParaRPr lang="en-US" dirty="0"/>
           </a:p>
@@ -3721,7 +3728,7 @@
           <a:p>
             <a:r>
               <a:rPr lang="en-US" dirty="0"/>
-              <a:t>Now let us check what you have understood. Question 2: What is the headquarters of Mayo-Louti? Answer in your exercise book.</a:t>
+              <a:t>We continue with The Regional Headquarters of Cameroon. On this slide we have North-West. Write each point on a new line, with the key term first, and explain it in your own words when we revise.</a:t>
             </a:r>
             <a:endParaRPr lang="en-US" dirty="0"/>
           </a:p>
@@ -3809,7 +3816,7 @@
           <a:p>
             <a:r>
               <a:rPr lang="en-US" dirty="0"/>
-              <a:t>The expected answer is: guider. If you got it right, well done.</a:t>
+              <a:t>Let us copy The Divisional Headquarters of the North Region. The North Region has the following divisions and headquarters. On this slide we have Bénoué, Faro and Mayo-Louti. Write each point on a new line, with the key term first, and explain it in your own words when we revise. When you finish, we go to the next slide.</a:t>
             </a:r>
             <a:endParaRPr lang="en-US" dirty="0"/>
           </a:p>
@@ -3897,7 +3904,7 @@
           <a:p>
             <a:r>
               <a:rPr lang="en-US" dirty="0"/>
-              <a:t>Take your time to copy this part; we will continue together.</a:t>
+              <a:t>We continue with The Divisional Headquarters of the North Region. On this slide we have Mayo-Rey. Write each point on a new line, with the key term first, and explain it in your own words when we revise.</a:t>
             </a:r>
             <a:endParaRPr lang="en-US" dirty="0"/>
           </a:p>
@@ -3985,7 +3992,7 @@
           <a:p>
             <a:r>
               <a:rPr lang="en-US" dirty="0"/>
-              <a:t>For those who need more practice, fill in the blanks in your exercise book. The answers are: number 1, Bertoua; number 2, Ebolowa; number 3, Poli.</a:t>
+              <a:t>Let us copy Practical Exercise. On a base map of Cameroon, learners do the following. Copy the point on Locate the regional headquarters on the left, then draw the diagram on the right: the main towns of Cameroon. Give it a title and label it clearly.</a:t>
             </a:r>
             <a:endParaRPr lang="en-US" dirty="0"/>
           </a:p>
@@ -4073,7 +4080,7 @@
           <a:p>
             <a:r>
               <a:rPr lang="en-US" dirty="0"/>
-              <a:t>For your homework: On a base map of Cameroon, locate and name the ten regional headquarters. We shall correct it at the beginning of our next lesson.</a:t>
+              <a:t>We continue with Practical Exercise. On this slide we have Locate the divisional headquarters and Complete the map. Write each point on a new line, with the key term first, and explain it in your own words when we revise.</a:t>
             </a:r>
             <a:endParaRPr lang="en-US" dirty="0"/>
           </a:p>
@@ -4161,7 +4168,7 @@
           <a:p>
             <a:r>
               <a:rPr lang="en-US" dirty="0"/>
-              <a:t>Our next lesson will be on Further Study 6: Urban Problems in Cameroon. Thank you for your attention, and see you next time.</a:t>
+              <a:t>Now let us check what you have understood. Question 1: Give the headquarters of the West and North-West Regions. Answer in your exercise book.</a:t>
             </a:r>
             <a:endParaRPr lang="en-US" dirty="0"/>
           </a:p>
@@ -4249,7 +4256,7 @@
           <a:p>
             <a:r>
               <a:rPr lang="en-US" dirty="0"/>
-              <a:t>Let us play the bilingual game. I say a word in English, and you give me the French word. Then we do the reverse.</a:t>
+              <a:t>The expected answer is: bafoussam and Bamenda. If you got it right, well done.</a:t>
             </a:r>
             <a:endParaRPr lang="en-US" dirty="0"/>
           </a:p>
@@ -4337,7 +4344,7 @@
           <a:p>
             <a:r>
               <a:rPr lang="en-US" dirty="0"/>
-              <a:t>I record this information in the official logbook of the class after the lesson.</a:t>
+              <a:t>Now let us check what you have understood. Question 2: What is the headquarters of the Faro division? Answer in your exercise book.</a:t>
             </a:r>
             <a:endParaRPr lang="en-US" dirty="0"/>
           </a:p>
@@ -4425,7 +4432,7 @@
           <a:p>
             <a:r>
               <a:rPr lang="en-US" dirty="0"/>
-              <a:t>Here is a good answer. Answers vary. Example: a shoe repairer earns about 2,000 FCFA a day; his main problem is irregular income and no place to work when it rains. Compare it with your own answer and correct your work in red.</a:t>
+              <a:t>Here is a good answer. Answers vary. Example: a shoe repairer earns about 2,000 FCFA a day; the main problem is irregular income and no place to work when it rains. Compare it with your own answer and correct your work in red.</a:t>
             </a:r>
             <a:endParaRPr lang="en-US" dirty="0"/>
           </a:p>
@@ -4513,7 +4520,7 @@
           <a:p>
             <a:r>
               <a:rPr lang="en-US" dirty="0"/>
-              <a:t>I complete the second page of the logbook: the matter taught, the evaluation, the homework and the attendance.</a:t>
+              <a:t>The expected answer is: poli. If you got it right, well done.</a:t>
             </a:r>
             <a:endParaRPr lang="en-US" dirty="0"/>
           </a:p>
@@ -4601,7 +4608,7 @@
           <a:p>
             <a:r>
               <a:rPr lang="en-US" dirty="0"/>
-              <a:t>This slide is for me, the teacher: it gives the timing of the lesson and what to do if the projector is not available.</a:t>
+              <a:t>Take your time to copy this part; we will continue together.</a:t>
             </a:r>
             <a:endParaRPr lang="en-US" dirty="0"/>
           </a:p>
@@ -4689,7 +4696,7 @@
           <a:p>
             <a:r>
               <a:rPr lang="en-US" dirty="0"/>
-              <a:t>These are the references and picture credits used to prepare this lesson.</a:t>
+              <a:t>For those who need more practice, fill in the blanks in your exercise book. The answers are: number 1, Bertoua; number 2, Ebolowa; number 3, Tcholliré.</a:t>
             </a:r>
             <a:endParaRPr lang="en-US" dirty="0"/>
           </a:p>
@@ -4713,6 +4720,622 @@
             <a:fld id="{F7021451-1387-4CA6-816F-3879F97B5CBC}" type="slidenum">
               <a:rPr lang="en-US"/>
               <a:t>52</a:t>
+            </a:fld>
+            <a:endParaRPr lang="en-US"/>
+          </a:p>
+        </p:txBody>
+      </p:sp>
+    </p:spTree>
+    <p:extLst>
+      <p:ext uri="{BB962C8B-B14F-4D97-AF65-F5344CB8AC3E}">
+        <p14:creationId xmlns:p14="http://schemas.microsoft.com/office/powerpoint/2010/main" val="1024086991"/>
+      </p:ext>
+    </p:extLst>
+  </p:cSld>
+  <p:clrMapOvr>
+    <a:masterClrMapping/>
+  </p:clrMapOvr>
+</p:notes>
+</file>
+
+<file path=ppt/notesSlides/notesSlide53.xml><?xml version="1.0" encoding="utf-8"?>
+<p:notes xmlns:a="http://schemas.openxmlformats.org/drawingml/2006/main" xmlns:r="http://schemas.openxmlformats.org/officeDocument/2006/relationships" xmlns:p="http://schemas.openxmlformats.org/presentationml/2006/main">
+  <p:cSld>
+    <p:spTree>
+      <p:nvGrpSpPr>
+        <p:cNvPr id="1" name=""/>
+        <p:cNvGrpSpPr/>
+        <p:nvPr/>
+      </p:nvGrpSpPr>
+      <p:grpSpPr>
+        <a:xfrm>
+          <a:off x="0" y="0"/>
+          <a:ext cx="0" cy="0"/>
+          <a:chOff x="0" y="0"/>
+          <a:chExt cx="0" cy="0"/>
+        </a:xfrm>
+      </p:grpSpPr>
+      <p:sp>
+        <p:nvSpPr>
+          <p:cNvPr id="2" name="Slide Image Placeholder 1"/>
+          <p:cNvSpPr>
+            <a:spLocks noGrp="1" noRot="1" noChangeAspect="1"/>
+          </p:cNvSpPr>
+          <p:nvPr>
+            <p:ph type="sldImg"/>
+          </p:nvPr>
+        </p:nvSpPr>
+        <p:spPr/>
+      </p:sp>
+      <p:sp>
+        <p:nvSpPr>
+          <p:cNvPr id="3" name="Notes Placeholder 2"/>
+          <p:cNvSpPr>
+            <a:spLocks noGrp="1"/>
+          </p:cNvSpPr>
+          <p:nvPr>
+            <p:ph type="body" idx="1"/>
+          </p:nvPr>
+        </p:nvSpPr>
+        <p:spPr/>
+        <p:txBody>
+          <a:bodyPr/>
+          <a:lstStyle/>
+          <a:p>
+            <a:r>
+              <a:rPr lang="en-US" dirty="0"/>
+              <a:t>For your homework: On a base map of Cameroon, locate and name the ten regional headquarters. We shall correct it at the beginning of our next lesson.</a:t>
+            </a:r>
+            <a:endParaRPr lang="en-US" dirty="0"/>
+          </a:p>
+        </p:txBody>
+      </p:sp>
+      <p:sp>
+        <p:nvSpPr>
+          <p:cNvPr id="4" name="Slide Number Placeholder 3"/>
+          <p:cNvSpPr>
+            <a:spLocks noGrp="1"/>
+          </p:cNvSpPr>
+          <p:nvPr>
+            <p:ph type="sldNum" sz="quarter" idx="10"/>
+          </p:nvPr>
+        </p:nvSpPr>
+        <p:spPr/>
+        <p:txBody>
+          <a:bodyPr/>
+          <a:lstStyle/>
+          <a:p>
+            <a:fld id="{F7021451-1387-4CA6-816F-3879F97B5CBC}" type="slidenum">
+              <a:rPr lang="en-US"/>
+              <a:t>53</a:t>
+            </a:fld>
+            <a:endParaRPr lang="en-US"/>
+          </a:p>
+        </p:txBody>
+      </p:sp>
+    </p:spTree>
+    <p:extLst>
+      <p:ext uri="{BB962C8B-B14F-4D97-AF65-F5344CB8AC3E}">
+        <p14:creationId xmlns:p14="http://schemas.microsoft.com/office/powerpoint/2010/main" val="1024086991"/>
+      </p:ext>
+    </p:extLst>
+  </p:cSld>
+  <p:clrMapOvr>
+    <a:masterClrMapping/>
+  </p:clrMapOvr>
+</p:notes>
+</file>
+
+<file path=ppt/notesSlides/notesSlide54.xml><?xml version="1.0" encoding="utf-8"?>
+<p:notes xmlns:a="http://schemas.openxmlformats.org/drawingml/2006/main" xmlns:r="http://schemas.openxmlformats.org/officeDocument/2006/relationships" xmlns:p="http://schemas.openxmlformats.org/presentationml/2006/main">
+  <p:cSld>
+    <p:spTree>
+      <p:nvGrpSpPr>
+        <p:cNvPr id="1" name=""/>
+        <p:cNvGrpSpPr/>
+        <p:nvPr/>
+      </p:nvGrpSpPr>
+      <p:grpSpPr>
+        <a:xfrm>
+          <a:off x="0" y="0"/>
+          <a:ext cx="0" cy="0"/>
+          <a:chOff x="0" y="0"/>
+          <a:chExt cx="0" cy="0"/>
+        </a:xfrm>
+      </p:grpSpPr>
+      <p:sp>
+        <p:nvSpPr>
+          <p:cNvPr id="2" name="Slide Image Placeholder 1"/>
+          <p:cNvSpPr>
+            <a:spLocks noGrp="1" noRot="1" noChangeAspect="1"/>
+          </p:cNvSpPr>
+          <p:nvPr>
+            <p:ph type="sldImg"/>
+          </p:nvPr>
+        </p:nvSpPr>
+        <p:spPr/>
+      </p:sp>
+      <p:sp>
+        <p:nvSpPr>
+          <p:cNvPr id="3" name="Notes Placeholder 2"/>
+          <p:cNvSpPr>
+            <a:spLocks noGrp="1"/>
+          </p:cNvSpPr>
+          <p:nvPr>
+            <p:ph type="body" idx="1"/>
+          </p:nvPr>
+        </p:nvSpPr>
+        <p:spPr/>
+        <p:txBody>
+          <a:bodyPr/>
+          <a:lstStyle/>
+          <a:p>
+            <a:r>
+              <a:rPr lang="en-US" dirty="0"/>
+              <a:t>Our next lesson will be on Further Study 6: Urban Problems in Cameroon. Thank you for your attention, and see you next time.</a:t>
+            </a:r>
+            <a:endParaRPr lang="en-US" dirty="0"/>
+          </a:p>
+        </p:txBody>
+      </p:sp>
+      <p:sp>
+        <p:nvSpPr>
+          <p:cNvPr id="4" name="Slide Number Placeholder 3"/>
+          <p:cNvSpPr>
+            <a:spLocks noGrp="1"/>
+          </p:cNvSpPr>
+          <p:nvPr>
+            <p:ph type="sldNum" sz="quarter" idx="10"/>
+          </p:nvPr>
+        </p:nvSpPr>
+        <p:spPr/>
+        <p:txBody>
+          <a:bodyPr/>
+          <a:lstStyle/>
+          <a:p>
+            <a:fld id="{F7021451-1387-4CA6-816F-3879F97B5CBC}" type="slidenum">
+              <a:rPr lang="en-US"/>
+              <a:t>54</a:t>
+            </a:fld>
+            <a:endParaRPr lang="en-US"/>
+          </a:p>
+        </p:txBody>
+      </p:sp>
+    </p:spTree>
+    <p:extLst>
+      <p:ext uri="{BB962C8B-B14F-4D97-AF65-F5344CB8AC3E}">
+        <p14:creationId xmlns:p14="http://schemas.microsoft.com/office/powerpoint/2010/main" val="1024086991"/>
+      </p:ext>
+    </p:extLst>
+  </p:cSld>
+  <p:clrMapOvr>
+    <a:masterClrMapping/>
+  </p:clrMapOvr>
+</p:notes>
+</file>
+
+<file path=ppt/notesSlides/notesSlide55.xml><?xml version="1.0" encoding="utf-8"?>
+<p:notes xmlns:a="http://schemas.openxmlformats.org/drawingml/2006/main" xmlns:r="http://schemas.openxmlformats.org/officeDocument/2006/relationships" xmlns:p="http://schemas.openxmlformats.org/presentationml/2006/main">
+  <p:cSld>
+    <p:spTree>
+      <p:nvGrpSpPr>
+        <p:cNvPr id="1" name=""/>
+        <p:cNvGrpSpPr/>
+        <p:nvPr/>
+      </p:nvGrpSpPr>
+      <p:grpSpPr>
+        <a:xfrm>
+          <a:off x="0" y="0"/>
+          <a:ext cx="0" cy="0"/>
+          <a:chOff x="0" y="0"/>
+          <a:chExt cx="0" cy="0"/>
+        </a:xfrm>
+      </p:grpSpPr>
+      <p:sp>
+        <p:nvSpPr>
+          <p:cNvPr id="2" name="Slide Image Placeholder 1"/>
+          <p:cNvSpPr>
+            <a:spLocks noGrp="1" noRot="1" noChangeAspect="1"/>
+          </p:cNvSpPr>
+          <p:nvPr>
+            <p:ph type="sldImg"/>
+          </p:nvPr>
+        </p:nvSpPr>
+        <p:spPr/>
+      </p:sp>
+      <p:sp>
+        <p:nvSpPr>
+          <p:cNvPr id="3" name="Notes Placeholder 2"/>
+          <p:cNvSpPr>
+            <a:spLocks noGrp="1"/>
+          </p:cNvSpPr>
+          <p:nvPr>
+            <p:ph type="body" idx="1"/>
+          </p:nvPr>
+        </p:nvSpPr>
+        <p:spPr/>
+        <p:txBody>
+          <a:bodyPr/>
+          <a:lstStyle/>
+          <a:p>
+            <a:r>
+              <a:rPr lang="en-US" dirty="0"/>
+              <a:t>Let us play the bilingual game. I say a word in English, and you give me the French word. Then we do the reverse.</a:t>
+            </a:r>
+            <a:endParaRPr lang="en-US" dirty="0"/>
+          </a:p>
+        </p:txBody>
+      </p:sp>
+      <p:sp>
+        <p:nvSpPr>
+          <p:cNvPr id="4" name="Slide Number Placeholder 3"/>
+          <p:cNvSpPr>
+            <a:spLocks noGrp="1"/>
+          </p:cNvSpPr>
+          <p:nvPr>
+            <p:ph type="sldNum" sz="quarter" idx="10"/>
+          </p:nvPr>
+        </p:nvSpPr>
+        <p:spPr/>
+        <p:txBody>
+          <a:bodyPr/>
+          <a:lstStyle/>
+          <a:p>
+            <a:fld id="{F7021451-1387-4CA6-816F-3879F97B5CBC}" type="slidenum">
+              <a:rPr lang="en-US"/>
+              <a:t>55</a:t>
+            </a:fld>
+            <a:endParaRPr lang="en-US"/>
+          </a:p>
+        </p:txBody>
+      </p:sp>
+    </p:spTree>
+    <p:extLst>
+      <p:ext uri="{BB962C8B-B14F-4D97-AF65-F5344CB8AC3E}">
+        <p14:creationId xmlns:p14="http://schemas.microsoft.com/office/powerpoint/2010/main" val="1024086991"/>
+      </p:ext>
+    </p:extLst>
+  </p:cSld>
+  <p:clrMapOvr>
+    <a:masterClrMapping/>
+  </p:clrMapOvr>
+</p:notes>
+</file>
+
+<file path=ppt/notesSlides/notesSlide56.xml><?xml version="1.0" encoding="utf-8"?>
+<p:notes xmlns:a="http://schemas.openxmlformats.org/drawingml/2006/main" xmlns:r="http://schemas.openxmlformats.org/officeDocument/2006/relationships" xmlns:p="http://schemas.openxmlformats.org/presentationml/2006/main">
+  <p:cSld>
+    <p:spTree>
+      <p:nvGrpSpPr>
+        <p:cNvPr id="1" name=""/>
+        <p:cNvGrpSpPr/>
+        <p:nvPr/>
+      </p:nvGrpSpPr>
+      <p:grpSpPr>
+        <a:xfrm>
+          <a:off x="0" y="0"/>
+          <a:ext cx="0" cy="0"/>
+          <a:chOff x="0" y="0"/>
+          <a:chExt cx="0" cy="0"/>
+        </a:xfrm>
+      </p:grpSpPr>
+      <p:sp>
+        <p:nvSpPr>
+          <p:cNvPr id="2" name="Slide Image Placeholder 1"/>
+          <p:cNvSpPr>
+            <a:spLocks noGrp="1" noRot="1" noChangeAspect="1"/>
+          </p:cNvSpPr>
+          <p:nvPr>
+            <p:ph type="sldImg"/>
+          </p:nvPr>
+        </p:nvSpPr>
+        <p:spPr/>
+      </p:sp>
+      <p:sp>
+        <p:nvSpPr>
+          <p:cNvPr id="3" name="Notes Placeholder 2"/>
+          <p:cNvSpPr>
+            <a:spLocks noGrp="1"/>
+          </p:cNvSpPr>
+          <p:nvPr>
+            <p:ph type="body" idx="1"/>
+          </p:nvPr>
+        </p:nvSpPr>
+        <p:spPr/>
+        <p:txBody>
+          <a:bodyPr/>
+          <a:lstStyle/>
+          <a:p>
+            <a:r>
+              <a:rPr lang="en-US" dirty="0"/>
+              <a:t>I record this information in the official logbook of the class after the lesson.</a:t>
+            </a:r>
+            <a:endParaRPr lang="en-US" dirty="0"/>
+          </a:p>
+        </p:txBody>
+      </p:sp>
+      <p:sp>
+        <p:nvSpPr>
+          <p:cNvPr id="4" name="Slide Number Placeholder 3"/>
+          <p:cNvSpPr>
+            <a:spLocks noGrp="1"/>
+          </p:cNvSpPr>
+          <p:nvPr>
+            <p:ph type="sldNum" sz="quarter" idx="10"/>
+          </p:nvPr>
+        </p:nvSpPr>
+        <p:spPr/>
+        <p:txBody>
+          <a:bodyPr/>
+          <a:lstStyle/>
+          <a:p>
+            <a:fld id="{F7021451-1387-4CA6-816F-3879F97B5CBC}" type="slidenum">
+              <a:rPr lang="en-US"/>
+              <a:t>56</a:t>
+            </a:fld>
+            <a:endParaRPr lang="en-US"/>
+          </a:p>
+        </p:txBody>
+      </p:sp>
+    </p:spTree>
+    <p:extLst>
+      <p:ext uri="{BB962C8B-B14F-4D97-AF65-F5344CB8AC3E}">
+        <p14:creationId xmlns:p14="http://schemas.microsoft.com/office/powerpoint/2010/main" val="1024086991"/>
+      </p:ext>
+    </p:extLst>
+  </p:cSld>
+  <p:clrMapOvr>
+    <a:masterClrMapping/>
+  </p:clrMapOvr>
+</p:notes>
+</file>
+
+<file path=ppt/notesSlides/notesSlide57.xml><?xml version="1.0" encoding="utf-8"?>
+<p:notes xmlns:a="http://schemas.openxmlformats.org/drawingml/2006/main" xmlns:r="http://schemas.openxmlformats.org/officeDocument/2006/relationships" xmlns:p="http://schemas.openxmlformats.org/presentationml/2006/main">
+  <p:cSld>
+    <p:spTree>
+      <p:nvGrpSpPr>
+        <p:cNvPr id="1" name=""/>
+        <p:cNvGrpSpPr/>
+        <p:nvPr/>
+      </p:nvGrpSpPr>
+      <p:grpSpPr>
+        <a:xfrm>
+          <a:off x="0" y="0"/>
+          <a:ext cx="0" cy="0"/>
+          <a:chOff x="0" y="0"/>
+          <a:chExt cx="0" cy="0"/>
+        </a:xfrm>
+      </p:grpSpPr>
+      <p:sp>
+        <p:nvSpPr>
+          <p:cNvPr id="2" name="Slide Image Placeholder 1"/>
+          <p:cNvSpPr>
+            <a:spLocks noGrp="1" noRot="1" noChangeAspect="1"/>
+          </p:cNvSpPr>
+          <p:nvPr>
+            <p:ph type="sldImg"/>
+          </p:nvPr>
+        </p:nvSpPr>
+        <p:spPr/>
+      </p:sp>
+      <p:sp>
+        <p:nvSpPr>
+          <p:cNvPr id="3" name="Notes Placeholder 2"/>
+          <p:cNvSpPr>
+            <a:spLocks noGrp="1"/>
+          </p:cNvSpPr>
+          <p:nvPr>
+            <p:ph type="body" idx="1"/>
+          </p:nvPr>
+        </p:nvSpPr>
+        <p:spPr/>
+        <p:txBody>
+          <a:bodyPr/>
+          <a:lstStyle/>
+          <a:p>
+            <a:r>
+              <a:rPr lang="en-US" dirty="0"/>
+              <a:t>I complete the second page of the logbook: the matter taught, the evaluation, the homework and the attendance.</a:t>
+            </a:r>
+            <a:endParaRPr lang="en-US" dirty="0"/>
+          </a:p>
+        </p:txBody>
+      </p:sp>
+      <p:sp>
+        <p:nvSpPr>
+          <p:cNvPr id="4" name="Slide Number Placeholder 3"/>
+          <p:cNvSpPr>
+            <a:spLocks noGrp="1"/>
+          </p:cNvSpPr>
+          <p:nvPr>
+            <p:ph type="sldNum" sz="quarter" idx="10"/>
+          </p:nvPr>
+        </p:nvSpPr>
+        <p:spPr/>
+        <p:txBody>
+          <a:bodyPr/>
+          <a:lstStyle/>
+          <a:p>
+            <a:fld id="{F7021451-1387-4CA6-816F-3879F97B5CBC}" type="slidenum">
+              <a:rPr lang="en-US"/>
+              <a:t>57</a:t>
+            </a:fld>
+            <a:endParaRPr lang="en-US"/>
+          </a:p>
+        </p:txBody>
+      </p:sp>
+    </p:spTree>
+    <p:extLst>
+      <p:ext uri="{BB962C8B-B14F-4D97-AF65-F5344CB8AC3E}">
+        <p14:creationId xmlns:p14="http://schemas.microsoft.com/office/powerpoint/2010/main" val="1024086991"/>
+      </p:ext>
+    </p:extLst>
+  </p:cSld>
+  <p:clrMapOvr>
+    <a:masterClrMapping/>
+  </p:clrMapOvr>
+</p:notes>
+</file>
+
+<file path=ppt/notesSlides/notesSlide58.xml><?xml version="1.0" encoding="utf-8"?>
+<p:notes xmlns:a="http://schemas.openxmlformats.org/drawingml/2006/main" xmlns:r="http://schemas.openxmlformats.org/officeDocument/2006/relationships" xmlns:p="http://schemas.openxmlformats.org/presentationml/2006/main">
+  <p:cSld>
+    <p:spTree>
+      <p:nvGrpSpPr>
+        <p:cNvPr id="1" name=""/>
+        <p:cNvGrpSpPr/>
+        <p:nvPr/>
+      </p:nvGrpSpPr>
+      <p:grpSpPr>
+        <a:xfrm>
+          <a:off x="0" y="0"/>
+          <a:ext cx="0" cy="0"/>
+          <a:chOff x="0" y="0"/>
+          <a:chExt cx="0" cy="0"/>
+        </a:xfrm>
+      </p:grpSpPr>
+      <p:sp>
+        <p:nvSpPr>
+          <p:cNvPr id="2" name="Slide Image Placeholder 1"/>
+          <p:cNvSpPr>
+            <a:spLocks noGrp="1" noRot="1" noChangeAspect="1"/>
+          </p:cNvSpPr>
+          <p:nvPr>
+            <p:ph type="sldImg"/>
+          </p:nvPr>
+        </p:nvSpPr>
+        <p:spPr/>
+      </p:sp>
+      <p:sp>
+        <p:nvSpPr>
+          <p:cNvPr id="3" name="Notes Placeholder 2"/>
+          <p:cNvSpPr>
+            <a:spLocks noGrp="1"/>
+          </p:cNvSpPr>
+          <p:nvPr>
+            <p:ph type="body" idx="1"/>
+          </p:nvPr>
+        </p:nvSpPr>
+        <p:spPr/>
+        <p:txBody>
+          <a:bodyPr/>
+          <a:lstStyle/>
+          <a:p>
+            <a:r>
+              <a:rPr lang="en-US" dirty="0"/>
+              <a:t>This slide is for me, the teacher: it gives the timing of the lesson and what to do if the projector is not available.</a:t>
+            </a:r>
+            <a:endParaRPr lang="en-US" dirty="0"/>
+          </a:p>
+        </p:txBody>
+      </p:sp>
+      <p:sp>
+        <p:nvSpPr>
+          <p:cNvPr id="4" name="Slide Number Placeholder 3"/>
+          <p:cNvSpPr>
+            <a:spLocks noGrp="1"/>
+          </p:cNvSpPr>
+          <p:nvPr>
+            <p:ph type="sldNum" sz="quarter" idx="10"/>
+          </p:nvPr>
+        </p:nvSpPr>
+        <p:spPr/>
+        <p:txBody>
+          <a:bodyPr/>
+          <a:lstStyle/>
+          <a:p>
+            <a:fld id="{F7021451-1387-4CA6-816F-3879F97B5CBC}" type="slidenum">
+              <a:rPr lang="en-US"/>
+              <a:t>58</a:t>
+            </a:fld>
+            <a:endParaRPr lang="en-US"/>
+          </a:p>
+        </p:txBody>
+      </p:sp>
+    </p:spTree>
+    <p:extLst>
+      <p:ext uri="{BB962C8B-B14F-4D97-AF65-F5344CB8AC3E}">
+        <p14:creationId xmlns:p14="http://schemas.microsoft.com/office/powerpoint/2010/main" val="1024086991"/>
+      </p:ext>
+    </p:extLst>
+  </p:cSld>
+  <p:clrMapOvr>
+    <a:masterClrMapping/>
+  </p:clrMapOvr>
+</p:notes>
+</file>
+
+<file path=ppt/notesSlides/notesSlide59.xml><?xml version="1.0" encoding="utf-8"?>
+<p:notes xmlns:a="http://schemas.openxmlformats.org/drawingml/2006/main" xmlns:r="http://schemas.openxmlformats.org/officeDocument/2006/relationships" xmlns:p="http://schemas.openxmlformats.org/presentationml/2006/main">
+  <p:cSld>
+    <p:spTree>
+      <p:nvGrpSpPr>
+        <p:cNvPr id="1" name=""/>
+        <p:cNvGrpSpPr/>
+        <p:nvPr/>
+      </p:nvGrpSpPr>
+      <p:grpSpPr>
+        <a:xfrm>
+          <a:off x="0" y="0"/>
+          <a:ext cx="0" cy="0"/>
+          <a:chOff x="0" y="0"/>
+          <a:chExt cx="0" cy="0"/>
+        </a:xfrm>
+      </p:grpSpPr>
+      <p:sp>
+        <p:nvSpPr>
+          <p:cNvPr id="2" name="Slide Image Placeholder 1"/>
+          <p:cNvSpPr>
+            <a:spLocks noGrp="1" noRot="1" noChangeAspect="1"/>
+          </p:cNvSpPr>
+          <p:nvPr>
+            <p:ph type="sldImg"/>
+          </p:nvPr>
+        </p:nvSpPr>
+        <p:spPr/>
+      </p:sp>
+      <p:sp>
+        <p:nvSpPr>
+          <p:cNvPr id="3" name="Notes Placeholder 2"/>
+          <p:cNvSpPr>
+            <a:spLocks noGrp="1"/>
+          </p:cNvSpPr>
+          <p:nvPr>
+            <p:ph type="body" idx="1"/>
+          </p:nvPr>
+        </p:nvSpPr>
+        <p:spPr/>
+        <p:txBody>
+          <a:bodyPr/>
+          <a:lstStyle/>
+          <a:p>
+            <a:r>
+              <a:rPr lang="en-US" dirty="0"/>
+              <a:t>These are the references and picture credits used to prepare this lesson.</a:t>
+            </a:r>
+            <a:endParaRPr lang="en-US" dirty="0"/>
+          </a:p>
+        </p:txBody>
+      </p:sp>
+      <p:sp>
+        <p:nvSpPr>
+          <p:cNvPr id="4" name="Slide Number Placeholder 3"/>
+          <p:cNvSpPr>
+            <a:spLocks noGrp="1"/>
+          </p:cNvSpPr>
+          <p:nvPr>
+            <p:ph type="sldNum" sz="quarter" idx="10"/>
+          </p:nvPr>
+        </p:nvSpPr>
+        <p:spPr/>
+        <p:txBody>
+          <a:bodyPr/>
+          <a:lstStyle/>
+          <a:p>
+            <a:fld id="{F7021451-1387-4CA6-816F-3879F97B5CBC}" type="slidenum">
+              <a:rPr lang="en-US"/>
+              <a:t>59</a:t>
             </a:fld>
             <a:endParaRPr lang="en-US"/>
           </a:p>
@@ -4953,7 +5576,7 @@
           <a:p>
             <a:r>
               <a:rPr lang="en-US" dirty="0"/>
-              <a:t>By the end of this lesson, you should be able to do three things. Number 1: name the ten regions of Cameroon and their headquarters. Number 2: name the divisional headquarters of their region. Number 3: locate them on a base map.</a:t>
+              <a:t>By the end of this lesson, you should be able to do three things. Number 1: name the ten regions of Cameroon and their headquarters. Number 2: name the divisions of the North Region and their headquarters. Number 3: locate and name them on a base map.</a:t>
             </a:r>
             <a:endParaRPr lang="en-US" dirty="0"/>
           </a:p>
@@ -6421,7 +7044,7 @@
         <p:spPr>
           <a:xfrm>
             <a:off x="0" y="658368"/>
-            <a:ext cx="5120640" cy="5833872"/>
+            <a:ext cx="2468880" cy="5833872"/>
           </a:xfrm>
           <a:prstGeom prst="rect">
             <a:avLst/>
@@ -6436,8 +7059,8 @@
         </p:nvSpPr>
         <p:spPr>
           <a:xfrm>
-            <a:off x="5349240" y="1005840"/>
-            <a:ext cx="6522415" cy="731520"/>
+            <a:off x="2697480" y="1005840"/>
+            <a:ext cx="9174175" cy="731520"/>
           </a:xfrm>
           <a:prstGeom prst="rect">
             <a:avLst/>
@@ -6477,8 +7100,8 @@
         </p:nvSpPr>
         <p:spPr>
           <a:xfrm>
-            <a:off x="5349240" y="1783080"/>
-            <a:ext cx="6522415" cy="4663440"/>
+            <a:off x="2697480" y="1783080"/>
+            <a:ext cx="9174175" cy="4663440"/>
           </a:xfrm>
           <a:prstGeom prst="rect">
             <a:avLst/>
@@ -6505,7 +7128,7 @@
                 <a:ea typeface="Times New Roman" pitchFamily="34" charset="-122"/>
                 <a:cs typeface="Times New Roman" pitchFamily="34" charset="-120"/>
               </a:rPr>
-              <a:t>A new student from Bafoussam asks the class the headquarters of the North Region and of the divisions around Garoua. Nobody can show them correctly on a map.</a:t>
+              <a:t>A new student from Bafoussam asks the class the headquarters of the West Region and of the divisions around Garoua. Nobody can show them correctly on the map of Cameroon. He asks: "How can we know and locate the headquarters of our regions and divisions?"</a:t>
             </a:r>
             <a:endParaRPr lang="en-US" sz="4000" dirty="0"/>
           </a:p>
@@ -6943,7 +7566,7 @@
                 <a:ea typeface="Times New Roman" pitchFamily="34" charset="-122"/>
                 <a:cs typeface="Times New Roman" pitchFamily="34" charset="-120"/>
               </a:rPr>
-              <a:t>The class cannot locate the headquarters on a map.</a:t>
+              <a:t>The class cannot name and locate the headquarters on a map.</a:t>
             </a:r>
             <a:endParaRPr lang="en-US" sz="4000" dirty="0"/>
           </a:p>
@@ -8038,7 +8661,7 @@
                 <a:ea typeface="Times New Roman" pitchFamily="34" charset="-122"/>
                 <a:cs typeface="Times New Roman" pitchFamily="34" charset="-120"/>
               </a:rPr>
-              <a:t>Draw neat maps with a title, a key and a north arrow.</a:t>
+              <a:t>Locate places carefully on your maps and name them correctly.</a:t>
             </a:r>
             <a:endParaRPr lang="en-US" sz="4000" dirty="0"/>
           </a:p>
@@ -9285,7 +9908,7 @@
                 <a:ea typeface="Times New Roman" pitchFamily="34" charset="-122"/>
                 <a:cs typeface="Times New Roman" pitchFamily="34" charset="-120"/>
               </a:rPr>
-              <a:t>Name the ten regions of Cameroon.</a:t>
+              <a:t>How many regions does Cameroon have?</a:t>
             </a:r>
             <a:endParaRPr lang="en-US" sz="4000" dirty="0"/>
           </a:p>
@@ -9504,7 +10127,7 @@
                 <a:ea typeface="Times New Roman" pitchFamily="34" charset="-122"/>
                 <a:cs typeface="Times New Roman" pitchFamily="34" charset="-120"/>
               </a:rPr>
-              <a:t>Adamawa, Centre, East, Far North, Littoral, North, North-West, South, South-West and West.</a:t>
+              <a:t>Ten regions.</a:t>
             </a:r>
             <a:endParaRPr lang="en-US" sz="4000" dirty="0"/>
           </a:p>
@@ -9937,7 +10560,7 @@
                 <a:ea typeface="Times New Roman" pitchFamily="34" charset="-122"/>
                 <a:cs typeface="Times New Roman" pitchFamily="34" charset="-120"/>
               </a:rPr>
-              <a:t>Give the headquarters of the Far North, Adamawa and South-West Regions.</a:t>
+              <a:t>What is the headquarters of the Far North Region?</a:t>
             </a:r>
             <a:endParaRPr lang="en-US" sz="4000" dirty="0"/>
           </a:p>
@@ -10156,7 +10779,7 @@
                 <a:ea typeface="Times New Roman" pitchFamily="34" charset="-122"/>
                 <a:cs typeface="Times New Roman" pitchFamily="34" charset="-120"/>
               </a:rPr>
-              <a:t>Maroua, Ngaoundéré and Buea.</a:t>
+              <a:t>Maroua.</a:t>
             </a:r>
             <a:endParaRPr lang="en-US" sz="4000" dirty="0"/>
           </a:p>
@@ -10589,7 +11212,7 @@
                 <a:ea typeface="Times New Roman" pitchFamily="34" charset="-122"/>
                 <a:cs typeface="Times New Roman" pitchFamily="34" charset="-120"/>
               </a:rPr>
-              <a:t>Which regional headquarters is on the coast?</a:t>
+              <a:t>Which regional headquarters is a sea port?</a:t>
             </a:r>
             <a:endParaRPr lang="en-US" sz="4000" dirty="0"/>
           </a:p>
@@ -10808,7 +11431,7 @@
                 <a:ea typeface="Times New Roman" pitchFamily="34" charset="-122"/>
                 <a:cs typeface="Times New Roman" pitchFamily="34" charset="-120"/>
               </a:rPr>
-              <a:t>Douala (Littoral); Buea is near the coast at the foot of Mount Cameroon.</a:t>
+              <a:t>Douala, headquarters of the Littoral Region.</a:t>
             </a:r>
             <a:endParaRPr lang="en-US" sz="4000" dirty="0"/>
           </a:p>
@@ -11199,7 +11822,7 @@
                 <a:ea typeface="Times New Roman" pitchFamily="34" charset="-122"/>
                 <a:cs typeface="Times New Roman" pitchFamily="34" charset="-120"/>
               </a:rPr>
-              <a:t>Activity 4: Question</a:t>
+              <a:t>Activity 4: Question 1</a:t>
             </a:r>
             <a:endParaRPr lang="en-US" sz="3600" dirty="0"/>
           </a:p>
@@ -11241,7 +11864,7 @@
                 <a:ea typeface="Times New Roman" pitchFamily="34" charset="-122"/>
                 <a:cs typeface="Times New Roman" pitchFamily="34" charset="-120"/>
               </a:rPr>
-              <a:t>Name the four divisions of the North Region and their headquarters.</a:t>
+              <a:t>How many divisions does the North Region have?</a:t>
             </a:r>
             <a:endParaRPr lang="en-US" sz="4000" dirty="0"/>
           </a:p>
@@ -12062,7 +12685,7 @@
                           <a:ea typeface="Calibri" pitchFamily="34" charset="-122"/>
                           <a:cs typeface="Calibri" pitchFamily="34" charset="-120"/>
                         </a:rPr>
-                        <a:t>Naming the regional and divisional headquarters; locating them on a base map.</a:t>
+                        <a:t>Theoretical basis: naming the regional and divisional headquarters. Practical exercise: locating them on a base map and naming them.</a:t>
                       </a:r>
                       <a:endParaRPr lang="en-US" sz="1700" dirty="0">
                         <a:latin typeface="Calibri" charset="0"/>
@@ -12427,7 +13050,7 @@
                 <a:ea typeface="Times New Roman" pitchFamily="34" charset="-122"/>
                 <a:cs typeface="Times New Roman" pitchFamily="34" charset="-120"/>
               </a:rPr>
-              <a:t>Activity 4: Answer</a:t>
+              <a:t>Activity 4: Answer 1</a:t>
             </a:r>
             <a:endParaRPr lang="en-US" sz="3600" dirty="0"/>
           </a:p>
@@ -12469,7 +13092,7 @@
                 <a:ea typeface="Times New Roman" pitchFamily="34" charset="-122"/>
                 <a:cs typeface="Times New Roman" pitchFamily="34" charset="-120"/>
               </a:rPr>
-              <a:t>Bénoué (Garoua), Faro (Poli), Mayo-Louti (Guider) and Mayo-Rey (Tcholliré).</a:t>
+              <a:t>Four divisions.</a:t>
             </a:r>
             <a:endParaRPr lang="en-US" sz="4000" dirty="0"/>
           </a:p>
@@ -12581,54 +13204,15 @@
                 <a:ea typeface="Calibri" pitchFamily="34" charset="-122"/>
                 <a:cs typeface="Calibri" pitchFamily="34" charset="-120"/>
               </a:rPr>
-              <a:t>4. MAPPING</a:t>
+              <a:t>3. DIVISIONAL HEADQUARTERS</a:t>
             </a:r>
             <a:endParaRPr lang="en-US" sz="1400" dirty="0"/>
-          </a:p>
-        </p:txBody>
-      </p:sp>
-      <p:sp>
-        <p:nvSpPr>
-          <p:cNvPr id="3" name="Text 1"/>
-          <p:cNvSpPr/>
-          <p:nvPr/>
-        </p:nvSpPr>
-        <p:spPr>
-          <a:xfrm>
-            <a:off x="457200" y="1005840"/>
-            <a:ext cx="11277295" cy="731520"/>
-          </a:xfrm>
-          <a:prstGeom prst="rect">
-            <a:avLst/>
-          </a:prstGeom>
-          <a:noFill/>
-          <a:ln/>
-        </p:spPr>
-        <p:txBody>
-          <a:bodyPr wrap="square" lIns="0" tIns="0" rIns="0" bIns="0" rtlCol="0" anchor="ctr"/>
-          <a:lstStyle/>
-          <a:p>
-            <a:pPr algn="ctr" indent="0" marL="0">
-              <a:buNone/>
-            </a:pPr>
-            <a:r>
-              <a:rPr lang="en-US" sz="3600" b="1" dirty="0">
-                <a:solidFill>
-                  <a:srgbClr val="990011"/>
-                </a:solidFill>
-                <a:latin typeface="Times New Roman" pitchFamily="34" charset="0"/>
-                <a:ea typeface="Times New Roman" pitchFamily="34" charset="-122"/>
-                <a:cs typeface="Times New Roman" pitchFamily="34" charset="-120"/>
-              </a:rPr>
-              <a:t>Activity 5</a:t>
-            </a:r>
-            <a:endParaRPr lang="en-US" sz="3600" dirty="0"/>
           </a:p>
         </p:txBody>
       </p:sp>
       <p:pic>
         <p:nvPicPr>
-          <p:cNvPr id="4" name="Image 0" descr="/home/claude/f4/img/v2/map_marginal_big.png">    </p:cNvPr>
+          <p:cNvPr id="3" name="Image 0" descr="/home/claude/f4/img/minesec_sheet.png">    </p:cNvPr>
           <p:cNvPicPr>
             <a:picLocks noChangeAspect="1"/>
           </p:cNvPicPr>
@@ -12642,8 +13226,8 @@
         </p:blipFill>
         <p:spPr>
           <a:xfrm>
-            <a:off x="629930" y="1783080"/>
-            <a:ext cx="10931835" cy="4270248"/>
+            <a:off x="0" y="658368"/>
+            <a:ext cx="5120640" cy="5833872"/>
           </a:xfrm>
           <a:prstGeom prst="rect">
             <a:avLst/>
@@ -12652,14 +13236,14 @@
       </p:pic>
       <p:sp>
         <p:nvSpPr>
-          <p:cNvPr id="5" name="Text 2"/>
+          <p:cNvPr id="4" name="Text 1"/>
           <p:cNvSpPr/>
           <p:nvPr/>
         </p:nvSpPr>
         <p:spPr>
           <a:xfrm>
-            <a:off x="457200" y="6089904"/>
-            <a:ext cx="11277295" cy="347472"/>
+            <a:off x="5349240" y="1005840"/>
+            <a:ext cx="6522415" cy="731520"/>
           </a:xfrm>
           <a:prstGeom prst="rect">
             <a:avLst/>
@@ -12668,24 +13252,68 @@
           <a:ln/>
         </p:spPr>
         <p:txBody>
-          <a:bodyPr wrap="square" lIns="0" tIns="0" rIns="0" bIns="0" rtlCol="0" anchor="ctr"/>
+          <a:bodyPr wrap="square" lIns="0" tIns="0" rIns="0" bIns="0" rtlCol="0" anchor="ctr">
+            <a:normAutofit/>
+          </a:bodyPr>
           <a:lstStyle/>
           <a:p>
             <a:pPr algn="ctr" indent="0" marL="0">
               <a:buNone/>
             </a:pPr>
             <a:r>
-              <a:rPr lang="en-US" sz="1800" i="1" dirty="0">
-                <a:solidFill>
-                  <a:srgbClr val="555555"/>
+              <a:rPr lang="en-US" sz="3600" b="1" dirty="0">
+                <a:solidFill>
+                  <a:srgbClr val="990011"/>
                 </a:solidFill>
                 <a:latin typeface="Times New Roman" pitchFamily="34" charset="0"/>
                 <a:ea typeface="Times New Roman" pitchFamily="34" charset="-122"/>
                 <a:cs typeface="Times New Roman" pitchFamily="34" charset="-120"/>
               </a:rPr>
-              <a:t>Elements of a map.</a:t>
-            </a:r>
-            <a:endParaRPr lang="en-US" sz="1800" dirty="0"/>
+              <a:t>Activity 4: Question 2</a:t>
+            </a:r>
+            <a:endParaRPr lang="en-US" sz="3600" dirty="0"/>
+          </a:p>
+        </p:txBody>
+      </p:sp>
+      <p:sp>
+        <p:nvSpPr>
+          <p:cNvPr id="5" name="Text 2"/>
+          <p:cNvSpPr/>
+          <p:nvPr/>
+        </p:nvSpPr>
+        <p:spPr>
+          <a:xfrm>
+            <a:off x="5349240" y="1783080"/>
+            <a:ext cx="6522415" cy="4663440"/>
+          </a:xfrm>
+          <a:prstGeom prst="rect">
+            <a:avLst/>
+          </a:prstGeom>
+          <a:noFill/>
+          <a:ln/>
+        </p:spPr>
+        <p:txBody>
+          <a:bodyPr wrap="square" lIns="0" tIns="0" rIns="0" bIns="0" rtlCol="0" anchor="t"/>
+          <a:lstStyle/>
+          <a:p>
+            <a:pPr algn="l" indent="0" marL="0">
+              <a:spcAft>
+                <a:spcPts val="800"/>
+              </a:spcAft>
+              <a:buNone/>
+            </a:pPr>
+            <a:r>
+              <a:rPr lang="en-US" sz="4000" dirty="0">
+                <a:solidFill>
+                  <a:srgbClr val="111111"/>
+                </a:solidFill>
+                <a:latin typeface="Times New Roman" pitchFamily="34" charset="0"/>
+                <a:ea typeface="Times New Roman" pitchFamily="34" charset="-122"/>
+                <a:cs typeface="Times New Roman" pitchFamily="34" charset="-120"/>
+              </a:rPr>
+              <a:t>What is the headquarters of the Mayo-Louti division?</a:t>
+            </a:r>
+            <a:endParaRPr lang="en-US" sz="4000" dirty="0"/>
           </a:p>
         </p:txBody>
       </p:sp>
@@ -12795,7 +13423,7 @@
                 <a:ea typeface="Calibri" pitchFamily="34" charset="-122"/>
                 <a:cs typeface="Calibri" pitchFamily="34" charset="-120"/>
               </a:rPr>
-              <a:t>4. MAPPING</a:t>
+              <a:t>3. DIVISIONAL HEADQUARTERS</a:t>
             </a:r>
             <a:endParaRPr lang="en-US" sz="1400" dirty="0"/>
           </a:p>
@@ -12860,7 +13488,7 @@
                 <a:ea typeface="Times New Roman" pitchFamily="34" charset="-122"/>
                 <a:cs typeface="Times New Roman" pitchFamily="34" charset="-120"/>
               </a:rPr>
-              <a:t>Activity 5: Question</a:t>
+              <a:t>Activity 4: Answer 2</a:t>
             </a:r>
             <a:endParaRPr lang="en-US" sz="3600" dirty="0"/>
           </a:p>
@@ -12902,7 +13530,7 @@
                 <a:ea typeface="Times New Roman" pitchFamily="34" charset="-122"/>
                 <a:cs typeface="Times New Roman" pitchFamily="34" charset="-120"/>
               </a:rPr>
-              <a:t>How do we show the headquarters on the base map?</a:t>
+              <a:t>Guider.</a:t>
             </a:r>
             <a:endParaRPr lang="en-US" sz="4000" dirty="0"/>
           </a:p>
@@ -13014,15 +13642,54 @@
                 <a:ea typeface="Calibri" pitchFamily="34" charset="-122"/>
                 <a:cs typeface="Calibri" pitchFamily="34" charset="-120"/>
               </a:rPr>
-              <a:t>4. MAPPING</a:t>
+              <a:t>4. PRACTICAL EXERCISE</a:t>
             </a:r>
             <a:endParaRPr lang="en-US" sz="1400" dirty="0"/>
+          </a:p>
+        </p:txBody>
+      </p:sp>
+      <p:sp>
+        <p:nvSpPr>
+          <p:cNvPr id="3" name="Text 1"/>
+          <p:cNvSpPr/>
+          <p:nvPr/>
+        </p:nvSpPr>
+        <p:spPr>
+          <a:xfrm>
+            <a:off x="457200" y="1005840"/>
+            <a:ext cx="11277295" cy="731520"/>
+          </a:xfrm>
+          <a:prstGeom prst="rect">
+            <a:avLst/>
+          </a:prstGeom>
+          <a:noFill/>
+          <a:ln/>
+        </p:spPr>
+        <p:txBody>
+          <a:bodyPr wrap="square" lIns="0" tIns="0" rIns="0" bIns="0" rtlCol="0" anchor="ctr"/>
+          <a:lstStyle/>
+          <a:p>
+            <a:pPr algn="ctr" indent="0" marL="0">
+              <a:buNone/>
+            </a:pPr>
+            <a:r>
+              <a:rPr lang="en-US" sz="3600" b="1" dirty="0">
+                <a:solidFill>
+                  <a:srgbClr val="990011"/>
+                </a:solidFill>
+                <a:latin typeface="Times New Roman" pitchFamily="34" charset="0"/>
+                <a:ea typeface="Times New Roman" pitchFamily="34" charset="-122"/>
+                <a:cs typeface="Times New Roman" pitchFamily="34" charset="-120"/>
+              </a:rPr>
+              <a:t>Activity 5</a:t>
+            </a:r>
+            <a:endParaRPr lang="en-US" sz="3600" dirty="0"/>
           </a:p>
         </p:txBody>
       </p:sp>
       <p:pic>
         <p:nvPicPr>
-          <p:cNvPr id="3" name="Image 0" descr="/home/claude/f4/img/minesec_sheet.png">    </p:cNvPr>
+          <p:cNvPr id="4" name="Image 0" descr="/home/claude/f4/img/v2/map_marginal_big.png">    </p:cNvPr>
           <p:cNvPicPr>
             <a:picLocks noChangeAspect="1"/>
           </p:cNvPicPr>
@@ -13036,8 +13703,8 @@
         </p:blipFill>
         <p:spPr>
           <a:xfrm>
-            <a:off x="0" y="658368"/>
-            <a:ext cx="5120640" cy="5833872"/>
+            <a:off x="629930" y="1783080"/>
+            <a:ext cx="10931835" cy="4270248"/>
           </a:xfrm>
           <a:prstGeom prst="rect">
             <a:avLst/>
@@ -13046,14 +13713,14 @@
       </p:pic>
       <p:sp>
         <p:nvSpPr>
-          <p:cNvPr id="4" name="Text 1"/>
+          <p:cNvPr id="5" name="Text 2"/>
           <p:cNvSpPr/>
           <p:nvPr/>
         </p:nvSpPr>
         <p:spPr>
           <a:xfrm>
-            <a:off x="5349240" y="1005840"/>
-            <a:ext cx="6522415" cy="731520"/>
+            <a:off x="457200" y="6089904"/>
+            <a:ext cx="11277295" cy="347472"/>
           </a:xfrm>
           <a:prstGeom prst="rect">
             <a:avLst/>
@@ -13062,68 +13729,24 @@
           <a:ln/>
         </p:spPr>
         <p:txBody>
-          <a:bodyPr wrap="square" lIns="0" tIns="0" rIns="0" bIns="0" rtlCol="0" anchor="ctr">
-            <a:normAutofit/>
-          </a:bodyPr>
+          <a:bodyPr wrap="square" lIns="0" tIns="0" rIns="0" bIns="0" rtlCol="0" anchor="ctr"/>
           <a:lstStyle/>
           <a:p>
             <a:pPr algn="ctr" indent="0" marL="0">
               <a:buNone/>
             </a:pPr>
             <a:r>
-              <a:rPr lang="en-US" sz="3600" b="1" dirty="0">
-                <a:solidFill>
-                  <a:srgbClr val="990011"/>
+              <a:rPr lang="en-US" sz="1800" i="1" dirty="0">
+                <a:solidFill>
+                  <a:srgbClr val="555555"/>
                 </a:solidFill>
                 <a:latin typeface="Times New Roman" pitchFamily="34" charset="0"/>
                 <a:ea typeface="Times New Roman" pitchFamily="34" charset="-122"/>
                 <a:cs typeface="Times New Roman" pitchFamily="34" charset="-120"/>
               </a:rPr>
-              <a:t>Activity 5: Answer</a:t>
-            </a:r>
-            <a:endParaRPr lang="en-US" sz="3600" dirty="0"/>
-          </a:p>
-        </p:txBody>
-      </p:sp>
-      <p:sp>
-        <p:nvSpPr>
-          <p:cNvPr id="5" name="Text 2"/>
-          <p:cNvSpPr/>
-          <p:nvPr/>
-        </p:nvSpPr>
-        <p:spPr>
-          <a:xfrm>
-            <a:off x="5349240" y="1783080"/>
-            <a:ext cx="6522415" cy="4663440"/>
-          </a:xfrm>
-          <a:prstGeom prst="rect">
-            <a:avLst/>
-          </a:prstGeom>
-          <a:noFill/>
-          <a:ln/>
-        </p:spPr>
-        <p:txBody>
-          <a:bodyPr wrap="square" lIns="0" tIns="0" rIns="0" bIns="0" rtlCol="0" anchor="t"/>
-          <a:lstStyle/>
-          <a:p>
-            <a:pPr algn="l" indent="0" marL="0">
-              <a:spcAft>
-                <a:spcPts val="800"/>
-              </a:spcAft>
-              <a:buNone/>
-            </a:pPr>
-            <a:r>
-              <a:rPr lang="en-US" sz="4000" dirty="0">
-                <a:solidFill>
-                  <a:srgbClr val="111111"/>
-                </a:solidFill>
-                <a:latin typeface="Times New Roman" pitchFamily="34" charset="0"/>
-                <a:ea typeface="Times New Roman" pitchFamily="34" charset="-122"/>
-                <a:cs typeface="Times New Roman" pitchFamily="34" charset="-120"/>
-              </a:rPr>
-              <a:t>With a star for regional and a dot for divisional headquarters, named, with a key, title and north arrow.</a:t>
-            </a:r>
-            <a:endParaRPr lang="en-US" sz="4000" dirty="0"/>
+              <a:t>Elements of a map.</a:t>
+            </a:r>
+            <a:endParaRPr lang="en-US" sz="1800" dirty="0"/>
           </a:p>
         </p:txBody>
       </p:sp>
@@ -13233,7 +13856,7 @@
                 <a:ea typeface="Calibri" pitchFamily="34" charset="-122"/>
                 <a:cs typeface="Calibri" pitchFamily="34" charset="-120"/>
               </a:rPr>
-              <a:t>BOARD SUMMARY</a:t>
+              <a:t>4. PRACTICAL EXERCISE</a:t>
             </a:r>
             <a:endParaRPr lang="en-US" sz="1400" dirty="0"/>
           </a:p>
@@ -13298,7 +13921,7 @@
                 <a:ea typeface="Times New Roman" pitchFamily="34" charset="-122"/>
                 <a:cs typeface="Times New Roman" pitchFamily="34" charset="-120"/>
               </a:rPr>
-              <a:t>Board Summary</a:t>
+              <a:t>Activity 5: Question</a:t>
             </a:r>
             <a:endParaRPr lang="en-US" sz="3600" dirty="0"/>
           </a:p>
@@ -13332,7 +13955,7 @@
               <a:buNone/>
             </a:pPr>
             <a:r>
-              <a:rPr lang="en-US" sz="4000" b="1" dirty="0">
+              <a:rPr lang="en-US" sz="4000" dirty="0">
                 <a:solidFill>
                   <a:srgbClr val="111111"/>
                 </a:solidFill>
@@ -13340,47 +13963,7 @@
                 <a:ea typeface="Times New Roman" pitchFamily="34" charset="-122"/>
                 <a:cs typeface="Times New Roman" pitchFamily="34" charset="-120"/>
               </a:rPr>
-              <a:t>Topic: Space Occupation</a:t>
-            </a:r>
-            <a:endParaRPr lang="en-US" sz="4000" dirty="0"/>
-          </a:p>
-          <a:p>
-            <a:pPr algn="l" indent="0" marL="0">
-              <a:spcAft>
-                <a:spcPts val="800"/>
-              </a:spcAft>
-              <a:buNone/>
-            </a:pPr>
-            <a:r>
-              <a:rPr lang="en-US" sz="4000" b="1" dirty="0">
-                <a:solidFill>
-                  <a:srgbClr val="111111"/>
-                </a:solidFill>
-                <a:latin typeface="Times New Roman" pitchFamily="34" charset="0"/>
-                <a:ea typeface="Times New Roman" pitchFamily="34" charset="-122"/>
-                <a:cs typeface="Times New Roman" pitchFamily="34" charset="-120"/>
-              </a:rPr>
-              <a:t>Sub-topic: Towns and Country Sides of Africa</a:t>
-            </a:r>
-            <a:endParaRPr lang="en-US" sz="4000" dirty="0"/>
-          </a:p>
-          <a:p>
-            <a:pPr algn="l" indent="0" marL="0">
-              <a:spcAft>
-                <a:spcPts val="800"/>
-              </a:spcAft>
-              <a:buNone/>
-            </a:pPr>
-            <a:r>
-              <a:rPr lang="en-US" sz="4000" b="1" dirty="0">
-                <a:solidFill>
-                  <a:srgbClr val="990011"/>
-                </a:solidFill>
-                <a:latin typeface="Times New Roman" pitchFamily="34" charset="0"/>
-                <a:ea typeface="Times New Roman" pitchFamily="34" charset="-122"/>
-                <a:cs typeface="Times New Roman" pitchFamily="34" charset="-120"/>
-              </a:rPr>
-              <a:t>Practical Work 4: Location of the Regional and Divisional Headquarters of Cameroon</a:t>
+              <a:t>How can we show the difference between a regional and a divisional headquarters on the base map?</a:t>
             </a:r>
             <a:endParaRPr lang="en-US" sz="4000" dirty="0"/>
           </a:p>
@@ -13492,7 +14075,7 @@
                 <a:ea typeface="Calibri" pitchFamily="34" charset="-122"/>
                 <a:cs typeface="Calibri" pitchFamily="34" charset="-120"/>
               </a:rPr>
-              <a:t>BOARD SUMMARY</a:t>
+              <a:t>4. PRACTICAL EXERCISE</a:t>
             </a:r>
             <a:endParaRPr lang="en-US" sz="1400" dirty="0"/>
           </a:p>
@@ -13515,7 +14098,7 @@
         <p:spPr>
           <a:xfrm>
             <a:off x="0" y="658368"/>
-            <a:ext cx="1463040" cy="5833872"/>
+            <a:ext cx="5120640" cy="5833872"/>
           </a:xfrm>
           <a:prstGeom prst="rect">
             <a:avLst/>
@@ -13530,8 +14113,8 @@
         </p:nvSpPr>
         <p:spPr>
           <a:xfrm>
-            <a:off x="1691640" y="1005840"/>
-            <a:ext cx="10180015" cy="731520"/>
+            <a:off x="5349240" y="1005840"/>
+            <a:ext cx="6522415" cy="731520"/>
           </a:xfrm>
           <a:prstGeom prst="rect">
             <a:avLst/>
@@ -13557,7 +14140,7 @@
                 <a:ea typeface="Times New Roman" pitchFamily="34" charset="-122"/>
                 <a:cs typeface="Times New Roman" pitchFamily="34" charset="-120"/>
               </a:rPr>
-              <a:t>DEFINITIONS</a:t>
+              <a:t>Activity 5: Answer</a:t>
             </a:r>
             <a:endParaRPr lang="en-US" sz="3600" dirty="0"/>
           </a:p>
@@ -13571,8 +14154,8 @@
         </p:nvSpPr>
         <p:spPr>
           <a:xfrm>
-            <a:off x="1691640" y="1783080"/>
-            <a:ext cx="10180015" cy="4663440"/>
+            <a:off x="5349240" y="1783080"/>
+            <a:ext cx="6522415" cy="4663440"/>
           </a:xfrm>
           <a:prstGeom prst="rect">
             <a:avLst/>
@@ -13591,7 +14174,7 @@
               <a:buNone/>
             </a:pPr>
             <a:r>
-              <a:rPr lang="en-US" sz="4000" i="1" dirty="0">
+              <a:rPr lang="en-US" sz="4000" dirty="0">
                 <a:solidFill>
                   <a:srgbClr val="111111"/>
                 </a:solidFill>
@@ -13599,81 +14182,7 @@
                 <a:ea typeface="Times New Roman" pitchFamily="34" charset="-122"/>
                 <a:cs typeface="Times New Roman" pitchFamily="34" charset="-120"/>
               </a:rPr>
-              <a:t>The key terms of this lesson are defined as follows:</a:t>
-            </a:r>
-            <a:endParaRPr lang="en-US" sz="4000" dirty="0"/>
-          </a:p>
-          <a:p>
-            <a:pPr algn="l" indent="0" marL="0">
-              <a:spcAft>
-                <a:spcPts val="800"/>
-              </a:spcAft>
-              <a:buNone/>
-            </a:pPr>
-            <a:r>
-              <a:rPr lang="en-US" sz="4000" b="1" dirty="0">
-                <a:solidFill>
-                  <a:srgbClr val="111111"/>
-                </a:solidFill>
-                <a:latin typeface="Times New Roman" pitchFamily="34" charset="0"/>
-                <a:ea typeface="Times New Roman" pitchFamily="34" charset="-122"/>
-                <a:cs typeface="Times New Roman" pitchFamily="34" charset="-120"/>
-              </a:rPr>
-              <a:t>Regional headquarters: </a:t>
-            </a:r>
-            <a:pPr algn="l" indent="0" marL="0">
-              <a:spcAft>
-                <a:spcPts val="800"/>
-              </a:spcAft>
-              <a:buNone/>
-            </a:pPr>
-            <a:r>
-              <a:rPr lang="en-US" sz="4000" dirty="0">
-                <a:solidFill>
-                  <a:srgbClr val="111111"/>
-                </a:solidFill>
-                <a:latin typeface="Times New Roman" pitchFamily="34" charset="0"/>
-                <a:ea typeface="Times New Roman" pitchFamily="34" charset="-122"/>
-                <a:cs typeface="Times New Roman" pitchFamily="34" charset="-120"/>
-              </a:rPr>
-              <a:t>It is the town where the administration of a region is found.</a:t>
-            </a:r>
-            <a:endParaRPr lang="en-US" sz="4000" dirty="0"/>
-          </a:p>
-          <a:p>
-            <a:pPr algn="l" indent="0" marL="0">
-              <a:spcAft>
-                <a:spcPts val="800"/>
-              </a:spcAft>
-              <a:buNone/>
-            </a:pPr>
-            <a:r>
-              <a:rPr lang="en-US" sz="4000" b="1" dirty="0">
-                <a:solidFill>
-                  <a:srgbClr val="111111"/>
-                </a:solidFill>
-                <a:latin typeface="Times New Roman" pitchFamily="34" charset="0"/>
-                <a:ea typeface="Times New Roman" pitchFamily="34" charset="-122"/>
-                <a:cs typeface="Times New Roman" pitchFamily="34" charset="-120"/>
-              </a:rPr>
-              <a:t>Divisional headquarters: </a:t>
-            </a:r>
-            <a:pPr algn="l" indent="0" marL="0">
-              <a:spcAft>
-                <a:spcPts val="800"/>
-              </a:spcAft>
-              <a:buNone/>
-            </a:pPr>
-            <a:r>
-              <a:rPr lang="en-US" sz="4000" dirty="0">
-                <a:solidFill>
-                  <a:srgbClr val="111111"/>
-                </a:solidFill>
-                <a:latin typeface="Times New Roman" pitchFamily="34" charset="0"/>
-                <a:ea typeface="Times New Roman" pitchFamily="34" charset="-122"/>
-                <a:cs typeface="Times New Roman" pitchFamily="34" charset="-120"/>
-              </a:rPr>
-              <a:t>It is the town where the administration of a division is found.</a:t>
+              <a:t>With two different symbols explained in the key, for example a star and a dot.</a:t>
             </a:r>
             <a:endParaRPr lang="en-US" sz="4000" dirty="0"/>
           </a:p>
@@ -13808,7 +14317,7 @@
         <p:spPr>
           <a:xfrm>
             <a:off x="0" y="658368"/>
-            <a:ext cx="3840480" cy="5833872"/>
+            <a:ext cx="5120640" cy="5833872"/>
           </a:xfrm>
           <a:prstGeom prst="rect">
             <a:avLst/>
@@ -13823,8 +14332,8 @@
         </p:nvSpPr>
         <p:spPr>
           <a:xfrm>
-            <a:off x="4069080" y="1005840"/>
-            <a:ext cx="7802575" cy="731520"/>
+            <a:off x="5349240" y="1005840"/>
+            <a:ext cx="6522415" cy="731520"/>
           </a:xfrm>
           <a:prstGeom prst="rect">
             <a:avLst/>
@@ -13850,7 +14359,7 @@
                 <a:ea typeface="Times New Roman" pitchFamily="34" charset="-122"/>
                 <a:cs typeface="Times New Roman" pitchFamily="34" charset="-120"/>
               </a:rPr>
-              <a:t>1. Regional Headquarters of Cameroon</a:t>
+              <a:t>Board Summary</a:t>
             </a:r>
             <a:endParaRPr lang="en-US" sz="3600" dirty="0"/>
           </a:p>
@@ -13864,8 +14373,8 @@
         </p:nvSpPr>
         <p:spPr>
           <a:xfrm>
-            <a:off x="4069080" y="1783080"/>
-            <a:ext cx="7802575" cy="4663440"/>
+            <a:off x="5349240" y="1783080"/>
+            <a:ext cx="6522415" cy="4663440"/>
           </a:xfrm>
           <a:prstGeom prst="rect">
             <a:avLst/>
@@ -13884,7 +14393,7 @@
               <a:buNone/>
             </a:pPr>
             <a:r>
-              <a:rPr lang="en-US" sz="4000" i="1" dirty="0">
+              <a:rPr lang="en-US" sz="4000" b="1" dirty="0">
                 <a:solidFill>
                   <a:srgbClr val="111111"/>
                 </a:solidFill>
@@ -13892,7 +14401,7 @@
                 <a:ea typeface="Times New Roman" pitchFamily="34" charset="-122"/>
                 <a:cs typeface="Times New Roman" pitchFamily="34" charset="-120"/>
               </a:rPr>
-              <a:t>The ten regions and their headquarters are the following:</a:t>
+              <a:t>Topic: Space Occupation</a:t>
             </a:r>
             <a:endParaRPr lang="en-US" sz="4000" dirty="0"/>
           </a:p>
@@ -13912,8 +14421,11 @@
                 <a:ea typeface="Times New Roman" pitchFamily="34" charset="-122"/>
                 <a:cs typeface="Times New Roman" pitchFamily="34" charset="-120"/>
               </a:rPr>
-              <a:t>North and Far North: </a:t>
-            </a:r>
+              <a:t>Sub-topic: Towns and Country Sides of Africa</a:t>
+            </a:r>
+            <a:endParaRPr lang="en-US" sz="4000" dirty="0"/>
+          </a:p>
+          <a:p>
             <a:pPr algn="l" indent="0" marL="0">
               <a:spcAft>
                 <a:spcPts val="800"/>
@@ -13921,52 +14433,15 @@
               <a:buNone/>
             </a:pPr>
             <a:r>
-              <a:rPr lang="en-US" sz="4000" dirty="0">
-                <a:solidFill>
-                  <a:srgbClr val="111111"/>
+              <a:rPr lang="en-US" sz="4000" b="1" dirty="0">
+                <a:solidFill>
+                  <a:srgbClr val="990011"/>
                 </a:solidFill>
                 <a:latin typeface="Times New Roman" pitchFamily="34" charset="0"/>
                 <a:ea typeface="Times New Roman" pitchFamily="34" charset="-122"/>
                 <a:cs typeface="Times New Roman" pitchFamily="34" charset="-120"/>
               </a:rPr>
-              <a:t>Garoua (North) and Maroua (Far North).</a:t>
-            </a:r>
-            <a:endParaRPr lang="en-US" sz="4000" dirty="0"/>
-          </a:p>
-          <a:p>
-            <a:pPr algn="l" indent="0" marL="0">
-              <a:spcAft>
-                <a:spcPts val="800"/>
-              </a:spcAft>
-              <a:buNone/>
-            </a:pPr>
-            <a:r>
-              <a:rPr lang="en-US" sz="4000" b="1" dirty="0">
-                <a:solidFill>
-                  <a:srgbClr val="111111"/>
-                </a:solidFill>
-                <a:latin typeface="Times New Roman" pitchFamily="34" charset="0"/>
-                <a:ea typeface="Times New Roman" pitchFamily="34" charset="-122"/>
-                <a:cs typeface="Times New Roman" pitchFamily="34" charset="-120"/>
-              </a:rPr>
-              <a:t>Adamawa and East: </a:t>
-            </a:r>
-            <a:pPr algn="l" indent="0" marL="0">
-              <a:spcAft>
-                <a:spcPts val="800"/>
-              </a:spcAft>
-              <a:buNone/>
-            </a:pPr>
-            <a:r>
-              <a:rPr lang="en-US" sz="4000" dirty="0">
-                <a:solidFill>
-                  <a:srgbClr val="111111"/>
-                </a:solidFill>
-                <a:latin typeface="Times New Roman" pitchFamily="34" charset="0"/>
-                <a:ea typeface="Times New Roman" pitchFamily="34" charset="-122"/>
-                <a:cs typeface="Times New Roman" pitchFamily="34" charset="-120"/>
-              </a:rPr>
-              <a:t>Ngaoundéré (Adamawa) and Bertoua (East).</a:t>
+              <a:t>Practical Work 4: Location of the Regional and Divisional Headquarters of Cameroon</a:t>
             </a:r>
             <a:endParaRPr lang="en-US" sz="4000" dirty="0"/>
           </a:p>
@@ -14101,7 +14576,7 @@
         <p:spPr>
           <a:xfrm>
             <a:off x="0" y="658368"/>
-            <a:ext cx="3840480" cy="5833872"/>
+            <a:ext cx="2468880" cy="5833872"/>
           </a:xfrm>
           <a:prstGeom prst="rect">
             <a:avLst/>
@@ -14116,8 +14591,8 @@
         </p:nvSpPr>
         <p:spPr>
           <a:xfrm>
-            <a:off x="4069080" y="1005840"/>
-            <a:ext cx="7802575" cy="731520"/>
+            <a:off x="2697480" y="1005840"/>
+            <a:ext cx="9174175" cy="731520"/>
           </a:xfrm>
           <a:prstGeom prst="rect">
             <a:avLst/>
@@ -14143,7 +14618,7 @@
                 <a:ea typeface="Times New Roman" pitchFamily="34" charset="-122"/>
                 <a:cs typeface="Times New Roman" pitchFamily="34" charset="-120"/>
               </a:rPr>
-              <a:t>1. Regional Headquarters of Cameroon (continued)</a:t>
+              <a:t>DEFINITIONS</a:t>
             </a:r>
             <a:endParaRPr lang="en-US" sz="3600" dirty="0"/>
           </a:p>
@@ -14157,8 +14632,8 @@
         </p:nvSpPr>
         <p:spPr>
           <a:xfrm>
-            <a:off x="4069080" y="1783080"/>
-            <a:ext cx="7802575" cy="4663440"/>
+            <a:off x="2697480" y="1783080"/>
+            <a:ext cx="9174175" cy="4663440"/>
           </a:xfrm>
           <a:prstGeom prst="rect">
             <a:avLst/>
@@ -14177,7 +14652,7 @@
               <a:buNone/>
             </a:pPr>
             <a:r>
-              <a:rPr lang="en-US" sz="4000" b="1" dirty="0">
+              <a:rPr lang="en-US" sz="4000" i="1" dirty="0">
                 <a:solidFill>
                   <a:srgbClr val="111111"/>
                 </a:solidFill>
@@ -14185,8 +14660,11 @@
                 <a:ea typeface="Times New Roman" pitchFamily="34" charset="-122"/>
                 <a:cs typeface="Times New Roman" pitchFamily="34" charset="-120"/>
               </a:rPr>
-              <a:t>Centre and South: </a:t>
-            </a:r>
+              <a:t>The key terms of this lesson are defined as follows:</a:t>
+            </a:r>
+            <a:endParaRPr lang="en-US" sz="4000" dirty="0"/>
+          </a:p>
+          <a:p>
             <a:pPr algn="l" indent="0" marL="0">
               <a:spcAft>
                 <a:spcPts val="800"/>
@@ -14194,7 +14672,7 @@
               <a:buNone/>
             </a:pPr>
             <a:r>
-              <a:rPr lang="en-US" sz="4000" dirty="0">
+              <a:rPr lang="en-US" sz="4000" b="1" dirty="0">
                 <a:solidFill>
                   <a:srgbClr val="111111"/>
                 </a:solidFill>
@@ -14202,11 +14680,8 @@
                 <a:ea typeface="Times New Roman" pitchFamily="34" charset="-122"/>
                 <a:cs typeface="Times New Roman" pitchFamily="34" charset="-120"/>
               </a:rPr>
-              <a:t>Yaoundé (Centre) and Ebolowa (South).</a:t>
-            </a:r>
-            <a:endParaRPr lang="en-US" sz="4000" dirty="0"/>
-          </a:p>
-          <a:p>
+              <a:t>Region: </a:t>
+            </a:r>
             <a:pPr algn="l" indent="0" marL="0">
               <a:spcAft>
                 <a:spcPts val="800"/>
@@ -14214,7 +14689,7 @@
               <a:buNone/>
             </a:pPr>
             <a:r>
-              <a:rPr lang="en-US" sz="4000" b="1" dirty="0">
+              <a:rPr lang="en-US" sz="4000" dirty="0">
                 <a:solidFill>
                   <a:srgbClr val="111111"/>
                 </a:solidFill>
@@ -14222,8 +14697,11 @@
                 <a:ea typeface="Times New Roman" pitchFamily="34" charset="-122"/>
                 <a:cs typeface="Times New Roman" pitchFamily="34" charset="-120"/>
               </a:rPr>
-              <a:t>Littoral and South-West: </a:t>
-            </a:r>
+              <a:t>It is the largest administrative unit of Cameroon, headed by a Governor.</a:t>
+            </a:r>
+            <a:endParaRPr lang="en-US" sz="4000" dirty="0"/>
+          </a:p>
+          <a:p>
             <a:pPr algn="l" indent="0" marL="0">
               <a:spcAft>
                 <a:spcPts val="800"/>
@@ -14231,7 +14709,7 @@
               <a:buNone/>
             </a:pPr>
             <a:r>
-              <a:rPr lang="en-US" sz="4000" dirty="0">
+              <a:rPr lang="en-US" sz="4000" b="1" dirty="0">
                 <a:solidFill>
                   <a:srgbClr val="111111"/>
                 </a:solidFill>
@@ -14239,11 +14717,8 @@
                 <a:ea typeface="Times New Roman" pitchFamily="34" charset="-122"/>
                 <a:cs typeface="Times New Roman" pitchFamily="34" charset="-120"/>
               </a:rPr>
-              <a:t>Douala (Littoral) and Buea (South-West).</a:t>
-            </a:r>
-            <a:endParaRPr lang="en-US" sz="4000" dirty="0"/>
-          </a:p>
-          <a:p>
+              <a:t>Division: </a:t>
+            </a:r>
             <a:pPr algn="l" indent="0" marL="0">
               <a:spcAft>
                 <a:spcPts val="800"/>
@@ -14251,7 +14726,7 @@
               <a:buNone/>
             </a:pPr>
             <a:r>
-              <a:rPr lang="en-US" sz="4000" b="1" dirty="0">
+              <a:rPr lang="en-US" sz="4000" dirty="0">
                 <a:solidFill>
                   <a:srgbClr val="111111"/>
                 </a:solidFill>
@@ -14259,24 +14734,7 @@
                 <a:ea typeface="Times New Roman" pitchFamily="34" charset="-122"/>
                 <a:cs typeface="Times New Roman" pitchFamily="34" charset="-120"/>
               </a:rPr>
-              <a:t>West and North-West: </a:t>
-            </a:r>
-            <a:pPr algn="l" indent="0" marL="0">
-              <a:spcAft>
-                <a:spcPts val="800"/>
-              </a:spcAft>
-              <a:buNone/>
-            </a:pPr>
-            <a:r>
-              <a:rPr lang="en-US" sz="4000" dirty="0">
-                <a:solidFill>
-                  <a:srgbClr val="111111"/>
-                </a:solidFill>
-                <a:latin typeface="Times New Roman" pitchFamily="34" charset="0"/>
-                <a:ea typeface="Times New Roman" pitchFamily="34" charset="-122"/>
-                <a:cs typeface="Times New Roman" pitchFamily="34" charset="-120"/>
-              </a:rPr>
-              <a:t>Bafoussam (West) and Bamenda (North-West).</a:t>
+              <a:t>It is an administrative unit inside a region, headed by a Senior Divisional Officer (SDO).</a:t>
             </a:r>
             <a:endParaRPr lang="en-US" sz="4000" dirty="0"/>
           </a:p>
@@ -14394,48 +14852,9 @@
           </a:p>
         </p:txBody>
       </p:sp>
-      <p:sp>
-        <p:nvSpPr>
-          <p:cNvPr id="3" name="Text 1"/>
-          <p:cNvSpPr/>
-          <p:nvPr/>
-        </p:nvSpPr>
-        <p:spPr>
-          <a:xfrm>
-            <a:off x="457200" y="1005840"/>
-            <a:ext cx="11277295" cy="731520"/>
-          </a:xfrm>
-          <a:prstGeom prst="rect">
-            <a:avLst/>
-          </a:prstGeom>
-          <a:noFill/>
-          <a:ln/>
-        </p:spPr>
-        <p:txBody>
-          <a:bodyPr wrap="square" lIns="0" tIns="0" rIns="0" bIns="0" rtlCol="0" anchor="ctr"/>
-          <a:lstStyle/>
-          <a:p>
-            <a:pPr algn="ctr" indent="0" marL="0">
-              <a:buNone/>
-            </a:pPr>
-            <a:r>
-              <a:rPr lang="en-US" sz="3600" b="1" dirty="0">
-                <a:solidFill>
-                  <a:srgbClr val="990011"/>
-                </a:solidFill>
-                <a:latin typeface="Times New Roman" pitchFamily="34" charset="0"/>
-                <a:ea typeface="Times New Roman" pitchFamily="34" charset="-122"/>
-                <a:cs typeface="Times New Roman" pitchFamily="34" charset="-120"/>
-              </a:rPr>
-              <a:t>1. Regional Headquarters of Cameroon</a:t>
-            </a:r>
-            <a:endParaRPr lang="en-US" sz="3600" dirty="0"/>
-          </a:p>
-        </p:txBody>
-      </p:sp>
       <p:pic>
         <p:nvPicPr>
-          <p:cNvPr id="4" name="Image 0" descr="/home/claude/f4/img/v2/cmr_regions_big.png">    </p:cNvPr>
+          <p:cNvPr id="3" name="Image 0" descr="/home/claude/f4/img/minesec_sheet.png">    </p:cNvPr>
           <p:cNvPicPr>
             <a:picLocks noChangeAspect="1"/>
           </p:cNvPicPr>
@@ -14449,8 +14868,8 @@
         </p:blipFill>
         <p:spPr>
           <a:xfrm>
-            <a:off x="2191621" y="1783080"/>
-            <a:ext cx="7808453" cy="4270248"/>
+            <a:off x="0" y="658368"/>
+            <a:ext cx="3840480" cy="5833872"/>
           </a:xfrm>
           <a:prstGeom prst="rect">
             <a:avLst/>
@@ -14459,14 +14878,14 @@
       </p:pic>
       <p:sp>
         <p:nvSpPr>
-          <p:cNvPr id="5" name="Text 2"/>
+          <p:cNvPr id="4" name="Text 1"/>
           <p:cNvSpPr/>
           <p:nvPr/>
         </p:nvSpPr>
         <p:spPr>
           <a:xfrm>
-            <a:off x="457200" y="6089904"/>
-            <a:ext cx="11277295" cy="347472"/>
+            <a:off x="4069080" y="1005840"/>
+            <a:ext cx="7802575" cy="731520"/>
           </a:xfrm>
           <a:prstGeom prst="rect">
             <a:avLst/>
@@ -14475,24 +14894,122 @@
           <a:ln/>
         </p:spPr>
         <p:txBody>
-          <a:bodyPr wrap="square" lIns="0" tIns="0" rIns="0" bIns="0" rtlCol="0" anchor="ctr"/>
+          <a:bodyPr wrap="square" lIns="0" tIns="0" rIns="0" bIns="0" rtlCol="0" anchor="ctr">
+            <a:normAutofit/>
+          </a:bodyPr>
           <a:lstStyle/>
           <a:p>
             <a:pPr algn="ctr" indent="0" marL="0">
               <a:buNone/>
             </a:pPr>
             <a:r>
-              <a:rPr lang="en-US" sz="1800" i="1" dirty="0">
-                <a:solidFill>
-                  <a:srgbClr val="555555"/>
+              <a:rPr lang="en-US" sz="3600" b="1" dirty="0">
+                <a:solidFill>
+                  <a:srgbClr val="990011"/>
                 </a:solidFill>
                 <a:latin typeface="Times New Roman" pitchFamily="34" charset="0"/>
                 <a:ea typeface="Times New Roman" pitchFamily="34" charset="-122"/>
                 <a:cs typeface="Times New Roman" pitchFamily="34" charset="-120"/>
               </a:rPr>
-              <a:t>Illustration: regions and regional headquarters</a:t>
-            </a:r>
-            <a:endParaRPr lang="en-US" sz="1800" dirty="0"/>
+              <a:t>DEFINITIONS (continued)</a:t>
+            </a:r>
+            <a:endParaRPr lang="en-US" sz="3600" dirty="0"/>
+          </a:p>
+        </p:txBody>
+      </p:sp>
+      <p:sp>
+        <p:nvSpPr>
+          <p:cNvPr id="5" name="Text 2"/>
+          <p:cNvSpPr/>
+          <p:nvPr/>
+        </p:nvSpPr>
+        <p:spPr>
+          <a:xfrm>
+            <a:off x="4069080" y="1783080"/>
+            <a:ext cx="7802575" cy="4663440"/>
+          </a:xfrm>
+          <a:prstGeom prst="rect">
+            <a:avLst/>
+          </a:prstGeom>
+          <a:noFill/>
+          <a:ln/>
+        </p:spPr>
+        <p:txBody>
+          <a:bodyPr wrap="square" lIns="0" tIns="0" rIns="0" bIns="0" rtlCol="0" anchor="t"/>
+          <a:lstStyle/>
+          <a:p>
+            <a:pPr algn="l" indent="0" marL="0">
+              <a:spcAft>
+                <a:spcPts val="800"/>
+              </a:spcAft>
+              <a:buNone/>
+            </a:pPr>
+            <a:r>
+              <a:rPr lang="en-US" sz="4000" b="1" dirty="0">
+                <a:solidFill>
+                  <a:srgbClr val="111111"/>
+                </a:solidFill>
+                <a:latin typeface="Times New Roman" pitchFamily="34" charset="0"/>
+                <a:ea typeface="Times New Roman" pitchFamily="34" charset="-122"/>
+                <a:cs typeface="Times New Roman" pitchFamily="34" charset="-120"/>
+              </a:rPr>
+              <a:t>Regional headquarters: </a:t>
+            </a:r>
+            <a:pPr algn="l" indent="0" marL="0">
+              <a:spcAft>
+                <a:spcPts val="800"/>
+              </a:spcAft>
+              <a:buNone/>
+            </a:pPr>
+            <a:r>
+              <a:rPr lang="en-US" sz="4000" dirty="0">
+                <a:solidFill>
+                  <a:srgbClr val="111111"/>
+                </a:solidFill>
+                <a:latin typeface="Times New Roman" pitchFamily="34" charset="0"/>
+                <a:ea typeface="Times New Roman" pitchFamily="34" charset="-122"/>
+                <a:cs typeface="Times New Roman" pitchFamily="34" charset="-120"/>
+              </a:rPr>
+              <a:t>It is the town where the administration of a region is found.</a:t>
+            </a:r>
+            <a:endParaRPr lang="en-US" sz="4000" dirty="0"/>
+          </a:p>
+          <a:p>
+            <a:pPr algn="l" indent="0" marL="0">
+              <a:spcAft>
+                <a:spcPts val="800"/>
+              </a:spcAft>
+              <a:buNone/>
+            </a:pPr>
+            <a:r>
+              <a:rPr lang="en-US" sz="4000" b="1" dirty="0">
+                <a:solidFill>
+                  <a:srgbClr val="111111"/>
+                </a:solidFill>
+                <a:latin typeface="Times New Roman" pitchFamily="34" charset="0"/>
+                <a:ea typeface="Times New Roman" pitchFamily="34" charset="-122"/>
+                <a:cs typeface="Times New Roman" pitchFamily="34" charset="-120"/>
+              </a:rPr>
+              <a:t>Divisional headquarters: </a:t>
+            </a:r>
+            <a:pPr algn="l" indent="0" marL="0">
+              <a:spcAft>
+                <a:spcPts val="800"/>
+              </a:spcAft>
+              <a:buNone/>
+            </a:pPr>
+            <a:r>
+              <a:rPr lang="en-US" sz="4000" dirty="0">
+                <a:solidFill>
+                  <a:srgbClr val="111111"/>
+                </a:solidFill>
+                <a:latin typeface="Times New Roman" pitchFamily="34" charset="0"/>
+                <a:ea typeface="Times New Roman" pitchFamily="34" charset="-122"/>
+                <a:cs typeface="Times New Roman" pitchFamily="34" charset="-120"/>
+              </a:rPr>
+              <a:t>It is the town where the administration of a division is found.</a:t>
+            </a:r>
+            <a:endParaRPr lang="en-US" sz="4000" dirty="0"/>
           </a:p>
         </p:txBody>
       </p:sp>
@@ -14608,9 +15125,170 @@
           </a:p>
         </p:txBody>
       </p:sp>
+      <p:sp>
+        <p:nvSpPr>
+          <p:cNvPr id="3" name="Text 1"/>
+          <p:cNvSpPr/>
+          <p:nvPr/>
+        </p:nvSpPr>
+        <p:spPr>
+          <a:xfrm>
+            <a:off x="365760" y="1005840"/>
+            <a:ext cx="11460175" cy="731520"/>
+          </a:xfrm>
+          <a:prstGeom prst="rect">
+            <a:avLst/>
+          </a:prstGeom>
+          <a:noFill/>
+          <a:ln/>
+        </p:spPr>
+        <p:txBody>
+          <a:bodyPr wrap="square" lIns="0" tIns="0" rIns="0" bIns="0" rtlCol="0" anchor="ctr">
+            <a:normAutofit/>
+          </a:bodyPr>
+          <a:lstStyle/>
+          <a:p>
+            <a:pPr algn="ctr" indent="0" marL="0">
+              <a:buNone/>
+            </a:pPr>
+            <a:r>
+              <a:rPr lang="en-US" sz="3600" b="1" dirty="0">
+                <a:solidFill>
+                  <a:srgbClr val="990011"/>
+                </a:solidFill>
+                <a:latin typeface="Times New Roman" pitchFamily="34" charset="0"/>
+                <a:ea typeface="Times New Roman" pitchFamily="34" charset="-122"/>
+                <a:cs typeface="Times New Roman" pitchFamily="34" charset="-120"/>
+              </a:rPr>
+              <a:t>1. Theoretical Basis</a:t>
+            </a:r>
+            <a:endParaRPr lang="en-US" sz="3600" dirty="0"/>
+          </a:p>
+        </p:txBody>
+      </p:sp>
+      <p:sp>
+        <p:nvSpPr>
+          <p:cNvPr id="4" name="Text 2"/>
+          <p:cNvSpPr/>
+          <p:nvPr/>
+        </p:nvSpPr>
+        <p:spPr>
+          <a:xfrm>
+            <a:off x="365760" y="1737360"/>
+            <a:ext cx="5120640" cy="457200"/>
+          </a:xfrm>
+          <a:prstGeom prst="rect">
+            <a:avLst/>
+          </a:prstGeom>
+          <a:noFill/>
+          <a:ln/>
+        </p:spPr>
+        <p:txBody>
+          <a:bodyPr wrap="square" lIns="0" tIns="0" rIns="0" bIns="0" rtlCol="0" anchor="ctr">
+            <a:normAutofit/>
+          </a:bodyPr>
+          <a:lstStyle/>
+          <a:p>
+            <a:pPr algn="l" indent="0" marL="0">
+              <a:buNone/>
+            </a:pPr>
+            <a:r>
+              <a:rPr lang="en-US" sz="3000" b="1" dirty="0">
+                <a:solidFill>
+                  <a:srgbClr val="990011"/>
+                </a:solidFill>
+                <a:latin typeface="Times New Roman" pitchFamily="34" charset="0"/>
+                <a:ea typeface="Times New Roman" pitchFamily="34" charset="-122"/>
+                <a:cs typeface="Times New Roman" pitchFamily="34" charset="-120"/>
+              </a:rPr>
+              <a:t>A) The Regional Headquarters of Cameroon</a:t>
+            </a:r>
+            <a:endParaRPr lang="en-US" sz="3000" dirty="0"/>
+          </a:p>
+        </p:txBody>
+      </p:sp>
+      <p:sp>
+        <p:nvSpPr>
+          <p:cNvPr id="5" name="Text 3"/>
+          <p:cNvSpPr/>
+          <p:nvPr/>
+        </p:nvSpPr>
+        <p:spPr>
+          <a:xfrm>
+            <a:off x="365760" y="2240280"/>
+            <a:ext cx="4846320" cy="4160520"/>
+          </a:xfrm>
+          <a:prstGeom prst="rect">
+            <a:avLst/>
+          </a:prstGeom>
+          <a:noFill/>
+          <a:ln/>
+        </p:spPr>
+        <p:txBody>
+          <a:bodyPr wrap="square" lIns="0" tIns="0" rIns="0" bIns="0" rtlCol="0" anchor="t"/>
+          <a:lstStyle/>
+          <a:p>
+            <a:pPr algn="l" indent="0" marL="0">
+              <a:spcAft>
+                <a:spcPts val="800"/>
+              </a:spcAft>
+              <a:buNone/>
+            </a:pPr>
+            <a:r>
+              <a:rPr lang="en-US" sz="3600" i="1" dirty="0">
+                <a:solidFill>
+                  <a:srgbClr val="111111"/>
+                </a:solidFill>
+                <a:latin typeface="Times New Roman" pitchFamily="34" charset="0"/>
+                <a:ea typeface="Times New Roman" pitchFamily="34" charset="-122"/>
+                <a:cs typeface="Times New Roman" pitchFamily="34" charset="-120"/>
+              </a:rPr>
+              <a:t>The ten regions of Cameroon and their headquarters are the following:</a:t>
+            </a:r>
+            <a:endParaRPr lang="en-US" sz="3600" dirty="0"/>
+          </a:p>
+          <a:p>
+            <a:pPr algn="l" indent="0" marL="0">
+              <a:spcAft>
+                <a:spcPts val="800"/>
+              </a:spcAft>
+              <a:buNone/>
+            </a:pPr>
+            <a:r>
+              <a:rPr lang="en-US" sz="3600" b="1" dirty="0">
+                <a:solidFill>
+                  <a:srgbClr val="111111"/>
+                </a:solidFill>
+                <a:latin typeface="Times New Roman" pitchFamily="34" charset="0"/>
+                <a:ea typeface="Times New Roman" pitchFamily="34" charset="-122"/>
+                <a:cs typeface="Times New Roman" pitchFamily="34" charset="-120"/>
+              </a:rPr>
+              <a:t>Far North: </a:t>
+            </a:r>
+            <a:pPr algn="l" indent="0" marL="0">
+              <a:spcAft>
+                <a:spcPts val="800"/>
+              </a:spcAft>
+              <a:buNone/>
+            </a:pPr>
+            <a:r>
+              <a:rPr lang="en-US" sz="3600" dirty="0">
+                <a:solidFill>
+                  <a:srgbClr val="111111"/>
+                </a:solidFill>
+                <a:latin typeface="Times New Roman" pitchFamily="34" charset="0"/>
+                <a:ea typeface="Times New Roman" pitchFamily="34" charset="-122"/>
+                <a:cs typeface="Times New Roman" pitchFamily="34" charset="-120"/>
+              </a:rPr>
+              <a:t>Its headquarters is Maroua.</a:t>
+            </a:r>
+            <a:endParaRPr lang="en-US" sz="3600" dirty="0"/>
+          </a:p>
+        </p:txBody>
+      </p:sp>
       <p:pic>
         <p:nvPicPr>
-          <p:cNvPr id="3" name="Image 0" descr="/home/claude/f4/img/minesec_sheet.png">    </p:cNvPr>
+          <p:cNvPr id="6" name="Image 0" descr="/home/claude/f4/img/v2/cmr_regions_big.png">    </p:cNvPr>
           <p:cNvPicPr>
             <a:picLocks noChangeAspect="1"/>
           </p:cNvPicPr>
@@ -14624,8 +15302,8 @@
         </p:blipFill>
         <p:spPr>
           <a:xfrm>
-            <a:off x="0" y="658368"/>
-            <a:ext cx="2468880" cy="5833872"/>
+            <a:off x="5349240" y="2097226"/>
+            <a:ext cx="6659575" cy="3641955"/>
           </a:xfrm>
           <a:prstGeom prst="rect">
             <a:avLst/>
@@ -14634,14 +15312,14 @@
       </p:pic>
       <p:sp>
         <p:nvSpPr>
-          <p:cNvPr id="4" name="Text 1"/>
+          <p:cNvPr id="7" name="Text 4"/>
           <p:cNvSpPr/>
           <p:nvPr/>
         </p:nvSpPr>
         <p:spPr>
           <a:xfrm>
-            <a:off x="2697480" y="1005840"/>
-            <a:ext cx="9174175" cy="731520"/>
+            <a:off x="5349240" y="6089904"/>
+            <a:ext cx="6659575" cy="347472"/>
           </a:xfrm>
           <a:prstGeom prst="rect">
             <a:avLst/>
@@ -14650,216 +15328,24 @@
           <a:ln/>
         </p:spPr>
         <p:txBody>
-          <a:bodyPr wrap="square" lIns="0" tIns="0" rIns="0" bIns="0" rtlCol="0" anchor="ctr">
-            <a:normAutofit/>
-          </a:bodyPr>
+          <a:bodyPr wrap="square" lIns="0" tIns="0" rIns="0" bIns="0" rtlCol="0" anchor="ctr"/>
           <a:lstStyle/>
           <a:p>
             <a:pPr algn="ctr" indent="0" marL="0">
               <a:buNone/>
             </a:pPr>
             <a:r>
-              <a:rPr lang="en-US" sz="3600" b="1" dirty="0">
-                <a:solidFill>
-                  <a:srgbClr val="990011"/>
+              <a:rPr lang="en-US" sz="1600" i="1" dirty="0">
+                <a:solidFill>
+                  <a:srgbClr val="555555"/>
                 </a:solidFill>
                 <a:latin typeface="Times New Roman" pitchFamily="34" charset="0"/>
                 <a:ea typeface="Times New Roman" pitchFamily="34" charset="-122"/>
                 <a:cs typeface="Times New Roman" pitchFamily="34" charset="-120"/>
               </a:rPr>
-              <a:t>2. Divisional Headquarters of the North Region</a:t>
-            </a:r>
-            <a:endParaRPr lang="en-US" sz="3600" dirty="0"/>
-          </a:p>
-        </p:txBody>
-      </p:sp>
-      <p:sp>
-        <p:nvSpPr>
-          <p:cNvPr id="5" name="Text 2"/>
-          <p:cNvSpPr/>
-          <p:nvPr/>
-        </p:nvSpPr>
-        <p:spPr>
-          <a:xfrm>
-            <a:off x="2697480" y="1783080"/>
-            <a:ext cx="9174175" cy="4663440"/>
-          </a:xfrm>
-          <a:prstGeom prst="rect">
-            <a:avLst/>
-          </a:prstGeom>
-          <a:noFill/>
-          <a:ln/>
-        </p:spPr>
-        <p:txBody>
-          <a:bodyPr wrap="square" lIns="0" tIns="0" rIns="0" bIns="0" rtlCol="0" anchor="t"/>
-          <a:lstStyle/>
-          <a:p>
-            <a:pPr algn="l" indent="0" marL="0">
-              <a:spcAft>
-                <a:spcPts val="800"/>
-              </a:spcAft>
-              <a:buNone/>
-            </a:pPr>
-            <a:r>
-              <a:rPr lang="en-US" sz="4000" i="1" dirty="0">
-                <a:solidFill>
-                  <a:srgbClr val="111111"/>
-                </a:solidFill>
-                <a:latin typeface="Times New Roman" pitchFamily="34" charset="0"/>
-                <a:ea typeface="Times New Roman" pitchFamily="34" charset="-122"/>
-                <a:cs typeface="Times New Roman" pitchFamily="34" charset="-120"/>
-              </a:rPr>
-              <a:t>The North Region has the following divisions:</a:t>
-            </a:r>
-            <a:endParaRPr lang="en-US" sz="4000" dirty="0"/>
-          </a:p>
-          <a:p>
-            <a:pPr algn="l" indent="0" marL="0">
-              <a:spcAft>
-                <a:spcPts val="800"/>
-              </a:spcAft>
-              <a:buNone/>
-            </a:pPr>
-            <a:r>
-              <a:rPr lang="en-US" sz="4000" b="1" dirty="0">
-                <a:solidFill>
-                  <a:srgbClr val="111111"/>
-                </a:solidFill>
-                <a:latin typeface="Times New Roman" pitchFamily="34" charset="0"/>
-                <a:ea typeface="Times New Roman" pitchFamily="34" charset="-122"/>
-                <a:cs typeface="Times New Roman" pitchFamily="34" charset="-120"/>
-              </a:rPr>
-              <a:t>Bénoué: </a:t>
-            </a:r>
-            <a:pPr algn="l" indent="0" marL="0">
-              <a:spcAft>
-                <a:spcPts val="800"/>
-              </a:spcAft>
-              <a:buNone/>
-            </a:pPr>
-            <a:r>
-              <a:rPr lang="en-US" sz="4000" dirty="0">
-                <a:solidFill>
-                  <a:srgbClr val="111111"/>
-                </a:solidFill>
-                <a:latin typeface="Times New Roman" pitchFamily="34" charset="0"/>
-                <a:ea typeface="Times New Roman" pitchFamily="34" charset="-122"/>
-                <a:cs typeface="Times New Roman" pitchFamily="34" charset="-120"/>
-              </a:rPr>
-              <a:t>Its headquarters is Garoua.</a:t>
-            </a:r>
-            <a:endParaRPr lang="en-US" sz="4000" dirty="0"/>
-          </a:p>
-          <a:p>
-            <a:pPr algn="l" indent="0" marL="0">
-              <a:spcAft>
-                <a:spcPts val="800"/>
-              </a:spcAft>
-              <a:buNone/>
-            </a:pPr>
-            <a:r>
-              <a:rPr lang="en-US" sz="4000" b="1" dirty="0">
-                <a:solidFill>
-                  <a:srgbClr val="111111"/>
-                </a:solidFill>
-                <a:latin typeface="Times New Roman" pitchFamily="34" charset="0"/>
-                <a:ea typeface="Times New Roman" pitchFamily="34" charset="-122"/>
-                <a:cs typeface="Times New Roman" pitchFamily="34" charset="-120"/>
-              </a:rPr>
-              <a:t>Faro: </a:t>
-            </a:r>
-            <a:pPr algn="l" indent="0" marL="0">
-              <a:spcAft>
-                <a:spcPts val="800"/>
-              </a:spcAft>
-              <a:buNone/>
-            </a:pPr>
-            <a:r>
-              <a:rPr lang="en-US" sz="4000" dirty="0">
-                <a:solidFill>
-                  <a:srgbClr val="111111"/>
-                </a:solidFill>
-                <a:latin typeface="Times New Roman" pitchFamily="34" charset="0"/>
-                <a:ea typeface="Times New Roman" pitchFamily="34" charset="-122"/>
-                <a:cs typeface="Times New Roman" pitchFamily="34" charset="-120"/>
-              </a:rPr>
-              <a:t>Its headquarters is Poli.</a:t>
-            </a:r>
-            <a:endParaRPr lang="en-US" sz="4000" dirty="0"/>
-          </a:p>
-          <a:p>
-            <a:pPr algn="l" indent="0" marL="0">
-              <a:spcAft>
-                <a:spcPts val="800"/>
-              </a:spcAft>
-              <a:buNone/>
-            </a:pPr>
-            <a:r>
-              <a:rPr lang="en-US" sz="4000" b="1" dirty="0">
-                <a:solidFill>
-                  <a:srgbClr val="111111"/>
-                </a:solidFill>
-                <a:latin typeface="Times New Roman" pitchFamily="34" charset="0"/>
-                <a:ea typeface="Times New Roman" pitchFamily="34" charset="-122"/>
-                <a:cs typeface="Times New Roman" pitchFamily="34" charset="-120"/>
-              </a:rPr>
-              <a:t>Mayo-Louti: </a:t>
-            </a:r>
-            <a:pPr algn="l" indent="0" marL="0">
-              <a:spcAft>
-                <a:spcPts val="800"/>
-              </a:spcAft>
-              <a:buNone/>
-            </a:pPr>
-            <a:r>
-              <a:rPr lang="en-US" sz="4000" dirty="0">
-                <a:solidFill>
-                  <a:srgbClr val="111111"/>
-                </a:solidFill>
-                <a:latin typeface="Times New Roman" pitchFamily="34" charset="0"/>
-                <a:ea typeface="Times New Roman" pitchFamily="34" charset="-122"/>
-                <a:cs typeface="Times New Roman" pitchFamily="34" charset="-120"/>
-              </a:rPr>
-              <a:t>Its headquarters is Guider.</a:t>
-            </a:r>
-            <a:endParaRPr lang="en-US" sz="4000" dirty="0"/>
-          </a:p>
-          <a:p>
-            <a:pPr algn="l" indent="0" marL="0">
-              <a:spcAft>
-                <a:spcPts val="800"/>
-              </a:spcAft>
-              <a:buNone/>
-            </a:pPr>
-            <a:r>
-              <a:rPr lang="en-US" sz="4000" b="1" dirty="0">
-                <a:solidFill>
-                  <a:srgbClr val="111111"/>
-                </a:solidFill>
-                <a:latin typeface="Times New Roman" pitchFamily="34" charset="0"/>
-                <a:ea typeface="Times New Roman" pitchFamily="34" charset="-122"/>
-                <a:cs typeface="Times New Roman" pitchFamily="34" charset="-120"/>
-              </a:rPr>
-              <a:t>Mayo-Rey: </a:t>
-            </a:r>
-            <a:pPr algn="l" indent="0" marL="0">
-              <a:spcAft>
-                <a:spcPts val="800"/>
-              </a:spcAft>
-              <a:buNone/>
-            </a:pPr>
-            <a:r>
-              <a:rPr lang="en-US" sz="4000" dirty="0">
-                <a:solidFill>
-                  <a:srgbClr val="111111"/>
-                </a:solidFill>
-                <a:latin typeface="Times New Roman" pitchFamily="34" charset="0"/>
-                <a:ea typeface="Times New Roman" pitchFamily="34" charset="-122"/>
-                <a:cs typeface="Times New Roman" pitchFamily="34" charset="-120"/>
-              </a:rPr>
-              <a:t>Its headquarters is Tcholliré.</a:t>
-            </a:r>
-            <a:endParaRPr lang="en-US" sz="4000" dirty="0"/>
+              <a:t>Illustration: regions and regional headquarters</a:t>
+            </a:r>
+            <a:endParaRPr lang="en-US" sz="1600" dirty="0"/>
           </a:p>
         </p:txBody>
       </p:sp>
@@ -15096,7 +15582,7 @@
                 <a:ea typeface="Times New Roman" pitchFamily="34" charset="-122"/>
                 <a:cs typeface="Times New Roman" pitchFamily="34" charset="-120"/>
               </a:rPr>
-              <a:t>Interview one informal worker: his job, his income and his main problem.</a:t>
+              <a:t>Interview one informal worker: his or her job, income and main problem.</a:t>
             </a:r>
             <a:endParaRPr lang="en-US" sz="4000" dirty="0"/>
           </a:p>
@@ -15208,7 +15694,7 @@
                 <a:ea typeface="Calibri" pitchFamily="34" charset="-122"/>
                 <a:cs typeface="Calibri" pitchFamily="34" charset="-120"/>
               </a:rPr>
-              <a:t>FORMATIVE EVALUATION</a:t>
+              <a:t>BOARD SUMMARY</a:t>
             </a:r>
             <a:endParaRPr lang="en-US" sz="1400" dirty="0"/>
           </a:p>
@@ -15231,7 +15717,7 @@
         <p:spPr>
           <a:xfrm>
             <a:off x="0" y="658368"/>
-            <a:ext cx="5120640" cy="5833872"/>
+            <a:ext cx="3840480" cy="5833872"/>
           </a:xfrm>
           <a:prstGeom prst="rect">
             <a:avLst/>
@@ -15246,8 +15732,8 @@
         </p:nvSpPr>
         <p:spPr>
           <a:xfrm>
-            <a:off x="5349240" y="1005840"/>
-            <a:ext cx="6522415" cy="731520"/>
+            <a:off x="4069080" y="1005840"/>
+            <a:ext cx="7802575" cy="731520"/>
           </a:xfrm>
           <a:prstGeom prst="rect">
             <a:avLst/>
@@ -15273,7 +15759,7 @@
                 <a:ea typeface="Times New Roman" pitchFamily="34" charset="-122"/>
                 <a:cs typeface="Times New Roman" pitchFamily="34" charset="-120"/>
               </a:rPr>
-              <a:t>Evaluation 1</a:t>
+              <a:t>1. Theoretical Basis</a:t>
             </a:r>
             <a:endParaRPr lang="en-US" sz="3600" dirty="0"/>
           </a:p>
@@ -15287,8 +15773,47 @@
         </p:nvSpPr>
         <p:spPr>
           <a:xfrm>
-            <a:off x="5349240" y="1783080"/>
-            <a:ext cx="6522415" cy="4663440"/>
+            <a:off x="4069080" y="1737360"/>
+            <a:ext cx="7802575" cy="457200"/>
+          </a:xfrm>
+          <a:prstGeom prst="rect">
+            <a:avLst/>
+          </a:prstGeom>
+          <a:noFill/>
+          <a:ln/>
+        </p:spPr>
+        <p:txBody>
+          <a:bodyPr wrap="square" lIns="0" tIns="0" rIns="0" bIns="0" rtlCol="0" anchor="ctr"/>
+          <a:lstStyle/>
+          <a:p>
+            <a:pPr algn="l" indent="0" marL="0">
+              <a:buNone/>
+            </a:pPr>
+            <a:r>
+              <a:rPr lang="en-US" sz="3000" b="1" dirty="0">
+                <a:solidFill>
+                  <a:srgbClr val="990011"/>
+                </a:solidFill>
+                <a:latin typeface="Times New Roman" pitchFamily="34" charset="0"/>
+                <a:ea typeface="Times New Roman" pitchFamily="34" charset="-122"/>
+                <a:cs typeface="Times New Roman" pitchFamily="34" charset="-120"/>
+              </a:rPr>
+              <a:t>A) The Regional Headquarters of Cameroon</a:t>
+            </a:r>
+            <a:endParaRPr lang="en-US" sz="3000" dirty="0"/>
+          </a:p>
+        </p:txBody>
+      </p:sp>
+      <p:sp>
+        <p:nvSpPr>
+          <p:cNvPr id="6" name="Text 3"/>
+          <p:cNvSpPr/>
+          <p:nvPr/>
+        </p:nvSpPr>
+        <p:spPr>
+          <a:xfrm>
+            <a:off x="4069080" y="2240280"/>
+            <a:ext cx="7802575" cy="4206240"/>
           </a:xfrm>
           <a:prstGeom prst="rect">
             <a:avLst/>
@@ -15307,7 +15832,7 @@
               <a:buNone/>
             </a:pPr>
             <a:r>
-              <a:rPr lang="en-US" sz="4000" dirty="0">
+              <a:rPr lang="en-US" sz="4000" b="1" dirty="0">
                 <a:solidFill>
                   <a:srgbClr val="111111"/>
                 </a:solidFill>
@@ -15315,7 +15840,135 @@
                 <a:ea typeface="Times New Roman" pitchFamily="34" charset="-122"/>
                 <a:cs typeface="Times New Roman" pitchFamily="34" charset="-120"/>
               </a:rPr>
-              <a:t>Give the headquarters of the West and North-West Regions.</a:t>
+              <a:t>North: </a:t>
+            </a:r>
+            <a:pPr algn="l" indent="0" marL="0">
+              <a:spcAft>
+                <a:spcPts val="800"/>
+              </a:spcAft>
+              <a:buNone/>
+            </a:pPr>
+            <a:r>
+              <a:rPr lang="en-US" sz="4000" dirty="0">
+                <a:solidFill>
+                  <a:srgbClr val="111111"/>
+                </a:solidFill>
+                <a:latin typeface="Times New Roman" pitchFamily="34" charset="0"/>
+                <a:ea typeface="Times New Roman" pitchFamily="34" charset="-122"/>
+                <a:cs typeface="Times New Roman" pitchFamily="34" charset="-120"/>
+              </a:rPr>
+              <a:t>Its headquarters is Garoua.</a:t>
+            </a:r>
+            <a:endParaRPr lang="en-US" sz="4000" dirty="0"/>
+          </a:p>
+          <a:p>
+            <a:pPr algn="l" indent="0" marL="0">
+              <a:spcAft>
+                <a:spcPts val="800"/>
+              </a:spcAft>
+              <a:buNone/>
+            </a:pPr>
+            <a:r>
+              <a:rPr lang="en-US" sz="4000" b="1" dirty="0">
+                <a:solidFill>
+                  <a:srgbClr val="111111"/>
+                </a:solidFill>
+                <a:latin typeface="Times New Roman" pitchFamily="34" charset="0"/>
+                <a:ea typeface="Times New Roman" pitchFamily="34" charset="-122"/>
+                <a:cs typeface="Times New Roman" pitchFamily="34" charset="-120"/>
+              </a:rPr>
+              <a:t>Adamawa: </a:t>
+            </a:r>
+            <a:pPr algn="l" indent="0" marL="0">
+              <a:spcAft>
+                <a:spcPts val="800"/>
+              </a:spcAft>
+              <a:buNone/>
+            </a:pPr>
+            <a:r>
+              <a:rPr lang="en-US" sz="4000" dirty="0">
+                <a:solidFill>
+                  <a:srgbClr val="111111"/>
+                </a:solidFill>
+                <a:latin typeface="Times New Roman" pitchFamily="34" charset="0"/>
+                <a:ea typeface="Times New Roman" pitchFamily="34" charset="-122"/>
+                <a:cs typeface="Times New Roman" pitchFamily="34" charset="-120"/>
+              </a:rPr>
+              <a:t>Its headquarters is Ngaoundéré.</a:t>
+            </a:r>
+            <a:endParaRPr lang="en-US" sz="4000" dirty="0"/>
+          </a:p>
+          <a:p>
+            <a:pPr algn="l" indent="0" marL="0">
+              <a:spcAft>
+                <a:spcPts val="800"/>
+              </a:spcAft>
+              <a:buNone/>
+            </a:pPr>
+            <a:r>
+              <a:rPr lang="en-US" sz="4000" b="1" dirty="0">
+                <a:solidFill>
+                  <a:srgbClr val="111111"/>
+                </a:solidFill>
+                <a:latin typeface="Times New Roman" pitchFamily="34" charset="0"/>
+                <a:ea typeface="Times New Roman" pitchFamily="34" charset="-122"/>
+                <a:cs typeface="Times New Roman" pitchFamily="34" charset="-120"/>
+              </a:rPr>
+              <a:t>East: </a:t>
+            </a:r>
+            <a:pPr algn="l" indent="0" marL="0">
+              <a:spcAft>
+                <a:spcPts val="800"/>
+              </a:spcAft>
+              <a:buNone/>
+            </a:pPr>
+            <a:r>
+              <a:rPr lang="en-US" sz="4000" dirty="0">
+                <a:solidFill>
+                  <a:srgbClr val="111111"/>
+                </a:solidFill>
+                <a:latin typeface="Times New Roman" pitchFamily="34" charset="0"/>
+                <a:ea typeface="Times New Roman" pitchFamily="34" charset="-122"/>
+                <a:cs typeface="Times New Roman" pitchFamily="34" charset="-120"/>
+              </a:rPr>
+              <a:t>Its headquarters is Bertoua.</a:t>
+            </a:r>
+            <a:endParaRPr lang="en-US" sz="4000" dirty="0"/>
+          </a:p>
+          <a:p>
+            <a:pPr algn="l" indent="0" marL="0">
+              <a:spcAft>
+                <a:spcPts val="800"/>
+              </a:spcAft>
+              <a:buNone/>
+            </a:pPr>
+            <a:r>
+              <a:rPr lang="en-US" sz="4000" b="1" dirty="0">
+                <a:solidFill>
+                  <a:srgbClr val="111111"/>
+                </a:solidFill>
+                <a:latin typeface="Times New Roman" pitchFamily="34" charset="0"/>
+                <a:ea typeface="Times New Roman" pitchFamily="34" charset="-122"/>
+                <a:cs typeface="Times New Roman" pitchFamily="34" charset="-120"/>
+              </a:rPr>
+              <a:t>Centre: </a:t>
+            </a:r>
+            <a:pPr algn="l" indent="0" marL="0">
+              <a:spcAft>
+                <a:spcPts val="800"/>
+              </a:spcAft>
+              <a:buNone/>
+            </a:pPr>
+            <a:r>
+              <a:rPr lang="en-US" sz="4000" dirty="0">
+                <a:solidFill>
+                  <a:srgbClr val="111111"/>
+                </a:solidFill>
+                <a:latin typeface="Times New Roman" pitchFamily="34" charset="0"/>
+                <a:ea typeface="Times New Roman" pitchFamily="34" charset="-122"/>
+                <a:cs typeface="Times New Roman" pitchFamily="34" charset="-120"/>
+              </a:rPr>
+              <a:t>Its headquarters is Yaoundé, the political capital.</a:t>
             </a:r>
             <a:endParaRPr lang="en-US" sz="4000" dirty="0"/>
           </a:p>
@@ -15427,7 +16080,7 @@
                 <a:ea typeface="Calibri" pitchFamily="34" charset="-122"/>
                 <a:cs typeface="Calibri" pitchFamily="34" charset="-120"/>
               </a:rPr>
-              <a:t>FORMATIVE EVALUATION</a:t>
+              <a:t>BOARD SUMMARY</a:t>
             </a:r>
             <a:endParaRPr lang="en-US" sz="1400" dirty="0"/>
           </a:p>
@@ -15450,7 +16103,7 @@
         <p:spPr>
           <a:xfrm>
             <a:off x="0" y="658368"/>
-            <a:ext cx="5120640" cy="5833872"/>
+            <a:ext cx="2468880" cy="5833872"/>
           </a:xfrm>
           <a:prstGeom prst="rect">
             <a:avLst/>
@@ -15465,8 +16118,8 @@
         </p:nvSpPr>
         <p:spPr>
           <a:xfrm>
-            <a:off x="5349240" y="1005840"/>
-            <a:ext cx="6522415" cy="731520"/>
+            <a:off x="2697480" y="1005840"/>
+            <a:ext cx="9174175" cy="731520"/>
           </a:xfrm>
           <a:prstGeom prst="rect">
             <a:avLst/>
@@ -15492,7 +16145,7 @@
                 <a:ea typeface="Times New Roman" pitchFamily="34" charset="-122"/>
                 <a:cs typeface="Times New Roman" pitchFamily="34" charset="-120"/>
               </a:rPr>
-              <a:t>Expected Answer</a:t>
+              <a:t>1. Theoretical Basis</a:t>
             </a:r>
             <a:endParaRPr lang="en-US" sz="3600" dirty="0"/>
           </a:p>
@@ -15506,8 +16159,47 @@
         </p:nvSpPr>
         <p:spPr>
           <a:xfrm>
-            <a:off x="5349240" y="1783080"/>
-            <a:ext cx="6522415" cy="4663440"/>
+            <a:off x="2697480" y="1737360"/>
+            <a:ext cx="9174175" cy="457200"/>
+          </a:xfrm>
+          <a:prstGeom prst="rect">
+            <a:avLst/>
+          </a:prstGeom>
+          <a:noFill/>
+          <a:ln/>
+        </p:spPr>
+        <p:txBody>
+          <a:bodyPr wrap="square" lIns="0" tIns="0" rIns="0" bIns="0" rtlCol="0" anchor="ctr"/>
+          <a:lstStyle/>
+          <a:p>
+            <a:pPr algn="l" indent="0" marL="0">
+              <a:buNone/>
+            </a:pPr>
+            <a:r>
+              <a:rPr lang="en-US" sz="2700" b="1" dirty="0">
+                <a:solidFill>
+                  <a:srgbClr val="990011"/>
+                </a:solidFill>
+                <a:latin typeface="Times New Roman" pitchFamily="34" charset="0"/>
+                <a:ea typeface="Times New Roman" pitchFamily="34" charset="-122"/>
+                <a:cs typeface="Times New Roman" pitchFamily="34" charset="-120"/>
+              </a:rPr>
+              <a:t>A) The Regional Headquarters of Cameroon (continued)</a:t>
+            </a:r>
+            <a:endParaRPr lang="en-US" sz="2700" dirty="0"/>
+          </a:p>
+        </p:txBody>
+      </p:sp>
+      <p:sp>
+        <p:nvSpPr>
+          <p:cNvPr id="6" name="Text 3"/>
+          <p:cNvSpPr/>
+          <p:nvPr/>
+        </p:nvSpPr>
+        <p:spPr>
+          <a:xfrm>
+            <a:off x="2697480" y="2240280"/>
+            <a:ext cx="9174175" cy="4206240"/>
           </a:xfrm>
           <a:prstGeom prst="rect">
             <a:avLst/>
@@ -15526,7 +16218,7 @@
               <a:buNone/>
             </a:pPr>
             <a:r>
-              <a:rPr lang="en-US" sz="4000" dirty="0">
+              <a:rPr lang="en-US" sz="4000" b="1" dirty="0">
                 <a:solidFill>
                   <a:srgbClr val="111111"/>
                 </a:solidFill>
@@ -15534,7 +16226,135 @@
                 <a:ea typeface="Times New Roman" pitchFamily="34" charset="-122"/>
                 <a:cs typeface="Times New Roman" pitchFamily="34" charset="-120"/>
               </a:rPr>
-              <a:t>Bafoussam and Bamenda.</a:t>
+              <a:t>South: </a:t>
+            </a:r>
+            <a:pPr algn="l" indent="0" marL="0">
+              <a:spcAft>
+                <a:spcPts val="800"/>
+              </a:spcAft>
+              <a:buNone/>
+            </a:pPr>
+            <a:r>
+              <a:rPr lang="en-US" sz="4000" dirty="0">
+                <a:solidFill>
+                  <a:srgbClr val="111111"/>
+                </a:solidFill>
+                <a:latin typeface="Times New Roman" pitchFamily="34" charset="0"/>
+                <a:ea typeface="Times New Roman" pitchFamily="34" charset="-122"/>
+                <a:cs typeface="Times New Roman" pitchFamily="34" charset="-120"/>
+              </a:rPr>
+              <a:t>Its headquarters is Ebolowa.</a:t>
+            </a:r>
+            <a:endParaRPr lang="en-US" sz="4000" dirty="0"/>
+          </a:p>
+          <a:p>
+            <a:pPr algn="l" indent="0" marL="0">
+              <a:spcAft>
+                <a:spcPts val="800"/>
+              </a:spcAft>
+              <a:buNone/>
+            </a:pPr>
+            <a:r>
+              <a:rPr lang="en-US" sz="4000" b="1" dirty="0">
+                <a:solidFill>
+                  <a:srgbClr val="111111"/>
+                </a:solidFill>
+                <a:latin typeface="Times New Roman" pitchFamily="34" charset="0"/>
+                <a:ea typeface="Times New Roman" pitchFamily="34" charset="-122"/>
+                <a:cs typeface="Times New Roman" pitchFamily="34" charset="-120"/>
+              </a:rPr>
+              <a:t>Littoral: </a:t>
+            </a:r>
+            <a:pPr algn="l" indent="0" marL="0">
+              <a:spcAft>
+                <a:spcPts val="800"/>
+              </a:spcAft>
+              <a:buNone/>
+            </a:pPr>
+            <a:r>
+              <a:rPr lang="en-US" sz="4000" dirty="0">
+                <a:solidFill>
+                  <a:srgbClr val="111111"/>
+                </a:solidFill>
+                <a:latin typeface="Times New Roman" pitchFamily="34" charset="0"/>
+                <a:ea typeface="Times New Roman" pitchFamily="34" charset="-122"/>
+                <a:cs typeface="Times New Roman" pitchFamily="34" charset="-120"/>
+              </a:rPr>
+              <a:t>Its headquarters is Douala, the economic capital.</a:t>
+            </a:r>
+            <a:endParaRPr lang="en-US" sz="4000" dirty="0"/>
+          </a:p>
+          <a:p>
+            <a:pPr algn="l" indent="0" marL="0">
+              <a:spcAft>
+                <a:spcPts val="800"/>
+              </a:spcAft>
+              <a:buNone/>
+            </a:pPr>
+            <a:r>
+              <a:rPr lang="en-US" sz="4000" b="1" dirty="0">
+                <a:solidFill>
+                  <a:srgbClr val="111111"/>
+                </a:solidFill>
+                <a:latin typeface="Times New Roman" pitchFamily="34" charset="0"/>
+                <a:ea typeface="Times New Roman" pitchFamily="34" charset="-122"/>
+                <a:cs typeface="Times New Roman" pitchFamily="34" charset="-120"/>
+              </a:rPr>
+              <a:t>South-West: </a:t>
+            </a:r>
+            <a:pPr algn="l" indent="0" marL="0">
+              <a:spcAft>
+                <a:spcPts val="800"/>
+              </a:spcAft>
+              <a:buNone/>
+            </a:pPr>
+            <a:r>
+              <a:rPr lang="en-US" sz="4000" dirty="0">
+                <a:solidFill>
+                  <a:srgbClr val="111111"/>
+                </a:solidFill>
+                <a:latin typeface="Times New Roman" pitchFamily="34" charset="0"/>
+                <a:ea typeface="Times New Roman" pitchFamily="34" charset="-122"/>
+                <a:cs typeface="Times New Roman" pitchFamily="34" charset="-120"/>
+              </a:rPr>
+              <a:t>Its headquarters is Buea.</a:t>
+            </a:r>
+            <a:endParaRPr lang="en-US" sz="4000" dirty="0"/>
+          </a:p>
+          <a:p>
+            <a:pPr algn="l" indent="0" marL="0">
+              <a:spcAft>
+                <a:spcPts val="800"/>
+              </a:spcAft>
+              <a:buNone/>
+            </a:pPr>
+            <a:r>
+              <a:rPr lang="en-US" sz="4000" b="1" dirty="0">
+                <a:solidFill>
+                  <a:srgbClr val="111111"/>
+                </a:solidFill>
+                <a:latin typeface="Times New Roman" pitchFamily="34" charset="0"/>
+                <a:ea typeface="Times New Roman" pitchFamily="34" charset="-122"/>
+                <a:cs typeface="Times New Roman" pitchFamily="34" charset="-120"/>
+              </a:rPr>
+              <a:t>West: </a:t>
+            </a:r>
+            <a:pPr algn="l" indent="0" marL="0">
+              <a:spcAft>
+                <a:spcPts val="800"/>
+              </a:spcAft>
+              <a:buNone/>
+            </a:pPr>
+            <a:r>
+              <a:rPr lang="en-US" sz="4000" dirty="0">
+                <a:solidFill>
+                  <a:srgbClr val="111111"/>
+                </a:solidFill>
+                <a:latin typeface="Times New Roman" pitchFamily="34" charset="0"/>
+                <a:ea typeface="Times New Roman" pitchFamily="34" charset="-122"/>
+                <a:cs typeface="Times New Roman" pitchFamily="34" charset="-120"/>
+              </a:rPr>
+              <a:t>Its headquarters is Bafoussam.</a:t>
             </a:r>
             <a:endParaRPr lang="en-US" sz="4000" dirty="0"/>
           </a:p>
@@ -15646,7 +16466,7 @@
                 <a:ea typeface="Calibri" pitchFamily="34" charset="-122"/>
                 <a:cs typeface="Calibri" pitchFamily="34" charset="-120"/>
               </a:rPr>
-              <a:t>FORMATIVE EVALUATION</a:t>
+              <a:t>BOARD SUMMARY</a:t>
             </a:r>
             <a:endParaRPr lang="en-US" sz="1400" dirty="0"/>
           </a:p>
@@ -15711,7 +16531,7 @@
                 <a:ea typeface="Times New Roman" pitchFamily="34" charset="-122"/>
                 <a:cs typeface="Times New Roman" pitchFamily="34" charset="-120"/>
               </a:rPr>
-              <a:t>Evaluation 2</a:t>
+              <a:t>1. Theoretical Basis</a:t>
             </a:r>
             <a:endParaRPr lang="en-US" sz="3600" dirty="0"/>
           </a:p>
@@ -15725,8 +16545,47 @@
         </p:nvSpPr>
         <p:spPr>
           <a:xfrm>
-            <a:off x="5349240" y="1783080"/>
-            <a:ext cx="6522415" cy="4663440"/>
+            <a:off x="5349240" y="1737360"/>
+            <a:ext cx="6522415" cy="457200"/>
+          </a:xfrm>
+          <a:prstGeom prst="rect">
+            <a:avLst/>
+          </a:prstGeom>
+          <a:noFill/>
+          <a:ln/>
+        </p:spPr>
+        <p:txBody>
+          <a:bodyPr wrap="square" lIns="0" tIns="0" rIns="0" bIns="0" rtlCol="0" anchor="ctr"/>
+          <a:lstStyle/>
+          <a:p>
+            <a:pPr algn="l" indent="0" marL="0">
+              <a:buNone/>
+            </a:pPr>
+            <a:r>
+              <a:rPr lang="en-US" sz="1900" b="1" dirty="0">
+                <a:solidFill>
+                  <a:srgbClr val="990011"/>
+                </a:solidFill>
+                <a:latin typeface="Times New Roman" pitchFamily="34" charset="0"/>
+                <a:ea typeface="Times New Roman" pitchFamily="34" charset="-122"/>
+                <a:cs typeface="Times New Roman" pitchFamily="34" charset="-120"/>
+              </a:rPr>
+              <a:t>A) The Regional Headquarters of Cameroon (continued)</a:t>
+            </a:r>
+            <a:endParaRPr lang="en-US" sz="1900" dirty="0"/>
+          </a:p>
+        </p:txBody>
+      </p:sp>
+      <p:sp>
+        <p:nvSpPr>
+          <p:cNvPr id="6" name="Text 3"/>
+          <p:cNvSpPr/>
+          <p:nvPr/>
+        </p:nvSpPr>
+        <p:spPr>
+          <a:xfrm>
+            <a:off x="5349240" y="2240280"/>
+            <a:ext cx="6522415" cy="4206240"/>
           </a:xfrm>
           <a:prstGeom prst="rect">
             <a:avLst/>
@@ -15745,7 +16604,7 @@
               <a:buNone/>
             </a:pPr>
             <a:r>
-              <a:rPr lang="en-US" sz="4000" dirty="0">
+              <a:rPr lang="en-US" sz="4000" b="1" dirty="0">
                 <a:solidFill>
                   <a:srgbClr val="111111"/>
                 </a:solidFill>
@@ -15753,7 +16612,24 @@
                 <a:ea typeface="Times New Roman" pitchFamily="34" charset="-122"/>
                 <a:cs typeface="Times New Roman" pitchFamily="34" charset="-120"/>
               </a:rPr>
-              <a:t>What is the headquarters of Mayo-Louti?</a:t>
+              <a:t>North-West: </a:t>
+            </a:r>
+            <a:pPr algn="l" indent="0" marL="0">
+              <a:spcAft>
+                <a:spcPts val="800"/>
+              </a:spcAft>
+              <a:buNone/>
+            </a:pPr>
+            <a:r>
+              <a:rPr lang="en-US" sz="4000" dirty="0">
+                <a:solidFill>
+                  <a:srgbClr val="111111"/>
+                </a:solidFill>
+                <a:latin typeface="Times New Roman" pitchFamily="34" charset="0"/>
+                <a:ea typeface="Times New Roman" pitchFamily="34" charset="-122"/>
+                <a:cs typeface="Times New Roman" pitchFamily="34" charset="-120"/>
+              </a:rPr>
+              <a:t>Its headquarters is Bamenda.</a:t>
             </a:r>
             <a:endParaRPr lang="en-US" sz="4000" dirty="0"/>
           </a:p>
@@ -15865,7 +16741,7 @@
                 <a:ea typeface="Calibri" pitchFamily="34" charset="-122"/>
                 <a:cs typeface="Calibri" pitchFamily="34" charset="-120"/>
               </a:rPr>
-              <a:t>FORMATIVE EVALUATION</a:t>
+              <a:t>BOARD SUMMARY</a:t>
             </a:r>
             <a:endParaRPr lang="en-US" sz="1400" dirty="0"/>
           </a:p>
@@ -15888,7 +16764,7 @@
         <p:spPr>
           <a:xfrm>
             <a:off x="0" y="658368"/>
-            <a:ext cx="5120640" cy="5833872"/>
+            <a:ext cx="2468880" cy="5833872"/>
           </a:xfrm>
           <a:prstGeom prst="rect">
             <a:avLst/>
@@ -15903,8 +16779,8 @@
         </p:nvSpPr>
         <p:spPr>
           <a:xfrm>
-            <a:off x="5349240" y="1005840"/>
-            <a:ext cx="6522415" cy="731520"/>
+            <a:off x="2697480" y="1005840"/>
+            <a:ext cx="9174175" cy="731520"/>
           </a:xfrm>
           <a:prstGeom prst="rect">
             <a:avLst/>
@@ -15930,7 +16806,7 @@
                 <a:ea typeface="Times New Roman" pitchFamily="34" charset="-122"/>
                 <a:cs typeface="Times New Roman" pitchFamily="34" charset="-120"/>
               </a:rPr>
-              <a:t>Expected Answer</a:t>
+              <a:t>1. Theoretical Basis</a:t>
             </a:r>
             <a:endParaRPr lang="en-US" sz="3600" dirty="0"/>
           </a:p>
@@ -15944,8 +16820,47 @@
         </p:nvSpPr>
         <p:spPr>
           <a:xfrm>
-            <a:off x="5349240" y="1783080"/>
-            <a:ext cx="6522415" cy="4663440"/>
+            <a:off x="2697480" y="1737360"/>
+            <a:ext cx="9174175" cy="457200"/>
+          </a:xfrm>
+          <a:prstGeom prst="rect">
+            <a:avLst/>
+          </a:prstGeom>
+          <a:noFill/>
+          <a:ln/>
+        </p:spPr>
+        <p:txBody>
+          <a:bodyPr wrap="square" lIns="0" tIns="0" rIns="0" bIns="0" rtlCol="0" anchor="ctr"/>
+          <a:lstStyle/>
+          <a:p>
+            <a:pPr algn="l" indent="0" marL="0">
+              <a:buNone/>
+            </a:pPr>
+            <a:r>
+              <a:rPr lang="en-US" sz="2800" b="1" dirty="0">
+                <a:solidFill>
+                  <a:srgbClr val="990011"/>
+                </a:solidFill>
+                <a:latin typeface="Times New Roman" pitchFamily="34" charset="0"/>
+                <a:ea typeface="Times New Roman" pitchFamily="34" charset="-122"/>
+                <a:cs typeface="Times New Roman" pitchFamily="34" charset="-120"/>
+              </a:rPr>
+              <a:t>B) The Divisional Headquarters of the North Region</a:t>
+            </a:r>
+            <a:endParaRPr lang="en-US" sz="2800" dirty="0"/>
+          </a:p>
+        </p:txBody>
+      </p:sp>
+      <p:sp>
+        <p:nvSpPr>
+          <p:cNvPr id="6" name="Text 3"/>
+          <p:cNvSpPr/>
+          <p:nvPr/>
+        </p:nvSpPr>
+        <p:spPr>
+          <a:xfrm>
+            <a:off x="2697480" y="2240280"/>
+            <a:ext cx="9174175" cy="4206240"/>
           </a:xfrm>
           <a:prstGeom prst="rect">
             <a:avLst/>
@@ -15964,7 +16879,7 @@
               <a:buNone/>
             </a:pPr>
             <a:r>
-              <a:rPr lang="en-US" sz="4000" dirty="0">
+              <a:rPr lang="en-US" sz="4000" i="1" dirty="0">
                 <a:solidFill>
                   <a:srgbClr val="111111"/>
                 </a:solidFill>
@@ -15972,7 +16887,118 @@
                 <a:ea typeface="Times New Roman" pitchFamily="34" charset="-122"/>
                 <a:cs typeface="Times New Roman" pitchFamily="34" charset="-120"/>
               </a:rPr>
-              <a:t>Guider.</a:t>
+              <a:t>The North Region has the following divisions and headquarters:</a:t>
+            </a:r>
+            <a:endParaRPr lang="en-US" sz="4000" dirty="0"/>
+          </a:p>
+          <a:p>
+            <a:pPr algn="l" indent="0" marL="0">
+              <a:spcAft>
+                <a:spcPts val="800"/>
+              </a:spcAft>
+              <a:buNone/>
+            </a:pPr>
+            <a:r>
+              <a:rPr lang="en-US" sz="4000" b="1" dirty="0">
+                <a:solidFill>
+                  <a:srgbClr val="111111"/>
+                </a:solidFill>
+                <a:latin typeface="Times New Roman" pitchFamily="34" charset="0"/>
+                <a:ea typeface="Times New Roman" pitchFamily="34" charset="-122"/>
+                <a:cs typeface="Times New Roman" pitchFamily="34" charset="-120"/>
+              </a:rPr>
+              <a:t>Bénoué: </a:t>
+            </a:r>
+            <a:pPr algn="l" indent="0" marL="0">
+              <a:spcAft>
+                <a:spcPts val="800"/>
+              </a:spcAft>
+              <a:buNone/>
+            </a:pPr>
+            <a:r>
+              <a:rPr lang="en-US" sz="4000" dirty="0">
+                <a:solidFill>
+                  <a:srgbClr val="111111"/>
+                </a:solidFill>
+                <a:latin typeface="Times New Roman" pitchFamily="34" charset="0"/>
+                <a:ea typeface="Times New Roman" pitchFamily="34" charset="-122"/>
+                <a:cs typeface="Times New Roman" pitchFamily="34" charset="-120"/>
+              </a:rPr>
+              <a:t>Its headquarters is Garoua.</a:t>
+            </a:r>
+            <a:endParaRPr lang="en-US" sz="4000" dirty="0"/>
+          </a:p>
+          <a:p>
+            <a:pPr algn="l" indent="0" marL="0">
+              <a:spcAft>
+                <a:spcPts val="800"/>
+              </a:spcAft>
+              <a:buNone/>
+            </a:pPr>
+            <a:r>
+              <a:rPr lang="en-US" sz="4000" b="1" dirty="0">
+                <a:solidFill>
+                  <a:srgbClr val="111111"/>
+                </a:solidFill>
+                <a:latin typeface="Times New Roman" pitchFamily="34" charset="0"/>
+                <a:ea typeface="Times New Roman" pitchFamily="34" charset="-122"/>
+                <a:cs typeface="Times New Roman" pitchFamily="34" charset="-120"/>
+              </a:rPr>
+              <a:t>Faro: </a:t>
+            </a:r>
+            <a:pPr algn="l" indent="0" marL="0">
+              <a:spcAft>
+                <a:spcPts val="800"/>
+              </a:spcAft>
+              <a:buNone/>
+            </a:pPr>
+            <a:r>
+              <a:rPr lang="en-US" sz="4000" dirty="0">
+                <a:solidFill>
+                  <a:srgbClr val="111111"/>
+                </a:solidFill>
+                <a:latin typeface="Times New Roman" pitchFamily="34" charset="0"/>
+                <a:ea typeface="Times New Roman" pitchFamily="34" charset="-122"/>
+                <a:cs typeface="Times New Roman" pitchFamily="34" charset="-120"/>
+              </a:rPr>
+              <a:t>Its headquarters is Poli.</a:t>
+            </a:r>
+            <a:endParaRPr lang="en-US" sz="4000" dirty="0"/>
+          </a:p>
+          <a:p>
+            <a:pPr algn="l" indent="0" marL="0">
+              <a:spcAft>
+                <a:spcPts val="800"/>
+              </a:spcAft>
+              <a:buNone/>
+            </a:pPr>
+            <a:r>
+              <a:rPr lang="en-US" sz="4000" b="1" dirty="0">
+                <a:solidFill>
+                  <a:srgbClr val="111111"/>
+                </a:solidFill>
+                <a:latin typeface="Times New Roman" pitchFamily="34" charset="0"/>
+                <a:ea typeface="Times New Roman" pitchFamily="34" charset="-122"/>
+                <a:cs typeface="Times New Roman" pitchFamily="34" charset="-120"/>
+              </a:rPr>
+              <a:t>Mayo-Louti: </a:t>
+            </a:r>
+            <a:pPr algn="l" indent="0" marL="0">
+              <a:spcAft>
+                <a:spcPts val="800"/>
+              </a:spcAft>
+              <a:buNone/>
+            </a:pPr>
+            <a:r>
+              <a:rPr lang="en-US" sz="4000" dirty="0">
+                <a:solidFill>
+                  <a:srgbClr val="111111"/>
+                </a:solidFill>
+                <a:latin typeface="Times New Roman" pitchFamily="34" charset="0"/>
+                <a:ea typeface="Times New Roman" pitchFamily="34" charset="-122"/>
+                <a:cs typeface="Times New Roman" pitchFamily="34" charset="-120"/>
+              </a:rPr>
+              <a:t>Its headquarters is Guider.</a:t>
             </a:r>
             <a:endParaRPr lang="en-US" sz="4000" dirty="0"/>
           </a:p>
@@ -16084,7 +17110,7 @@
                 <a:ea typeface="Calibri" pitchFamily="34" charset="-122"/>
                 <a:cs typeface="Calibri" pitchFamily="34" charset="-120"/>
               </a:rPr>
-              <a:t>REMEDIATION</a:t>
+              <a:t>BOARD SUMMARY</a:t>
             </a:r>
             <a:endParaRPr lang="en-US" sz="1400" dirty="0"/>
           </a:p>
@@ -16149,7 +17175,7 @@
                 <a:ea typeface="Times New Roman" pitchFamily="34" charset="-122"/>
                 <a:cs typeface="Times New Roman" pitchFamily="34" charset="-120"/>
               </a:rPr>
-              <a:t>Remediation</a:t>
+              <a:t>1. Theoretical Basis</a:t>
             </a:r>
             <a:endParaRPr lang="en-US" sz="3600" dirty="0"/>
           </a:p>
@@ -16163,8 +17189,47 @@
         </p:nvSpPr>
         <p:spPr>
           <a:xfrm>
-            <a:off x="5349240" y="1783080"/>
-            <a:ext cx="6522415" cy="4663440"/>
+            <a:off x="5349240" y="1737360"/>
+            <a:ext cx="6522415" cy="457200"/>
+          </a:xfrm>
+          <a:prstGeom prst="rect">
+            <a:avLst/>
+          </a:prstGeom>
+          <a:noFill/>
+          <a:ln/>
+        </p:spPr>
+        <p:txBody>
+          <a:bodyPr wrap="square" lIns="0" tIns="0" rIns="0" bIns="0" rtlCol="0" anchor="ctr"/>
+          <a:lstStyle/>
+          <a:p>
+            <a:pPr algn="l" indent="0" marL="0">
+              <a:buNone/>
+            </a:pPr>
+            <a:r>
+              <a:rPr lang="en-US" sz="1600" b="1" dirty="0">
+                <a:solidFill>
+                  <a:srgbClr val="990011"/>
+                </a:solidFill>
+                <a:latin typeface="Times New Roman" pitchFamily="34" charset="0"/>
+                <a:ea typeface="Times New Roman" pitchFamily="34" charset="-122"/>
+                <a:cs typeface="Times New Roman" pitchFamily="34" charset="-120"/>
+              </a:rPr>
+              <a:t>B) The Divisional Headquarters of the North Region (continued)</a:t>
+            </a:r>
+            <a:endParaRPr lang="en-US" sz="1600" dirty="0"/>
+          </a:p>
+        </p:txBody>
+      </p:sp>
+      <p:sp>
+        <p:nvSpPr>
+          <p:cNvPr id="6" name="Text 3"/>
+          <p:cNvSpPr/>
+          <p:nvPr/>
+        </p:nvSpPr>
+        <p:spPr>
+          <a:xfrm>
+            <a:off x="5349240" y="2240280"/>
+            <a:ext cx="6522415" cy="4206240"/>
           </a:xfrm>
           <a:prstGeom prst="rect">
             <a:avLst/>
@@ -16191,18 +17256,13 @@
                 <a:ea typeface="Times New Roman" pitchFamily="34" charset="-122"/>
                 <a:cs typeface="Times New Roman" pitchFamily="34" charset="-120"/>
               </a:rPr>
-              <a:t>Fill in the blanks:</a:t>
-            </a:r>
-            <a:endParaRPr lang="en-US" sz="4000" dirty="0"/>
-          </a:p>
-          <a:p>
-            <a:pPr algn="l" marL="342900" indent="-342900">
+              <a:t>Mayo-Rey: </a:t>
+            </a:r>
+            <a:pPr algn="l" indent="0" marL="0">
               <a:spcAft>
                 <a:spcPts val="800"/>
               </a:spcAft>
-              <a:buSzPct val="100000"/>
-              <a:buFont typeface="+mj-lt"/>
-              <a:buAutoNum type="arabicPeriod" startAt="1"/>
+              <a:buNone/>
             </a:pPr>
             <a:r>
               <a:rPr lang="en-US" sz="4000" dirty="0">
@@ -16213,29 +17273,7 @@
                 <a:ea typeface="Times New Roman" pitchFamily="34" charset="-122"/>
                 <a:cs typeface="Times New Roman" pitchFamily="34" charset="-120"/>
               </a:rPr>
-              <a:t>The headquarters of the East Region is ______.</a:t>
-            </a:r>
-            <a:endParaRPr lang="en-US" sz="4000" dirty="0"/>
-          </a:p>
-          <a:p>
-            <a:pPr algn="l" marL="342900" indent="-342900">
-              <a:spcAft>
-                <a:spcPts val="800"/>
-              </a:spcAft>
-              <a:buSzPct val="100000"/>
-              <a:buFont typeface="+mj-lt"/>
-              <a:buAutoNum type="arabicPeriod" startAt="1"/>
-            </a:pPr>
-            <a:r>
-              <a:rPr lang="en-US" sz="4000" dirty="0">
-                <a:solidFill>
-                  <a:srgbClr val="111111"/>
-                </a:solidFill>
-                <a:latin typeface="Times New Roman" pitchFamily="34" charset="0"/>
-                <a:ea typeface="Times New Roman" pitchFamily="34" charset="-122"/>
-                <a:cs typeface="Times New Roman" pitchFamily="34" charset="-120"/>
-              </a:rPr>
-              <a:t>The headquarters of the South Region is ______.</a:t>
+              <a:t>Its headquarters is Tcholliré.</a:t>
             </a:r>
             <a:endParaRPr lang="en-US" sz="4000" dirty="0"/>
           </a:p>
@@ -16347,15 +17385,135 @@
                 <a:ea typeface="Calibri" pitchFamily="34" charset="-122"/>
                 <a:cs typeface="Calibri" pitchFamily="34" charset="-120"/>
               </a:rPr>
-              <a:t>REMEDIATION</a:t>
+              <a:t>BOARD SUMMARY</a:t>
             </a:r>
             <a:endParaRPr lang="en-US" sz="1400" dirty="0"/>
+          </a:p>
+        </p:txBody>
+      </p:sp>
+      <p:sp>
+        <p:nvSpPr>
+          <p:cNvPr id="3" name="Text 1"/>
+          <p:cNvSpPr/>
+          <p:nvPr/>
+        </p:nvSpPr>
+        <p:spPr>
+          <a:xfrm>
+            <a:off x="365760" y="1005840"/>
+            <a:ext cx="11460175" cy="731520"/>
+          </a:xfrm>
+          <a:prstGeom prst="rect">
+            <a:avLst/>
+          </a:prstGeom>
+          <a:noFill/>
+          <a:ln/>
+        </p:spPr>
+        <p:txBody>
+          <a:bodyPr wrap="square" lIns="0" tIns="0" rIns="0" bIns="0" rtlCol="0" anchor="ctr">
+            <a:normAutofit/>
+          </a:bodyPr>
+          <a:lstStyle/>
+          <a:p>
+            <a:pPr algn="ctr" indent="0" marL="0">
+              <a:buNone/>
+            </a:pPr>
+            <a:r>
+              <a:rPr lang="en-US" sz="3600" b="1" dirty="0">
+                <a:solidFill>
+                  <a:srgbClr val="990011"/>
+                </a:solidFill>
+                <a:latin typeface="Times New Roman" pitchFamily="34" charset="0"/>
+                <a:ea typeface="Times New Roman" pitchFamily="34" charset="-122"/>
+                <a:cs typeface="Times New Roman" pitchFamily="34" charset="-120"/>
+              </a:rPr>
+              <a:t>2. Practical Exercise</a:t>
+            </a:r>
+            <a:endParaRPr lang="en-US" sz="3600" dirty="0"/>
+          </a:p>
+        </p:txBody>
+      </p:sp>
+      <p:sp>
+        <p:nvSpPr>
+          <p:cNvPr id="4" name="Text 2"/>
+          <p:cNvSpPr/>
+          <p:nvPr/>
+        </p:nvSpPr>
+        <p:spPr>
+          <a:xfrm>
+            <a:off x="365760" y="1783080"/>
+            <a:ext cx="4846320" cy="4617720"/>
+          </a:xfrm>
+          <a:prstGeom prst="rect">
+            <a:avLst/>
+          </a:prstGeom>
+          <a:noFill/>
+          <a:ln/>
+        </p:spPr>
+        <p:txBody>
+          <a:bodyPr wrap="square" lIns="0" tIns="0" rIns="0" bIns="0" rtlCol="0" anchor="t"/>
+          <a:lstStyle/>
+          <a:p>
+            <a:pPr algn="l" indent="0" marL="0">
+              <a:spcAft>
+                <a:spcPts val="800"/>
+              </a:spcAft>
+              <a:buNone/>
+            </a:pPr>
+            <a:r>
+              <a:rPr lang="en-US" sz="3600" i="1" dirty="0">
+                <a:solidFill>
+                  <a:srgbClr val="111111"/>
+                </a:solidFill>
+                <a:latin typeface="Times New Roman" pitchFamily="34" charset="0"/>
+                <a:ea typeface="Times New Roman" pitchFamily="34" charset="-122"/>
+                <a:cs typeface="Times New Roman" pitchFamily="34" charset="-120"/>
+              </a:rPr>
+              <a:t>On a base map of Cameroon, learners do the following:</a:t>
+            </a:r>
+            <a:endParaRPr lang="en-US" sz="3600" dirty="0"/>
+          </a:p>
+          <a:p>
+            <a:pPr algn="l" indent="0" marL="0">
+              <a:spcAft>
+                <a:spcPts val="800"/>
+              </a:spcAft>
+              <a:buNone/>
+            </a:pPr>
+            <a:r>
+              <a:rPr lang="en-US" sz="3600" b="1" dirty="0">
+                <a:solidFill>
+                  <a:srgbClr val="111111"/>
+                </a:solidFill>
+                <a:latin typeface="Times New Roman" pitchFamily="34" charset="0"/>
+                <a:ea typeface="Times New Roman" pitchFamily="34" charset="-122"/>
+                <a:cs typeface="Times New Roman" pitchFamily="34" charset="-120"/>
+              </a:rPr>
+              <a:t>Locate the regional headquarters: </a:t>
+            </a:r>
+            <a:pPr algn="l" indent="0" marL="0">
+              <a:spcAft>
+                <a:spcPts val="800"/>
+              </a:spcAft>
+              <a:buNone/>
+            </a:pPr>
+            <a:r>
+              <a:rPr lang="en-US" sz="3600" dirty="0">
+                <a:solidFill>
+                  <a:srgbClr val="111111"/>
+                </a:solidFill>
+                <a:latin typeface="Times New Roman" pitchFamily="34" charset="0"/>
+                <a:ea typeface="Times New Roman" pitchFamily="34" charset="-122"/>
+                <a:cs typeface="Times New Roman" pitchFamily="34" charset="-120"/>
+              </a:rPr>
+              <a:t>Place each of the ten towns in its region and write its name.</a:t>
+            </a:r>
+            <a:endParaRPr lang="en-US" sz="3600" dirty="0"/>
           </a:p>
         </p:txBody>
       </p:sp>
       <p:pic>
         <p:nvPicPr>
-          <p:cNvPr id="3" name="Image 0" descr="/home/claude/f4/img/minesec_sheet.png">    </p:cNvPr>
+          <p:cNvPr id="5" name="Image 0" descr="/home/claude/f4/img/v2/cmr_towns_big.png">    </p:cNvPr>
           <p:cNvPicPr>
             <a:picLocks noChangeAspect="1"/>
           </p:cNvPicPr>
@@ -16369,8 +17527,8 @@
         </p:blipFill>
         <p:spPr>
           <a:xfrm>
-            <a:off x="0" y="658368"/>
-            <a:ext cx="5120640" cy="5833872"/>
+            <a:off x="5349240" y="2253310"/>
+            <a:ext cx="6659575" cy="3329788"/>
           </a:xfrm>
           <a:prstGeom prst="rect">
             <a:avLst/>
@@ -16379,14 +17537,14 @@
       </p:pic>
       <p:sp>
         <p:nvSpPr>
-          <p:cNvPr id="4" name="Text 1"/>
+          <p:cNvPr id="6" name="Text 3"/>
           <p:cNvSpPr/>
           <p:nvPr/>
         </p:nvSpPr>
         <p:spPr>
           <a:xfrm>
-            <a:off x="5349240" y="1005840"/>
-            <a:ext cx="6522415" cy="731520"/>
+            <a:off x="5349240" y="6089904"/>
+            <a:ext cx="6659575" cy="347472"/>
           </a:xfrm>
           <a:prstGeom prst="rect">
             <a:avLst/>
@@ -16395,70 +17553,24 @@
           <a:ln/>
         </p:spPr>
         <p:txBody>
-          <a:bodyPr wrap="square" lIns="0" tIns="0" rIns="0" bIns="0" rtlCol="0" anchor="ctr">
-            <a:normAutofit/>
-          </a:bodyPr>
+          <a:bodyPr wrap="square" lIns="0" tIns="0" rIns="0" bIns="0" rtlCol="0" anchor="ctr"/>
           <a:lstStyle/>
           <a:p>
             <a:pPr algn="ctr" indent="0" marL="0">
               <a:buNone/>
             </a:pPr>
             <a:r>
-              <a:rPr lang="en-US" sz="3600" b="1" dirty="0">
-                <a:solidFill>
-                  <a:srgbClr val="990011"/>
+              <a:rPr lang="en-US" sz="1600" i="1" dirty="0">
+                <a:solidFill>
+                  <a:srgbClr val="555555"/>
                 </a:solidFill>
                 <a:latin typeface="Times New Roman" pitchFamily="34" charset="0"/>
                 <a:ea typeface="Times New Roman" pitchFamily="34" charset="-122"/>
                 <a:cs typeface="Times New Roman" pitchFamily="34" charset="-120"/>
               </a:rPr>
-              <a:t>Remediation (continued)</a:t>
-            </a:r>
-            <a:endParaRPr lang="en-US" sz="3600" dirty="0"/>
-          </a:p>
-        </p:txBody>
-      </p:sp>
-      <p:sp>
-        <p:nvSpPr>
-          <p:cNvPr id="5" name="Text 2"/>
-          <p:cNvSpPr/>
-          <p:nvPr/>
-        </p:nvSpPr>
-        <p:spPr>
-          <a:xfrm>
-            <a:off x="5349240" y="1783080"/>
-            <a:ext cx="6522415" cy="4663440"/>
-          </a:xfrm>
-          <a:prstGeom prst="rect">
-            <a:avLst/>
-          </a:prstGeom>
-          <a:noFill/>
-          <a:ln/>
-        </p:spPr>
-        <p:txBody>
-          <a:bodyPr wrap="square" lIns="0" tIns="0" rIns="0" bIns="0" rtlCol="0" anchor="t"/>
-          <a:lstStyle/>
-          <a:p>
-            <a:pPr algn="l" marL="342900" indent="-342900">
-              <a:spcAft>
-                <a:spcPts val="800"/>
-              </a:spcAft>
-              <a:buSzPct val="100000"/>
-              <a:buFont typeface="+mj-lt"/>
-              <a:buAutoNum type="arabicPeriod" startAt="1"/>
-            </a:pPr>
-            <a:r>
-              <a:rPr lang="en-US" sz="4000" dirty="0">
-                <a:solidFill>
-                  <a:srgbClr val="111111"/>
-                </a:solidFill>
-                <a:latin typeface="Times New Roman" pitchFamily="34" charset="0"/>
-                <a:ea typeface="Times New Roman" pitchFamily="34" charset="-122"/>
-                <a:cs typeface="Times New Roman" pitchFamily="34" charset="-120"/>
-              </a:rPr>
-              <a:t>The headquarters of the Faro division is ______.</a:t>
-            </a:r>
-            <a:endParaRPr lang="en-US" sz="4000" dirty="0"/>
+              <a:t>Illustration: the main towns of Cameroon</a:t>
+            </a:r>
+            <a:endParaRPr lang="en-US" sz="1600" dirty="0"/>
           </a:p>
         </p:txBody>
       </p:sp>
@@ -16568,7 +17680,7 @@
                 <a:ea typeface="Calibri" pitchFamily="34" charset="-122"/>
                 <a:cs typeface="Calibri" pitchFamily="34" charset="-120"/>
               </a:rPr>
-              <a:t>HOMEWORK</a:t>
+              <a:t>BOARD SUMMARY</a:t>
             </a:r>
             <a:endParaRPr lang="en-US" sz="1400" dirty="0"/>
           </a:p>
@@ -16591,7 +17703,7 @@
         <p:spPr>
           <a:xfrm>
             <a:off x="0" y="658368"/>
-            <a:ext cx="5120640" cy="5833872"/>
+            <a:ext cx="2468880" cy="5833872"/>
           </a:xfrm>
           <a:prstGeom prst="rect">
             <a:avLst/>
@@ -16606,8 +17718,8 @@
         </p:nvSpPr>
         <p:spPr>
           <a:xfrm>
-            <a:off x="5349240" y="1005840"/>
-            <a:ext cx="6522415" cy="731520"/>
+            <a:off x="2697480" y="1005840"/>
+            <a:ext cx="9174175" cy="731520"/>
           </a:xfrm>
           <a:prstGeom prst="rect">
             <a:avLst/>
@@ -16633,7 +17745,7 @@
                 <a:ea typeface="Times New Roman" pitchFamily="34" charset="-122"/>
                 <a:cs typeface="Times New Roman" pitchFamily="34" charset="-120"/>
               </a:rPr>
-              <a:t>Homework</a:t>
+              <a:t>2. Practical Exercise</a:t>
             </a:r>
             <a:endParaRPr lang="en-US" sz="3600" dirty="0"/>
           </a:p>
@@ -16647,8 +17759,8 @@
         </p:nvSpPr>
         <p:spPr>
           <a:xfrm>
-            <a:off x="5349240" y="1783080"/>
-            <a:ext cx="6522415" cy="4663440"/>
+            <a:off x="2697480" y="1783080"/>
+            <a:ext cx="9174175" cy="4663440"/>
           </a:xfrm>
           <a:prstGeom prst="rect">
             <a:avLst/>
@@ -16667,7 +17779,7 @@
               <a:buNone/>
             </a:pPr>
             <a:r>
-              <a:rPr lang="en-US" sz="4000" dirty="0">
+              <a:rPr lang="en-US" sz="4000" b="1" dirty="0">
                 <a:solidFill>
                   <a:srgbClr val="111111"/>
                 </a:solidFill>
@@ -16675,7 +17787,61 @@
                 <a:ea typeface="Times New Roman" pitchFamily="34" charset="-122"/>
                 <a:cs typeface="Times New Roman" pitchFamily="34" charset="-120"/>
               </a:rPr>
-              <a:t>On a base map of Cameroon, locate and name the ten regional headquarters.</a:t>
+              <a:t>Locate the divisional headquarters: </a:t>
+            </a:r>
+            <a:pPr algn="l" indent="0" marL="0">
+              <a:spcAft>
+                <a:spcPts val="800"/>
+              </a:spcAft>
+              <a:buNone/>
+            </a:pPr>
+            <a:r>
+              <a:rPr lang="en-US" sz="4000" dirty="0">
+                <a:solidFill>
+                  <a:srgbClr val="111111"/>
+                </a:solidFill>
+                <a:latin typeface="Times New Roman" pitchFamily="34" charset="0"/>
+                <a:ea typeface="Times New Roman" pitchFamily="34" charset="-122"/>
+                <a:cs typeface="Times New Roman" pitchFamily="34" charset="-120"/>
+              </a:rPr>
+              <a:t>On a base map of the North Region, place Garoua, Poli, Guider and Tcholliré and write their names.</a:t>
+            </a:r>
+            <a:endParaRPr lang="en-US" sz="4000" dirty="0"/>
+          </a:p>
+          <a:p>
+            <a:pPr algn="l" indent="0" marL="0">
+              <a:spcAft>
+                <a:spcPts val="800"/>
+              </a:spcAft>
+              <a:buNone/>
+            </a:pPr>
+            <a:r>
+              <a:rPr lang="en-US" sz="4000" b="1" dirty="0">
+                <a:solidFill>
+                  <a:srgbClr val="111111"/>
+                </a:solidFill>
+                <a:latin typeface="Times New Roman" pitchFamily="34" charset="0"/>
+                <a:ea typeface="Times New Roman" pitchFamily="34" charset="-122"/>
+                <a:cs typeface="Times New Roman" pitchFamily="34" charset="-120"/>
+              </a:rPr>
+              <a:t>Complete the map: </a:t>
+            </a:r>
+            <a:pPr algn="l" indent="0" marL="0">
+              <a:spcAft>
+                <a:spcPts val="800"/>
+              </a:spcAft>
+              <a:buNone/>
+            </a:pPr>
+            <a:r>
+              <a:rPr lang="en-US" sz="4000" dirty="0">
+                <a:solidFill>
+                  <a:srgbClr val="111111"/>
+                </a:solidFill>
+                <a:latin typeface="Times New Roman" pitchFamily="34" charset="0"/>
+                <a:ea typeface="Times New Roman" pitchFamily="34" charset="-122"/>
+                <a:cs typeface="Times New Roman" pitchFamily="34" charset="-120"/>
+              </a:rPr>
+              <a:t>Give the map a title and a key that explains the symbols used.</a:t>
             </a:r>
             <a:endParaRPr lang="en-US" sz="4000" dirty="0"/>
           </a:p>
@@ -16787,7 +17953,7 @@
                 <a:ea typeface="Calibri" pitchFamily="34" charset="-122"/>
                 <a:cs typeface="Calibri" pitchFamily="34" charset="-120"/>
               </a:rPr>
-              <a:t>NEXT LESSON</a:t>
+              <a:t>FORMATIVE EVALUATION</a:t>
             </a:r>
             <a:endParaRPr lang="en-US" sz="1400" dirty="0"/>
           </a:p>
@@ -16852,7 +18018,7 @@
                 <a:ea typeface="Times New Roman" pitchFamily="34" charset="-122"/>
                 <a:cs typeface="Times New Roman" pitchFamily="34" charset="-120"/>
               </a:rPr>
-              <a:t>Next Lesson</a:t>
+              <a:t>Evaluation 1</a:t>
             </a:r>
             <a:endParaRPr lang="en-US" sz="3600" dirty="0"/>
           </a:p>
@@ -16876,17 +18042,17 @@
           <a:ln/>
         </p:spPr>
         <p:txBody>
-          <a:bodyPr wrap="square" lIns="0" tIns="0" rIns="0" bIns="0" rtlCol="0" anchor="ctr"/>
-          <a:lstStyle/>
-          <a:p>
-            <a:pPr algn="ctr" indent="0" marL="0">
+          <a:bodyPr wrap="square" lIns="0" tIns="0" rIns="0" bIns="0" rtlCol="0" anchor="t"/>
+          <a:lstStyle/>
+          <a:p>
+            <a:pPr algn="l" indent="0" marL="0">
               <a:spcAft>
                 <a:spcPts val="800"/>
               </a:spcAft>
               <a:buNone/>
             </a:pPr>
             <a:r>
-              <a:rPr lang="en-US" sz="4000" b="1" dirty="0">
+              <a:rPr lang="en-US" sz="4000" dirty="0">
                 <a:solidFill>
                   <a:srgbClr val="111111"/>
                 </a:solidFill>
@@ -16894,27 +18060,7 @@
                 <a:ea typeface="Times New Roman" pitchFamily="34" charset="-122"/>
                 <a:cs typeface="Times New Roman" pitchFamily="34" charset="-120"/>
               </a:rPr>
-              <a:t>Our next lesson will be on:</a:t>
-            </a:r>
-            <a:endParaRPr lang="en-US" sz="4000" dirty="0"/>
-          </a:p>
-          <a:p>
-            <a:pPr algn="ctr" indent="0" marL="0">
-              <a:spcAft>
-                <a:spcPts val="800"/>
-              </a:spcAft>
-              <a:buNone/>
-            </a:pPr>
-            <a:r>
-              <a:rPr lang="en-US" sz="4000" b="1" dirty="0">
-                <a:solidFill>
-                  <a:srgbClr val="990011"/>
-                </a:solidFill>
-                <a:latin typeface="Times New Roman" pitchFamily="34" charset="0"/>
-                <a:ea typeface="Times New Roman" pitchFamily="34" charset="-122"/>
-                <a:cs typeface="Times New Roman" pitchFamily="34" charset="-120"/>
-              </a:rPr>
-              <a:t>Further Study 6: Urban Problems in Cameroon</a:t>
+              <a:t>Give the headquarters of the West and North-West Regions.</a:t>
             </a:r>
             <a:endParaRPr lang="en-US" sz="4000" dirty="0"/>
           </a:p>
@@ -17026,22 +18172,46 @@
                 <a:ea typeface="Calibri" pitchFamily="34" charset="-122"/>
                 <a:cs typeface="Calibri" pitchFamily="34" charset="-120"/>
               </a:rPr>
-              <a:t>BILINGUAL GAME</a:t>
+              <a:t>FORMATIVE EVALUATION</a:t>
             </a:r>
             <a:endParaRPr lang="en-US" sz="1400" dirty="0"/>
           </a:p>
         </p:txBody>
       </p:sp>
-      <p:sp>
-        <p:nvSpPr>
-          <p:cNvPr id="3" name="Text 1"/>
+      <p:pic>
+        <p:nvPicPr>
+          <p:cNvPr id="3" name="Image 0" descr="/home/claude/f4/img/minesec_sheet.png">    </p:cNvPr>
+          <p:cNvPicPr>
+            <a:picLocks noChangeAspect="1"/>
+          </p:cNvPicPr>
+          <p:nvPr/>
+        </p:nvPicPr>
+        <p:blipFill>
+          <a:blip r:embed="rId1"/>
+          <a:stretch>
+            <a:fillRect/>
+          </a:stretch>
+        </p:blipFill>
+        <p:spPr>
+          <a:xfrm>
+            <a:off x="0" y="658368"/>
+            <a:ext cx="5120640" cy="5833872"/>
+          </a:xfrm>
+          <a:prstGeom prst="rect">
+            <a:avLst/>
+          </a:prstGeom>
+        </p:spPr>
+      </p:pic>
+      <p:sp>
+        <p:nvSpPr>
+          <p:cNvPr id="4" name="Text 1"/>
           <p:cNvSpPr/>
           <p:nvPr/>
         </p:nvSpPr>
         <p:spPr>
           <a:xfrm>
-            <a:off x="457200" y="1005840"/>
-            <a:ext cx="11277295" cy="731520"/>
+            <a:off x="5349240" y="1005840"/>
+            <a:ext cx="6522415" cy="731520"/>
           </a:xfrm>
           <a:prstGeom prst="rect">
             <a:avLst/>
@@ -17050,7 +18220,9 @@
           <a:ln/>
         </p:spPr>
         <p:txBody>
-          <a:bodyPr wrap="square" lIns="0" tIns="0" rIns="0" bIns="0" rtlCol="0" anchor="ctr"/>
+          <a:bodyPr wrap="square" lIns="0" tIns="0" rIns="0" bIns="0" rtlCol="0" anchor="ctr">
+            <a:normAutofit/>
+          </a:bodyPr>
           <a:lstStyle/>
           <a:p>
             <a:pPr algn="ctr" indent="0" marL="0">
@@ -17065,6 +18237,1798 @@
                 <a:ea typeface="Times New Roman" pitchFamily="34" charset="-122"/>
                 <a:cs typeface="Times New Roman" pitchFamily="34" charset="-120"/>
               </a:rPr>
+              <a:t>Expected Answer</a:t>
+            </a:r>
+            <a:endParaRPr lang="en-US" sz="3600" dirty="0"/>
+          </a:p>
+        </p:txBody>
+      </p:sp>
+      <p:sp>
+        <p:nvSpPr>
+          <p:cNvPr id="5" name="Text 2"/>
+          <p:cNvSpPr/>
+          <p:nvPr/>
+        </p:nvSpPr>
+        <p:spPr>
+          <a:xfrm>
+            <a:off x="5349240" y="1783080"/>
+            <a:ext cx="6522415" cy="4663440"/>
+          </a:xfrm>
+          <a:prstGeom prst="rect">
+            <a:avLst/>
+          </a:prstGeom>
+          <a:noFill/>
+          <a:ln/>
+        </p:spPr>
+        <p:txBody>
+          <a:bodyPr wrap="square" lIns="0" tIns="0" rIns="0" bIns="0" rtlCol="0" anchor="t"/>
+          <a:lstStyle/>
+          <a:p>
+            <a:pPr algn="l" indent="0" marL="0">
+              <a:spcAft>
+                <a:spcPts val="800"/>
+              </a:spcAft>
+              <a:buNone/>
+            </a:pPr>
+            <a:r>
+              <a:rPr lang="en-US" sz="4000" dirty="0">
+                <a:solidFill>
+                  <a:srgbClr val="111111"/>
+                </a:solidFill>
+                <a:latin typeface="Times New Roman" pitchFamily="34" charset="0"/>
+                <a:ea typeface="Times New Roman" pitchFamily="34" charset="-122"/>
+                <a:cs typeface="Times New Roman" pitchFamily="34" charset="-120"/>
+              </a:rPr>
+              <a:t>Bafoussam and Bamenda.</a:t>
+            </a:r>
+            <a:endParaRPr lang="en-US" sz="4000" dirty="0"/>
+          </a:p>
+        </p:txBody>
+      </p:sp>
+      <p:sp>
+        <p:nvSpPr>
+          <p:cNvPr id="25" name="Slide Number Placeholder 0"/>
+          <p:cNvSpPr>
+            <a:spLocks noGrp="1"/>
+          </p:cNvSpPr>
+          <p:nvPr>
+            <p:ph type="sldNum" sz="quarter" idx="4294967295"/>
+          </p:nvPr>
+        </p:nvSpPr>
+        <p:spPr>
+          <a:xfrm>
+            <a:off x="27432" y="91440"/>
+            <a:ext cx="585216" cy="475488"/>
+          </a:xfrm>
+          <a:prstGeom prst="rect">
+            <a:avLst/>
+          </a:prstGeom>
+          <a:extLst>
+            <a:ext uri="{C572A759-6A51-4108-AA02-DFA0A04FC94B}">
+              <ma14:wrappingTextBoxFlag xmlns:ma14="http://schemas.microsoft.com/office/mac/drawingml/2011/main" val="0"/>
+            </a:ext>
+          </a:extLst>
+        </p:spPr>
+        <p:txBody>
+          <a:bodyPr/>
+          <a:lstStyle>
+            <a:lvl1pPr>
+              <a:defRPr sz="2000">
+                <a:solidFill>
+                  <a:srgbClr val="FFFFFF"/>
+                </a:solidFill>
+                <a:latin typeface="Calibri"/>
+                <a:ea typeface="Calibri"/>
+                <a:cs typeface="Calibri"/>
+              </a:defRPr>
+            </a:lvl1pPr>
+          </a:lstStyle>
+          <a:p>
+            <a:pPr algn="ctr"/>
+            <a:fld id="{F7021451-1387-4CA6-816F-3879F97B5CBC}" type="slidenum">
+              <a:rPr b="1" lang="en-US"/>
+              <a:t>48</a:t>
+            </a:fld>
+            <a:endParaRPr lang="en-US"/>
+          </a:p>
+        </p:txBody>
+      </p:sp>
+    </p:spTree>
+  </p:cSld>
+  <p:clrMapOvr>
+    <a:masterClrMapping/>
+  </p:clrMapOvr>
+</p:sld>
+</file>
+
+<file path=ppt/slides/slide49.xml><?xml version="1.0" encoding="utf-8"?>
+<p:sld xmlns:a="http://schemas.openxmlformats.org/drawingml/2006/main" xmlns:r="http://schemas.openxmlformats.org/officeDocument/2006/relationships" xmlns:p="http://schemas.openxmlformats.org/presentationml/2006/main">
+  <p:cSld name="Slide 49">
+    <p:spTree>
+      <p:nvGrpSpPr>
+        <p:cNvPr id="1" name=""/>
+        <p:cNvGrpSpPr/>
+        <p:nvPr/>
+      </p:nvGrpSpPr>
+      <p:grpSpPr>
+        <a:xfrm>
+          <a:off x="0" y="0"/>
+          <a:ext cx="0" cy="0"/>
+          <a:chOff x="0" y="0"/>
+          <a:chExt cx="0" cy="0"/>
+        </a:xfrm>
+      </p:grpSpPr>
+      <p:sp>
+        <p:nvSpPr>
+          <p:cNvPr id="2" name="Text 0"/>
+          <p:cNvSpPr/>
+          <p:nvPr/>
+        </p:nvSpPr>
+        <p:spPr>
+          <a:xfrm>
+            <a:off x="457200" y="713232"/>
+            <a:ext cx="11368735" cy="274320"/>
+          </a:xfrm>
+          <a:prstGeom prst="rect">
+            <a:avLst/>
+          </a:prstGeom>
+          <a:noFill/>
+          <a:ln/>
+        </p:spPr>
+        <p:txBody>
+          <a:bodyPr wrap="square" lIns="0" tIns="0" rIns="0" bIns="0" rtlCol="0" anchor="ctr"/>
+          <a:lstStyle/>
+          <a:p>
+            <a:pPr algn="r" indent="0" marL="0">
+              <a:buNone/>
+            </a:pPr>
+            <a:r>
+              <a:rPr lang="en-US" sz="1400" b="1" dirty="0">
+                <a:solidFill>
+                  <a:srgbClr val="1C3F6E"/>
+                </a:solidFill>
+                <a:latin typeface="Calibri" pitchFamily="34" charset="0"/>
+                <a:ea typeface="Calibri" pitchFamily="34" charset="-122"/>
+                <a:cs typeface="Calibri" pitchFamily="34" charset="-120"/>
+              </a:rPr>
+              <a:t>FORMATIVE EVALUATION</a:t>
+            </a:r>
+            <a:endParaRPr lang="en-US" sz="1400" dirty="0"/>
+          </a:p>
+        </p:txBody>
+      </p:sp>
+      <p:pic>
+        <p:nvPicPr>
+          <p:cNvPr id="3" name="Image 0" descr="/home/claude/f4/img/minesec_sheet.png">    </p:cNvPr>
+          <p:cNvPicPr>
+            <a:picLocks noChangeAspect="1"/>
+          </p:cNvPicPr>
+          <p:nvPr/>
+        </p:nvPicPr>
+        <p:blipFill>
+          <a:blip r:embed="rId1"/>
+          <a:stretch>
+            <a:fillRect/>
+          </a:stretch>
+        </p:blipFill>
+        <p:spPr>
+          <a:xfrm>
+            <a:off x="0" y="658368"/>
+            <a:ext cx="5120640" cy="5833872"/>
+          </a:xfrm>
+          <a:prstGeom prst="rect">
+            <a:avLst/>
+          </a:prstGeom>
+        </p:spPr>
+      </p:pic>
+      <p:sp>
+        <p:nvSpPr>
+          <p:cNvPr id="4" name="Text 1"/>
+          <p:cNvSpPr/>
+          <p:nvPr/>
+        </p:nvSpPr>
+        <p:spPr>
+          <a:xfrm>
+            <a:off x="5349240" y="1005840"/>
+            <a:ext cx="6522415" cy="731520"/>
+          </a:xfrm>
+          <a:prstGeom prst="rect">
+            <a:avLst/>
+          </a:prstGeom>
+          <a:noFill/>
+          <a:ln/>
+        </p:spPr>
+        <p:txBody>
+          <a:bodyPr wrap="square" lIns="0" tIns="0" rIns="0" bIns="0" rtlCol="0" anchor="ctr">
+            <a:normAutofit/>
+          </a:bodyPr>
+          <a:lstStyle/>
+          <a:p>
+            <a:pPr algn="ctr" indent="0" marL="0">
+              <a:buNone/>
+            </a:pPr>
+            <a:r>
+              <a:rPr lang="en-US" sz="3600" b="1" dirty="0">
+                <a:solidFill>
+                  <a:srgbClr val="990011"/>
+                </a:solidFill>
+                <a:latin typeface="Times New Roman" pitchFamily="34" charset="0"/>
+                <a:ea typeface="Times New Roman" pitchFamily="34" charset="-122"/>
+                <a:cs typeface="Times New Roman" pitchFamily="34" charset="-120"/>
+              </a:rPr>
+              <a:t>Evaluation 2</a:t>
+            </a:r>
+            <a:endParaRPr lang="en-US" sz="3600" dirty="0"/>
+          </a:p>
+        </p:txBody>
+      </p:sp>
+      <p:sp>
+        <p:nvSpPr>
+          <p:cNvPr id="5" name="Text 2"/>
+          <p:cNvSpPr/>
+          <p:nvPr/>
+        </p:nvSpPr>
+        <p:spPr>
+          <a:xfrm>
+            <a:off x="5349240" y="1783080"/>
+            <a:ext cx="6522415" cy="4663440"/>
+          </a:xfrm>
+          <a:prstGeom prst="rect">
+            <a:avLst/>
+          </a:prstGeom>
+          <a:noFill/>
+          <a:ln/>
+        </p:spPr>
+        <p:txBody>
+          <a:bodyPr wrap="square" lIns="0" tIns="0" rIns="0" bIns="0" rtlCol="0" anchor="t"/>
+          <a:lstStyle/>
+          <a:p>
+            <a:pPr algn="l" indent="0" marL="0">
+              <a:spcAft>
+                <a:spcPts val="800"/>
+              </a:spcAft>
+              <a:buNone/>
+            </a:pPr>
+            <a:r>
+              <a:rPr lang="en-US" sz="4000" dirty="0">
+                <a:solidFill>
+                  <a:srgbClr val="111111"/>
+                </a:solidFill>
+                <a:latin typeface="Times New Roman" pitchFamily="34" charset="0"/>
+                <a:ea typeface="Times New Roman" pitchFamily="34" charset="-122"/>
+                <a:cs typeface="Times New Roman" pitchFamily="34" charset="-120"/>
+              </a:rPr>
+              <a:t>What is the headquarters of the Faro division?</a:t>
+            </a:r>
+            <a:endParaRPr lang="en-US" sz="4000" dirty="0"/>
+          </a:p>
+        </p:txBody>
+      </p:sp>
+      <p:sp>
+        <p:nvSpPr>
+          <p:cNvPr id="25" name="Slide Number Placeholder 0"/>
+          <p:cNvSpPr>
+            <a:spLocks noGrp="1"/>
+          </p:cNvSpPr>
+          <p:nvPr>
+            <p:ph type="sldNum" sz="quarter" idx="4294967295"/>
+          </p:nvPr>
+        </p:nvSpPr>
+        <p:spPr>
+          <a:xfrm>
+            <a:off x="27432" y="91440"/>
+            <a:ext cx="585216" cy="475488"/>
+          </a:xfrm>
+          <a:prstGeom prst="rect">
+            <a:avLst/>
+          </a:prstGeom>
+          <a:extLst>
+            <a:ext uri="{C572A759-6A51-4108-AA02-DFA0A04FC94B}">
+              <ma14:wrappingTextBoxFlag xmlns:ma14="http://schemas.microsoft.com/office/mac/drawingml/2011/main" val="0"/>
+            </a:ext>
+          </a:extLst>
+        </p:spPr>
+        <p:txBody>
+          <a:bodyPr/>
+          <a:lstStyle>
+            <a:lvl1pPr>
+              <a:defRPr sz="2000">
+                <a:solidFill>
+                  <a:srgbClr val="FFFFFF"/>
+                </a:solidFill>
+                <a:latin typeface="Calibri"/>
+                <a:ea typeface="Calibri"/>
+                <a:cs typeface="Calibri"/>
+              </a:defRPr>
+            </a:lvl1pPr>
+          </a:lstStyle>
+          <a:p>
+            <a:pPr algn="ctr"/>
+            <a:fld id="{F7021451-1387-4CA6-816F-3879F97B5CBC}" type="slidenum">
+              <a:rPr b="1" lang="en-US"/>
+              <a:t>49</a:t>
+            </a:fld>
+            <a:endParaRPr lang="en-US"/>
+          </a:p>
+        </p:txBody>
+      </p:sp>
+    </p:spTree>
+  </p:cSld>
+  <p:clrMapOvr>
+    <a:masterClrMapping/>
+  </p:clrMapOvr>
+</p:sld>
+</file>
+
+<file path=ppt/slides/slide5.xml><?xml version="1.0" encoding="utf-8"?>
+<p:sld xmlns:a="http://schemas.openxmlformats.org/drawingml/2006/main" xmlns:r="http://schemas.openxmlformats.org/officeDocument/2006/relationships" xmlns:p="http://schemas.openxmlformats.org/presentationml/2006/main">
+  <p:cSld name="Slide 5">
+    <p:spTree>
+      <p:nvGrpSpPr>
+        <p:cNvPr id="1" name=""/>
+        <p:cNvGrpSpPr/>
+        <p:nvPr/>
+      </p:nvGrpSpPr>
+      <p:grpSpPr>
+        <a:xfrm>
+          <a:off x="0" y="0"/>
+          <a:ext cx="0" cy="0"/>
+          <a:chOff x="0" y="0"/>
+          <a:chExt cx="0" cy="0"/>
+        </a:xfrm>
+      </p:grpSpPr>
+      <p:sp>
+        <p:nvSpPr>
+          <p:cNvPr id="2" name="Text 0"/>
+          <p:cNvSpPr/>
+          <p:nvPr/>
+        </p:nvSpPr>
+        <p:spPr>
+          <a:xfrm>
+            <a:off x="457200" y="713232"/>
+            <a:ext cx="11368735" cy="274320"/>
+          </a:xfrm>
+          <a:prstGeom prst="rect">
+            <a:avLst/>
+          </a:prstGeom>
+          <a:noFill/>
+          <a:ln/>
+        </p:spPr>
+        <p:txBody>
+          <a:bodyPr wrap="square" lIns="0" tIns="0" rIns="0" bIns="0" rtlCol="0" anchor="ctr"/>
+          <a:lstStyle/>
+          <a:p>
+            <a:pPr algn="r" indent="0" marL="0">
+              <a:buNone/>
+            </a:pPr>
+            <a:r>
+              <a:rPr lang="en-US" sz="1400" b="1" dirty="0">
+                <a:solidFill>
+                  <a:srgbClr val="1C3F6E"/>
+                </a:solidFill>
+                <a:latin typeface="Calibri" pitchFamily="34" charset="0"/>
+                <a:ea typeface="Calibri" pitchFamily="34" charset="-122"/>
+                <a:cs typeface="Calibri" pitchFamily="34" charset="-120"/>
+              </a:rPr>
+              <a:t>HOMEWORK CORRECTION</a:t>
+            </a:r>
+            <a:endParaRPr lang="en-US" sz="1400" dirty="0"/>
+          </a:p>
+        </p:txBody>
+      </p:sp>
+      <p:pic>
+        <p:nvPicPr>
+          <p:cNvPr id="3" name="Image 0" descr="/home/claude/f4/img/minesec_sheet.png">    </p:cNvPr>
+          <p:cNvPicPr>
+            <a:picLocks noChangeAspect="1"/>
+          </p:cNvPicPr>
+          <p:nvPr/>
+        </p:nvPicPr>
+        <p:blipFill>
+          <a:blip r:embed="rId1"/>
+          <a:stretch>
+            <a:fillRect/>
+          </a:stretch>
+        </p:blipFill>
+        <p:spPr>
+          <a:xfrm>
+            <a:off x="0" y="658368"/>
+            <a:ext cx="5120640" cy="5833872"/>
+          </a:xfrm>
+          <a:prstGeom prst="rect">
+            <a:avLst/>
+          </a:prstGeom>
+        </p:spPr>
+      </p:pic>
+      <p:sp>
+        <p:nvSpPr>
+          <p:cNvPr id="4" name="Text 1"/>
+          <p:cNvSpPr/>
+          <p:nvPr/>
+        </p:nvSpPr>
+        <p:spPr>
+          <a:xfrm>
+            <a:off x="5349240" y="1005840"/>
+            <a:ext cx="6522415" cy="731520"/>
+          </a:xfrm>
+          <a:prstGeom prst="rect">
+            <a:avLst/>
+          </a:prstGeom>
+          <a:noFill/>
+          <a:ln/>
+        </p:spPr>
+        <p:txBody>
+          <a:bodyPr wrap="square" lIns="0" tIns="0" rIns="0" bIns="0" rtlCol="0" anchor="ctr">
+            <a:normAutofit/>
+          </a:bodyPr>
+          <a:lstStyle/>
+          <a:p>
+            <a:pPr algn="ctr" indent="0" marL="0">
+              <a:buNone/>
+            </a:pPr>
+            <a:r>
+              <a:rPr lang="en-US" sz="3600" b="1" dirty="0">
+                <a:solidFill>
+                  <a:srgbClr val="990011"/>
+                </a:solidFill>
+                <a:latin typeface="Times New Roman" pitchFamily="34" charset="0"/>
+                <a:ea typeface="Times New Roman" pitchFamily="34" charset="-122"/>
+                <a:cs typeface="Times New Roman" pitchFamily="34" charset="-120"/>
+              </a:rPr>
+              <a:t>Correction: Possible Answer</a:t>
+            </a:r>
+            <a:endParaRPr lang="en-US" sz="3600" dirty="0"/>
+          </a:p>
+        </p:txBody>
+      </p:sp>
+      <p:sp>
+        <p:nvSpPr>
+          <p:cNvPr id="5" name="Text 2"/>
+          <p:cNvSpPr/>
+          <p:nvPr/>
+        </p:nvSpPr>
+        <p:spPr>
+          <a:xfrm>
+            <a:off x="5349240" y="1783080"/>
+            <a:ext cx="6522415" cy="4663440"/>
+          </a:xfrm>
+          <a:prstGeom prst="rect">
+            <a:avLst/>
+          </a:prstGeom>
+          <a:noFill/>
+          <a:ln/>
+        </p:spPr>
+        <p:txBody>
+          <a:bodyPr wrap="square" lIns="0" tIns="0" rIns="0" bIns="0" rtlCol="0" anchor="t"/>
+          <a:lstStyle/>
+          <a:p>
+            <a:pPr algn="l" indent="0" marL="0">
+              <a:spcAft>
+                <a:spcPts val="800"/>
+              </a:spcAft>
+              <a:buNone/>
+            </a:pPr>
+            <a:r>
+              <a:rPr lang="en-US" sz="4000" dirty="0">
+                <a:solidFill>
+                  <a:srgbClr val="111111"/>
+                </a:solidFill>
+                <a:latin typeface="Times New Roman" pitchFamily="34" charset="0"/>
+                <a:ea typeface="Times New Roman" pitchFamily="34" charset="-122"/>
+                <a:cs typeface="Times New Roman" pitchFamily="34" charset="-120"/>
+              </a:rPr>
+              <a:t>Answers vary. Example: a shoe repairer earns about 2,000 FCFA a day; the main problem is irregular income and no place to work when it rains.</a:t>
+            </a:r>
+            <a:endParaRPr lang="en-US" sz="4000" dirty="0"/>
+          </a:p>
+        </p:txBody>
+      </p:sp>
+      <p:sp>
+        <p:nvSpPr>
+          <p:cNvPr id="25" name="Slide Number Placeholder 0"/>
+          <p:cNvSpPr>
+            <a:spLocks noGrp="1"/>
+          </p:cNvSpPr>
+          <p:nvPr>
+            <p:ph type="sldNum" sz="quarter" idx="4294967295"/>
+          </p:nvPr>
+        </p:nvSpPr>
+        <p:spPr>
+          <a:xfrm>
+            <a:off x="27432" y="91440"/>
+            <a:ext cx="585216" cy="475488"/>
+          </a:xfrm>
+          <a:prstGeom prst="rect">
+            <a:avLst/>
+          </a:prstGeom>
+          <a:extLst>
+            <a:ext uri="{C572A759-6A51-4108-AA02-DFA0A04FC94B}">
+              <ma14:wrappingTextBoxFlag xmlns:ma14="http://schemas.microsoft.com/office/mac/drawingml/2011/main" val="0"/>
+            </a:ext>
+          </a:extLst>
+        </p:spPr>
+        <p:txBody>
+          <a:bodyPr/>
+          <a:lstStyle>
+            <a:lvl1pPr>
+              <a:defRPr sz="2000">
+                <a:solidFill>
+                  <a:srgbClr val="FFFFFF"/>
+                </a:solidFill>
+                <a:latin typeface="Calibri"/>
+                <a:ea typeface="Calibri"/>
+                <a:cs typeface="Calibri"/>
+              </a:defRPr>
+            </a:lvl1pPr>
+          </a:lstStyle>
+          <a:p>
+            <a:pPr algn="ctr"/>
+            <a:fld id="{F7021451-1387-4CA6-816F-3879F97B5CBC}" type="slidenum">
+              <a:rPr b="1" lang="en-US"/>
+              <a:t>5</a:t>
+            </a:fld>
+            <a:endParaRPr lang="en-US"/>
+          </a:p>
+        </p:txBody>
+      </p:sp>
+    </p:spTree>
+  </p:cSld>
+  <p:clrMapOvr>
+    <a:masterClrMapping/>
+  </p:clrMapOvr>
+</p:sld>
+</file>
+
+<file path=ppt/slides/slide50.xml><?xml version="1.0" encoding="utf-8"?>
+<p:sld xmlns:a="http://schemas.openxmlformats.org/drawingml/2006/main" xmlns:r="http://schemas.openxmlformats.org/officeDocument/2006/relationships" xmlns:p="http://schemas.openxmlformats.org/presentationml/2006/main">
+  <p:cSld name="Slide 50">
+    <p:spTree>
+      <p:nvGrpSpPr>
+        <p:cNvPr id="1" name=""/>
+        <p:cNvGrpSpPr/>
+        <p:nvPr/>
+      </p:nvGrpSpPr>
+      <p:grpSpPr>
+        <a:xfrm>
+          <a:off x="0" y="0"/>
+          <a:ext cx="0" cy="0"/>
+          <a:chOff x="0" y="0"/>
+          <a:chExt cx="0" cy="0"/>
+        </a:xfrm>
+      </p:grpSpPr>
+      <p:sp>
+        <p:nvSpPr>
+          <p:cNvPr id="2" name="Text 0"/>
+          <p:cNvSpPr/>
+          <p:nvPr/>
+        </p:nvSpPr>
+        <p:spPr>
+          <a:xfrm>
+            <a:off x="457200" y="713232"/>
+            <a:ext cx="11368735" cy="274320"/>
+          </a:xfrm>
+          <a:prstGeom prst="rect">
+            <a:avLst/>
+          </a:prstGeom>
+          <a:noFill/>
+          <a:ln/>
+        </p:spPr>
+        <p:txBody>
+          <a:bodyPr wrap="square" lIns="0" tIns="0" rIns="0" bIns="0" rtlCol="0" anchor="ctr"/>
+          <a:lstStyle/>
+          <a:p>
+            <a:pPr algn="r" indent="0" marL="0">
+              <a:buNone/>
+            </a:pPr>
+            <a:r>
+              <a:rPr lang="en-US" sz="1400" b="1" dirty="0">
+                <a:solidFill>
+                  <a:srgbClr val="1C3F6E"/>
+                </a:solidFill>
+                <a:latin typeface="Calibri" pitchFamily="34" charset="0"/>
+                <a:ea typeface="Calibri" pitchFamily="34" charset="-122"/>
+                <a:cs typeface="Calibri" pitchFamily="34" charset="-120"/>
+              </a:rPr>
+              <a:t>FORMATIVE EVALUATION</a:t>
+            </a:r>
+            <a:endParaRPr lang="en-US" sz="1400" dirty="0"/>
+          </a:p>
+        </p:txBody>
+      </p:sp>
+      <p:pic>
+        <p:nvPicPr>
+          <p:cNvPr id="3" name="Image 0" descr="/home/claude/f4/img/minesec_sheet.png">    </p:cNvPr>
+          <p:cNvPicPr>
+            <a:picLocks noChangeAspect="1"/>
+          </p:cNvPicPr>
+          <p:nvPr/>
+        </p:nvPicPr>
+        <p:blipFill>
+          <a:blip r:embed="rId1"/>
+          <a:stretch>
+            <a:fillRect/>
+          </a:stretch>
+        </p:blipFill>
+        <p:spPr>
+          <a:xfrm>
+            <a:off x="0" y="658368"/>
+            <a:ext cx="5120640" cy="5833872"/>
+          </a:xfrm>
+          <a:prstGeom prst="rect">
+            <a:avLst/>
+          </a:prstGeom>
+        </p:spPr>
+      </p:pic>
+      <p:sp>
+        <p:nvSpPr>
+          <p:cNvPr id="4" name="Text 1"/>
+          <p:cNvSpPr/>
+          <p:nvPr/>
+        </p:nvSpPr>
+        <p:spPr>
+          <a:xfrm>
+            <a:off x="5349240" y="1005840"/>
+            <a:ext cx="6522415" cy="731520"/>
+          </a:xfrm>
+          <a:prstGeom prst="rect">
+            <a:avLst/>
+          </a:prstGeom>
+          <a:noFill/>
+          <a:ln/>
+        </p:spPr>
+        <p:txBody>
+          <a:bodyPr wrap="square" lIns="0" tIns="0" rIns="0" bIns="0" rtlCol="0" anchor="ctr">
+            <a:normAutofit/>
+          </a:bodyPr>
+          <a:lstStyle/>
+          <a:p>
+            <a:pPr algn="ctr" indent="0" marL="0">
+              <a:buNone/>
+            </a:pPr>
+            <a:r>
+              <a:rPr lang="en-US" sz="3600" b="1" dirty="0">
+                <a:solidFill>
+                  <a:srgbClr val="990011"/>
+                </a:solidFill>
+                <a:latin typeface="Times New Roman" pitchFamily="34" charset="0"/>
+                <a:ea typeface="Times New Roman" pitchFamily="34" charset="-122"/>
+                <a:cs typeface="Times New Roman" pitchFamily="34" charset="-120"/>
+              </a:rPr>
+              <a:t>Expected Answer</a:t>
+            </a:r>
+            <a:endParaRPr lang="en-US" sz="3600" dirty="0"/>
+          </a:p>
+        </p:txBody>
+      </p:sp>
+      <p:sp>
+        <p:nvSpPr>
+          <p:cNvPr id="5" name="Text 2"/>
+          <p:cNvSpPr/>
+          <p:nvPr/>
+        </p:nvSpPr>
+        <p:spPr>
+          <a:xfrm>
+            <a:off x="5349240" y="1783080"/>
+            <a:ext cx="6522415" cy="4663440"/>
+          </a:xfrm>
+          <a:prstGeom prst="rect">
+            <a:avLst/>
+          </a:prstGeom>
+          <a:noFill/>
+          <a:ln/>
+        </p:spPr>
+        <p:txBody>
+          <a:bodyPr wrap="square" lIns="0" tIns="0" rIns="0" bIns="0" rtlCol="0" anchor="t"/>
+          <a:lstStyle/>
+          <a:p>
+            <a:pPr algn="l" indent="0" marL="0">
+              <a:spcAft>
+                <a:spcPts val="800"/>
+              </a:spcAft>
+              <a:buNone/>
+            </a:pPr>
+            <a:r>
+              <a:rPr lang="en-US" sz="4000" dirty="0">
+                <a:solidFill>
+                  <a:srgbClr val="111111"/>
+                </a:solidFill>
+                <a:latin typeface="Times New Roman" pitchFamily="34" charset="0"/>
+                <a:ea typeface="Times New Roman" pitchFamily="34" charset="-122"/>
+                <a:cs typeface="Times New Roman" pitchFamily="34" charset="-120"/>
+              </a:rPr>
+              <a:t>Poli.</a:t>
+            </a:r>
+            <a:endParaRPr lang="en-US" sz="4000" dirty="0"/>
+          </a:p>
+        </p:txBody>
+      </p:sp>
+      <p:sp>
+        <p:nvSpPr>
+          <p:cNvPr id="25" name="Slide Number Placeholder 0"/>
+          <p:cNvSpPr>
+            <a:spLocks noGrp="1"/>
+          </p:cNvSpPr>
+          <p:nvPr>
+            <p:ph type="sldNum" sz="quarter" idx="4294967295"/>
+          </p:nvPr>
+        </p:nvSpPr>
+        <p:spPr>
+          <a:xfrm>
+            <a:off x="27432" y="91440"/>
+            <a:ext cx="585216" cy="475488"/>
+          </a:xfrm>
+          <a:prstGeom prst="rect">
+            <a:avLst/>
+          </a:prstGeom>
+          <a:extLst>
+            <a:ext uri="{C572A759-6A51-4108-AA02-DFA0A04FC94B}">
+              <ma14:wrappingTextBoxFlag xmlns:ma14="http://schemas.microsoft.com/office/mac/drawingml/2011/main" val="0"/>
+            </a:ext>
+          </a:extLst>
+        </p:spPr>
+        <p:txBody>
+          <a:bodyPr/>
+          <a:lstStyle>
+            <a:lvl1pPr>
+              <a:defRPr sz="2000">
+                <a:solidFill>
+                  <a:srgbClr val="FFFFFF"/>
+                </a:solidFill>
+                <a:latin typeface="Calibri"/>
+                <a:ea typeface="Calibri"/>
+                <a:cs typeface="Calibri"/>
+              </a:defRPr>
+            </a:lvl1pPr>
+          </a:lstStyle>
+          <a:p>
+            <a:pPr algn="ctr"/>
+            <a:fld id="{F7021451-1387-4CA6-816F-3879F97B5CBC}" type="slidenum">
+              <a:rPr b="1" lang="en-US"/>
+              <a:t>50</a:t>
+            </a:fld>
+            <a:endParaRPr lang="en-US"/>
+          </a:p>
+        </p:txBody>
+      </p:sp>
+    </p:spTree>
+  </p:cSld>
+  <p:clrMapOvr>
+    <a:masterClrMapping/>
+  </p:clrMapOvr>
+</p:sld>
+</file>
+
+<file path=ppt/slides/slide51.xml><?xml version="1.0" encoding="utf-8"?>
+<p:sld xmlns:a="http://schemas.openxmlformats.org/drawingml/2006/main" xmlns:r="http://schemas.openxmlformats.org/officeDocument/2006/relationships" xmlns:p="http://schemas.openxmlformats.org/presentationml/2006/main">
+  <p:cSld name="Slide 51">
+    <p:spTree>
+      <p:nvGrpSpPr>
+        <p:cNvPr id="1" name=""/>
+        <p:cNvGrpSpPr/>
+        <p:nvPr/>
+      </p:nvGrpSpPr>
+      <p:grpSpPr>
+        <a:xfrm>
+          <a:off x="0" y="0"/>
+          <a:ext cx="0" cy="0"/>
+          <a:chOff x="0" y="0"/>
+          <a:chExt cx="0" cy="0"/>
+        </a:xfrm>
+      </p:grpSpPr>
+      <p:sp>
+        <p:nvSpPr>
+          <p:cNvPr id="2" name="Text 0"/>
+          <p:cNvSpPr/>
+          <p:nvPr/>
+        </p:nvSpPr>
+        <p:spPr>
+          <a:xfrm>
+            <a:off x="457200" y="713232"/>
+            <a:ext cx="11368735" cy="274320"/>
+          </a:xfrm>
+          <a:prstGeom prst="rect">
+            <a:avLst/>
+          </a:prstGeom>
+          <a:noFill/>
+          <a:ln/>
+        </p:spPr>
+        <p:txBody>
+          <a:bodyPr wrap="square" lIns="0" tIns="0" rIns="0" bIns="0" rtlCol="0" anchor="ctr"/>
+          <a:lstStyle/>
+          <a:p>
+            <a:pPr algn="r" indent="0" marL="0">
+              <a:buNone/>
+            </a:pPr>
+            <a:r>
+              <a:rPr lang="en-US" sz="1400" b="1" dirty="0">
+                <a:solidFill>
+                  <a:srgbClr val="1C3F6E"/>
+                </a:solidFill>
+                <a:latin typeface="Calibri" pitchFamily="34" charset="0"/>
+                <a:ea typeface="Calibri" pitchFamily="34" charset="-122"/>
+                <a:cs typeface="Calibri" pitchFamily="34" charset="-120"/>
+              </a:rPr>
+              <a:t>REMEDIATION</a:t>
+            </a:r>
+            <a:endParaRPr lang="en-US" sz="1400" dirty="0"/>
+          </a:p>
+        </p:txBody>
+      </p:sp>
+      <p:pic>
+        <p:nvPicPr>
+          <p:cNvPr id="3" name="Image 0" descr="/home/claude/f4/img/minesec_sheet.png">    </p:cNvPr>
+          <p:cNvPicPr>
+            <a:picLocks noChangeAspect="1"/>
+          </p:cNvPicPr>
+          <p:nvPr/>
+        </p:nvPicPr>
+        <p:blipFill>
+          <a:blip r:embed="rId1"/>
+          <a:stretch>
+            <a:fillRect/>
+          </a:stretch>
+        </p:blipFill>
+        <p:spPr>
+          <a:xfrm>
+            <a:off x="0" y="658368"/>
+            <a:ext cx="5120640" cy="5833872"/>
+          </a:xfrm>
+          <a:prstGeom prst="rect">
+            <a:avLst/>
+          </a:prstGeom>
+        </p:spPr>
+      </p:pic>
+      <p:sp>
+        <p:nvSpPr>
+          <p:cNvPr id="4" name="Text 1"/>
+          <p:cNvSpPr/>
+          <p:nvPr/>
+        </p:nvSpPr>
+        <p:spPr>
+          <a:xfrm>
+            <a:off x="5349240" y="1005840"/>
+            <a:ext cx="6522415" cy="731520"/>
+          </a:xfrm>
+          <a:prstGeom prst="rect">
+            <a:avLst/>
+          </a:prstGeom>
+          <a:noFill/>
+          <a:ln/>
+        </p:spPr>
+        <p:txBody>
+          <a:bodyPr wrap="square" lIns="0" tIns="0" rIns="0" bIns="0" rtlCol="0" anchor="ctr">
+            <a:normAutofit/>
+          </a:bodyPr>
+          <a:lstStyle/>
+          <a:p>
+            <a:pPr algn="ctr" indent="0" marL="0">
+              <a:buNone/>
+            </a:pPr>
+            <a:r>
+              <a:rPr lang="en-US" sz="3600" b="1" dirty="0">
+                <a:solidFill>
+                  <a:srgbClr val="990011"/>
+                </a:solidFill>
+                <a:latin typeface="Times New Roman" pitchFamily="34" charset="0"/>
+                <a:ea typeface="Times New Roman" pitchFamily="34" charset="-122"/>
+                <a:cs typeface="Times New Roman" pitchFamily="34" charset="-120"/>
+              </a:rPr>
+              <a:t>Remediation</a:t>
+            </a:r>
+            <a:endParaRPr lang="en-US" sz="3600" dirty="0"/>
+          </a:p>
+        </p:txBody>
+      </p:sp>
+      <p:sp>
+        <p:nvSpPr>
+          <p:cNvPr id="5" name="Text 2"/>
+          <p:cNvSpPr/>
+          <p:nvPr/>
+        </p:nvSpPr>
+        <p:spPr>
+          <a:xfrm>
+            <a:off x="5349240" y="1783080"/>
+            <a:ext cx="6522415" cy="4663440"/>
+          </a:xfrm>
+          <a:prstGeom prst="rect">
+            <a:avLst/>
+          </a:prstGeom>
+          <a:noFill/>
+          <a:ln/>
+        </p:spPr>
+        <p:txBody>
+          <a:bodyPr wrap="square" lIns="0" tIns="0" rIns="0" bIns="0" rtlCol="0" anchor="t"/>
+          <a:lstStyle/>
+          <a:p>
+            <a:pPr algn="l" indent="0" marL="0">
+              <a:spcAft>
+                <a:spcPts val="800"/>
+              </a:spcAft>
+              <a:buNone/>
+            </a:pPr>
+            <a:r>
+              <a:rPr lang="en-US" sz="4000" b="1" dirty="0">
+                <a:solidFill>
+                  <a:srgbClr val="111111"/>
+                </a:solidFill>
+                <a:latin typeface="Times New Roman" pitchFamily="34" charset="0"/>
+                <a:ea typeface="Times New Roman" pitchFamily="34" charset="-122"/>
+                <a:cs typeface="Times New Roman" pitchFamily="34" charset="-120"/>
+              </a:rPr>
+              <a:t>Fill in the blanks:</a:t>
+            </a:r>
+            <a:endParaRPr lang="en-US" sz="4000" dirty="0"/>
+          </a:p>
+          <a:p>
+            <a:pPr algn="l" marL="342900" indent="-342900">
+              <a:spcAft>
+                <a:spcPts val="800"/>
+              </a:spcAft>
+              <a:buSzPct val="100000"/>
+              <a:buFont typeface="+mj-lt"/>
+              <a:buAutoNum type="arabicPeriod" startAt="1"/>
+            </a:pPr>
+            <a:r>
+              <a:rPr lang="en-US" sz="4000" dirty="0">
+                <a:solidFill>
+                  <a:srgbClr val="111111"/>
+                </a:solidFill>
+                <a:latin typeface="Times New Roman" pitchFamily="34" charset="0"/>
+                <a:ea typeface="Times New Roman" pitchFamily="34" charset="-122"/>
+                <a:cs typeface="Times New Roman" pitchFamily="34" charset="-120"/>
+              </a:rPr>
+              <a:t>The headquarters of the East Region is ______.</a:t>
+            </a:r>
+            <a:endParaRPr lang="en-US" sz="4000" dirty="0"/>
+          </a:p>
+          <a:p>
+            <a:pPr algn="l" marL="342900" indent="-342900">
+              <a:spcAft>
+                <a:spcPts val="800"/>
+              </a:spcAft>
+              <a:buSzPct val="100000"/>
+              <a:buFont typeface="+mj-lt"/>
+              <a:buAutoNum type="arabicPeriod" startAt="1"/>
+            </a:pPr>
+            <a:r>
+              <a:rPr lang="en-US" sz="4000" dirty="0">
+                <a:solidFill>
+                  <a:srgbClr val="111111"/>
+                </a:solidFill>
+                <a:latin typeface="Times New Roman" pitchFamily="34" charset="0"/>
+                <a:ea typeface="Times New Roman" pitchFamily="34" charset="-122"/>
+                <a:cs typeface="Times New Roman" pitchFamily="34" charset="-120"/>
+              </a:rPr>
+              <a:t>The headquarters of the South Region is ______.</a:t>
+            </a:r>
+            <a:endParaRPr lang="en-US" sz="4000" dirty="0"/>
+          </a:p>
+        </p:txBody>
+      </p:sp>
+      <p:sp>
+        <p:nvSpPr>
+          <p:cNvPr id="25" name="Slide Number Placeholder 0"/>
+          <p:cNvSpPr>
+            <a:spLocks noGrp="1"/>
+          </p:cNvSpPr>
+          <p:nvPr>
+            <p:ph type="sldNum" sz="quarter" idx="4294967295"/>
+          </p:nvPr>
+        </p:nvSpPr>
+        <p:spPr>
+          <a:xfrm>
+            <a:off x="27432" y="91440"/>
+            <a:ext cx="585216" cy="475488"/>
+          </a:xfrm>
+          <a:prstGeom prst="rect">
+            <a:avLst/>
+          </a:prstGeom>
+          <a:extLst>
+            <a:ext uri="{C572A759-6A51-4108-AA02-DFA0A04FC94B}">
+              <ma14:wrappingTextBoxFlag xmlns:ma14="http://schemas.microsoft.com/office/mac/drawingml/2011/main" val="0"/>
+            </a:ext>
+          </a:extLst>
+        </p:spPr>
+        <p:txBody>
+          <a:bodyPr/>
+          <a:lstStyle>
+            <a:lvl1pPr>
+              <a:defRPr sz="2000">
+                <a:solidFill>
+                  <a:srgbClr val="FFFFFF"/>
+                </a:solidFill>
+                <a:latin typeface="Calibri"/>
+                <a:ea typeface="Calibri"/>
+                <a:cs typeface="Calibri"/>
+              </a:defRPr>
+            </a:lvl1pPr>
+          </a:lstStyle>
+          <a:p>
+            <a:pPr algn="ctr"/>
+            <a:fld id="{F7021451-1387-4CA6-816F-3879F97B5CBC}" type="slidenum">
+              <a:rPr b="1" lang="en-US"/>
+              <a:t>51</a:t>
+            </a:fld>
+            <a:endParaRPr lang="en-US"/>
+          </a:p>
+        </p:txBody>
+      </p:sp>
+    </p:spTree>
+  </p:cSld>
+  <p:clrMapOvr>
+    <a:masterClrMapping/>
+  </p:clrMapOvr>
+</p:sld>
+</file>
+
+<file path=ppt/slides/slide52.xml><?xml version="1.0" encoding="utf-8"?>
+<p:sld xmlns:a="http://schemas.openxmlformats.org/drawingml/2006/main" xmlns:r="http://schemas.openxmlformats.org/officeDocument/2006/relationships" xmlns:p="http://schemas.openxmlformats.org/presentationml/2006/main">
+  <p:cSld name="Slide 52">
+    <p:spTree>
+      <p:nvGrpSpPr>
+        <p:cNvPr id="1" name=""/>
+        <p:cNvGrpSpPr/>
+        <p:nvPr/>
+      </p:nvGrpSpPr>
+      <p:grpSpPr>
+        <a:xfrm>
+          <a:off x="0" y="0"/>
+          <a:ext cx="0" cy="0"/>
+          <a:chOff x="0" y="0"/>
+          <a:chExt cx="0" cy="0"/>
+        </a:xfrm>
+      </p:grpSpPr>
+      <p:sp>
+        <p:nvSpPr>
+          <p:cNvPr id="2" name="Text 0"/>
+          <p:cNvSpPr/>
+          <p:nvPr/>
+        </p:nvSpPr>
+        <p:spPr>
+          <a:xfrm>
+            <a:off x="457200" y="713232"/>
+            <a:ext cx="11368735" cy="274320"/>
+          </a:xfrm>
+          <a:prstGeom prst="rect">
+            <a:avLst/>
+          </a:prstGeom>
+          <a:noFill/>
+          <a:ln/>
+        </p:spPr>
+        <p:txBody>
+          <a:bodyPr wrap="square" lIns="0" tIns="0" rIns="0" bIns="0" rtlCol="0" anchor="ctr"/>
+          <a:lstStyle/>
+          <a:p>
+            <a:pPr algn="r" indent="0" marL="0">
+              <a:buNone/>
+            </a:pPr>
+            <a:r>
+              <a:rPr lang="en-US" sz="1400" b="1" dirty="0">
+                <a:solidFill>
+                  <a:srgbClr val="1C3F6E"/>
+                </a:solidFill>
+                <a:latin typeface="Calibri" pitchFamily="34" charset="0"/>
+                <a:ea typeface="Calibri" pitchFamily="34" charset="-122"/>
+                <a:cs typeface="Calibri" pitchFamily="34" charset="-120"/>
+              </a:rPr>
+              <a:t>REMEDIATION</a:t>
+            </a:r>
+            <a:endParaRPr lang="en-US" sz="1400" dirty="0"/>
+          </a:p>
+        </p:txBody>
+      </p:sp>
+      <p:pic>
+        <p:nvPicPr>
+          <p:cNvPr id="3" name="Image 0" descr="/home/claude/f4/img/minesec_sheet.png">    </p:cNvPr>
+          <p:cNvPicPr>
+            <a:picLocks noChangeAspect="1"/>
+          </p:cNvPicPr>
+          <p:nvPr/>
+        </p:nvPicPr>
+        <p:blipFill>
+          <a:blip r:embed="rId1"/>
+          <a:stretch>
+            <a:fillRect/>
+          </a:stretch>
+        </p:blipFill>
+        <p:spPr>
+          <a:xfrm>
+            <a:off x="0" y="658368"/>
+            <a:ext cx="5120640" cy="5833872"/>
+          </a:xfrm>
+          <a:prstGeom prst="rect">
+            <a:avLst/>
+          </a:prstGeom>
+        </p:spPr>
+      </p:pic>
+      <p:sp>
+        <p:nvSpPr>
+          <p:cNvPr id="4" name="Text 1"/>
+          <p:cNvSpPr/>
+          <p:nvPr/>
+        </p:nvSpPr>
+        <p:spPr>
+          <a:xfrm>
+            <a:off x="5349240" y="1005840"/>
+            <a:ext cx="6522415" cy="731520"/>
+          </a:xfrm>
+          <a:prstGeom prst="rect">
+            <a:avLst/>
+          </a:prstGeom>
+          <a:noFill/>
+          <a:ln/>
+        </p:spPr>
+        <p:txBody>
+          <a:bodyPr wrap="square" lIns="0" tIns="0" rIns="0" bIns="0" rtlCol="0" anchor="ctr">
+            <a:normAutofit/>
+          </a:bodyPr>
+          <a:lstStyle/>
+          <a:p>
+            <a:pPr algn="ctr" indent="0" marL="0">
+              <a:buNone/>
+            </a:pPr>
+            <a:r>
+              <a:rPr lang="en-US" sz="3600" b="1" dirty="0">
+                <a:solidFill>
+                  <a:srgbClr val="990011"/>
+                </a:solidFill>
+                <a:latin typeface="Times New Roman" pitchFamily="34" charset="0"/>
+                <a:ea typeface="Times New Roman" pitchFamily="34" charset="-122"/>
+                <a:cs typeface="Times New Roman" pitchFamily="34" charset="-120"/>
+              </a:rPr>
+              <a:t>Remediation (continued)</a:t>
+            </a:r>
+            <a:endParaRPr lang="en-US" sz="3600" dirty="0"/>
+          </a:p>
+        </p:txBody>
+      </p:sp>
+      <p:sp>
+        <p:nvSpPr>
+          <p:cNvPr id="5" name="Text 2"/>
+          <p:cNvSpPr/>
+          <p:nvPr/>
+        </p:nvSpPr>
+        <p:spPr>
+          <a:xfrm>
+            <a:off x="5349240" y="1783080"/>
+            <a:ext cx="6522415" cy="4663440"/>
+          </a:xfrm>
+          <a:prstGeom prst="rect">
+            <a:avLst/>
+          </a:prstGeom>
+          <a:noFill/>
+          <a:ln/>
+        </p:spPr>
+        <p:txBody>
+          <a:bodyPr wrap="square" lIns="0" tIns="0" rIns="0" bIns="0" rtlCol="0" anchor="t"/>
+          <a:lstStyle/>
+          <a:p>
+            <a:pPr algn="l" marL="342900" indent="-342900">
+              <a:spcAft>
+                <a:spcPts val="800"/>
+              </a:spcAft>
+              <a:buSzPct val="100000"/>
+              <a:buFont typeface="+mj-lt"/>
+              <a:buAutoNum type="arabicPeriod" startAt="1"/>
+            </a:pPr>
+            <a:r>
+              <a:rPr lang="en-US" sz="4000" dirty="0">
+                <a:solidFill>
+                  <a:srgbClr val="111111"/>
+                </a:solidFill>
+                <a:latin typeface="Times New Roman" pitchFamily="34" charset="0"/>
+                <a:ea typeface="Times New Roman" pitchFamily="34" charset="-122"/>
+                <a:cs typeface="Times New Roman" pitchFamily="34" charset="-120"/>
+              </a:rPr>
+              <a:t>The headquarters of the Mayo-Rey division is ______.</a:t>
+            </a:r>
+            <a:endParaRPr lang="en-US" sz="4000" dirty="0"/>
+          </a:p>
+        </p:txBody>
+      </p:sp>
+      <p:sp>
+        <p:nvSpPr>
+          <p:cNvPr id="25" name="Slide Number Placeholder 0"/>
+          <p:cNvSpPr>
+            <a:spLocks noGrp="1"/>
+          </p:cNvSpPr>
+          <p:nvPr>
+            <p:ph type="sldNum" sz="quarter" idx="4294967295"/>
+          </p:nvPr>
+        </p:nvSpPr>
+        <p:spPr>
+          <a:xfrm>
+            <a:off x="27432" y="91440"/>
+            <a:ext cx="585216" cy="475488"/>
+          </a:xfrm>
+          <a:prstGeom prst="rect">
+            <a:avLst/>
+          </a:prstGeom>
+          <a:extLst>
+            <a:ext uri="{C572A759-6A51-4108-AA02-DFA0A04FC94B}">
+              <ma14:wrappingTextBoxFlag xmlns:ma14="http://schemas.microsoft.com/office/mac/drawingml/2011/main" val="0"/>
+            </a:ext>
+          </a:extLst>
+        </p:spPr>
+        <p:txBody>
+          <a:bodyPr/>
+          <a:lstStyle>
+            <a:lvl1pPr>
+              <a:defRPr sz="2000">
+                <a:solidFill>
+                  <a:srgbClr val="FFFFFF"/>
+                </a:solidFill>
+                <a:latin typeface="Calibri"/>
+                <a:ea typeface="Calibri"/>
+                <a:cs typeface="Calibri"/>
+              </a:defRPr>
+            </a:lvl1pPr>
+          </a:lstStyle>
+          <a:p>
+            <a:pPr algn="ctr"/>
+            <a:fld id="{F7021451-1387-4CA6-816F-3879F97B5CBC}" type="slidenum">
+              <a:rPr b="1" lang="en-US"/>
+              <a:t>52</a:t>
+            </a:fld>
+            <a:endParaRPr lang="en-US"/>
+          </a:p>
+        </p:txBody>
+      </p:sp>
+    </p:spTree>
+  </p:cSld>
+  <p:clrMapOvr>
+    <a:masterClrMapping/>
+  </p:clrMapOvr>
+</p:sld>
+</file>
+
+<file path=ppt/slides/slide53.xml><?xml version="1.0" encoding="utf-8"?>
+<p:sld xmlns:a="http://schemas.openxmlformats.org/drawingml/2006/main" xmlns:r="http://schemas.openxmlformats.org/officeDocument/2006/relationships" xmlns:p="http://schemas.openxmlformats.org/presentationml/2006/main">
+  <p:cSld name="Slide 53">
+    <p:spTree>
+      <p:nvGrpSpPr>
+        <p:cNvPr id="1" name=""/>
+        <p:cNvGrpSpPr/>
+        <p:nvPr/>
+      </p:nvGrpSpPr>
+      <p:grpSpPr>
+        <a:xfrm>
+          <a:off x="0" y="0"/>
+          <a:ext cx="0" cy="0"/>
+          <a:chOff x="0" y="0"/>
+          <a:chExt cx="0" cy="0"/>
+        </a:xfrm>
+      </p:grpSpPr>
+      <p:sp>
+        <p:nvSpPr>
+          <p:cNvPr id="2" name="Text 0"/>
+          <p:cNvSpPr/>
+          <p:nvPr/>
+        </p:nvSpPr>
+        <p:spPr>
+          <a:xfrm>
+            <a:off x="457200" y="713232"/>
+            <a:ext cx="11368735" cy="274320"/>
+          </a:xfrm>
+          <a:prstGeom prst="rect">
+            <a:avLst/>
+          </a:prstGeom>
+          <a:noFill/>
+          <a:ln/>
+        </p:spPr>
+        <p:txBody>
+          <a:bodyPr wrap="square" lIns="0" tIns="0" rIns="0" bIns="0" rtlCol="0" anchor="ctr"/>
+          <a:lstStyle/>
+          <a:p>
+            <a:pPr algn="r" indent="0" marL="0">
+              <a:buNone/>
+            </a:pPr>
+            <a:r>
+              <a:rPr lang="en-US" sz="1400" b="1" dirty="0">
+                <a:solidFill>
+                  <a:srgbClr val="1C3F6E"/>
+                </a:solidFill>
+                <a:latin typeface="Calibri" pitchFamily="34" charset="0"/>
+                <a:ea typeface="Calibri" pitchFamily="34" charset="-122"/>
+                <a:cs typeface="Calibri" pitchFamily="34" charset="-120"/>
+              </a:rPr>
+              <a:t>HOMEWORK</a:t>
+            </a:r>
+            <a:endParaRPr lang="en-US" sz="1400" dirty="0"/>
+          </a:p>
+        </p:txBody>
+      </p:sp>
+      <p:pic>
+        <p:nvPicPr>
+          <p:cNvPr id="3" name="Image 0" descr="/home/claude/f4/img/minesec_sheet.png">    </p:cNvPr>
+          <p:cNvPicPr>
+            <a:picLocks noChangeAspect="1"/>
+          </p:cNvPicPr>
+          <p:nvPr/>
+        </p:nvPicPr>
+        <p:blipFill>
+          <a:blip r:embed="rId1"/>
+          <a:stretch>
+            <a:fillRect/>
+          </a:stretch>
+        </p:blipFill>
+        <p:spPr>
+          <a:xfrm>
+            <a:off x="0" y="658368"/>
+            <a:ext cx="5120640" cy="5833872"/>
+          </a:xfrm>
+          <a:prstGeom prst="rect">
+            <a:avLst/>
+          </a:prstGeom>
+        </p:spPr>
+      </p:pic>
+      <p:sp>
+        <p:nvSpPr>
+          <p:cNvPr id="4" name="Text 1"/>
+          <p:cNvSpPr/>
+          <p:nvPr/>
+        </p:nvSpPr>
+        <p:spPr>
+          <a:xfrm>
+            <a:off x="5349240" y="1005840"/>
+            <a:ext cx="6522415" cy="731520"/>
+          </a:xfrm>
+          <a:prstGeom prst="rect">
+            <a:avLst/>
+          </a:prstGeom>
+          <a:noFill/>
+          <a:ln/>
+        </p:spPr>
+        <p:txBody>
+          <a:bodyPr wrap="square" lIns="0" tIns="0" rIns="0" bIns="0" rtlCol="0" anchor="ctr">
+            <a:normAutofit/>
+          </a:bodyPr>
+          <a:lstStyle/>
+          <a:p>
+            <a:pPr algn="ctr" indent="0" marL="0">
+              <a:buNone/>
+            </a:pPr>
+            <a:r>
+              <a:rPr lang="en-US" sz="3600" b="1" dirty="0">
+                <a:solidFill>
+                  <a:srgbClr val="990011"/>
+                </a:solidFill>
+                <a:latin typeface="Times New Roman" pitchFamily="34" charset="0"/>
+                <a:ea typeface="Times New Roman" pitchFamily="34" charset="-122"/>
+                <a:cs typeface="Times New Roman" pitchFamily="34" charset="-120"/>
+              </a:rPr>
+              <a:t>Homework</a:t>
+            </a:r>
+            <a:endParaRPr lang="en-US" sz="3600" dirty="0"/>
+          </a:p>
+        </p:txBody>
+      </p:sp>
+      <p:sp>
+        <p:nvSpPr>
+          <p:cNvPr id="5" name="Text 2"/>
+          <p:cNvSpPr/>
+          <p:nvPr/>
+        </p:nvSpPr>
+        <p:spPr>
+          <a:xfrm>
+            <a:off x="5349240" y="1783080"/>
+            <a:ext cx="6522415" cy="4663440"/>
+          </a:xfrm>
+          <a:prstGeom prst="rect">
+            <a:avLst/>
+          </a:prstGeom>
+          <a:noFill/>
+          <a:ln/>
+        </p:spPr>
+        <p:txBody>
+          <a:bodyPr wrap="square" lIns="0" tIns="0" rIns="0" bIns="0" rtlCol="0" anchor="t"/>
+          <a:lstStyle/>
+          <a:p>
+            <a:pPr algn="l" indent="0" marL="0">
+              <a:spcAft>
+                <a:spcPts val="800"/>
+              </a:spcAft>
+              <a:buNone/>
+            </a:pPr>
+            <a:r>
+              <a:rPr lang="en-US" sz="4000" dirty="0">
+                <a:solidFill>
+                  <a:srgbClr val="111111"/>
+                </a:solidFill>
+                <a:latin typeface="Times New Roman" pitchFamily="34" charset="0"/>
+                <a:ea typeface="Times New Roman" pitchFamily="34" charset="-122"/>
+                <a:cs typeface="Times New Roman" pitchFamily="34" charset="-120"/>
+              </a:rPr>
+              <a:t>On a base map of Cameroon, locate and name the ten regional headquarters.</a:t>
+            </a:r>
+            <a:endParaRPr lang="en-US" sz="4000" dirty="0"/>
+          </a:p>
+        </p:txBody>
+      </p:sp>
+      <p:sp>
+        <p:nvSpPr>
+          <p:cNvPr id="25" name="Slide Number Placeholder 0"/>
+          <p:cNvSpPr>
+            <a:spLocks noGrp="1"/>
+          </p:cNvSpPr>
+          <p:nvPr>
+            <p:ph type="sldNum" sz="quarter" idx="4294967295"/>
+          </p:nvPr>
+        </p:nvSpPr>
+        <p:spPr>
+          <a:xfrm>
+            <a:off x="27432" y="91440"/>
+            <a:ext cx="585216" cy="475488"/>
+          </a:xfrm>
+          <a:prstGeom prst="rect">
+            <a:avLst/>
+          </a:prstGeom>
+          <a:extLst>
+            <a:ext uri="{C572A759-6A51-4108-AA02-DFA0A04FC94B}">
+              <ma14:wrappingTextBoxFlag xmlns:ma14="http://schemas.microsoft.com/office/mac/drawingml/2011/main" val="0"/>
+            </a:ext>
+          </a:extLst>
+        </p:spPr>
+        <p:txBody>
+          <a:bodyPr/>
+          <a:lstStyle>
+            <a:lvl1pPr>
+              <a:defRPr sz="2000">
+                <a:solidFill>
+                  <a:srgbClr val="FFFFFF"/>
+                </a:solidFill>
+                <a:latin typeface="Calibri"/>
+                <a:ea typeface="Calibri"/>
+                <a:cs typeface="Calibri"/>
+              </a:defRPr>
+            </a:lvl1pPr>
+          </a:lstStyle>
+          <a:p>
+            <a:pPr algn="ctr"/>
+            <a:fld id="{F7021451-1387-4CA6-816F-3879F97B5CBC}" type="slidenum">
+              <a:rPr b="1" lang="en-US"/>
+              <a:t>53</a:t>
+            </a:fld>
+            <a:endParaRPr lang="en-US"/>
+          </a:p>
+        </p:txBody>
+      </p:sp>
+    </p:spTree>
+  </p:cSld>
+  <p:clrMapOvr>
+    <a:masterClrMapping/>
+  </p:clrMapOvr>
+</p:sld>
+</file>
+
+<file path=ppt/slides/slide54.xml><?xml version="1.0" encoding="utf-8"?>
+<p:sld xmlns:a="http://schemas.openxmlformats.org/drawingml/2006/main" xmlns:r="http://schemas.openxmlformats.org/officeDocument/2006/relationships" xmlns:p="http://schemas.openxmlformats.org/presentationml/2006/main">
+  <p:cSld name="Slide 54">
+    <p:spTree>
+      <p:nvGrpSpPr>
+        <p:cNvPr id="1" name=""/>
+        <p:cNvGrpSpPr/>
+        <p:nvPr/>
+      </p:nvGrpSpPr>
+      <p:grpSpPr>
+        <a:xfrm>
+          <a:off x="0" y="0"/>
+          <a:ext cx="0" cy="0"/>
+          <a:chOff x="0" y="0"/>
+          <a:chExt cx="0" cy="0"/>
+        </a:xfrm>
+      </p:grpSpPr>
+      <p:sp>
+        <p:nvSpPr>
+          <p:cNvPr id="2" name="Text 0"/>
+          <p:cNvSpPr/>
+          <p:nvPr/>
+        </p:nvSpPr>
+        <p:spPr>
+          <a:xfrm>
+            <a:off x="457200" y="713232"/>
+            <a:ext cx="11368735" cy="274320"/>
+          </a:xfrm>
+          <a:prstGeom prst="rect">
+            <a:avLst/>
+          </a:prstGeom>
+          <a:noFill/>
+          <a:ln/>
+        </p:spPr>
+        <p:txBody>
+          <a:bodyPr wrap="square" lIns="0" tIns="0" rIns="0" bIns="0" rtlCol="0" anchor="ctr"/>
+          <a:lstStyle/>
+          <a:p>
+            <a:pPr algn="r" indent="0" marL="0">
+              <a:buNone/>
+            </a:pPr>
+            <a:r>
+              <a:rPr lang="en-US" sz="1400" b="1" dirty="0">
+                <a:solidFill>
+                  <a:srgbClr val="1C3F6E"/>
+                </a:solidFill>
+                <a:latin typeface="Calibri" pitchFamily="34" charset="0"/>
+                <a:ea typeface="Calibri" pitchFamily="34" charset="-122"/>
+                <a:cs typeface="Calibri" pitchFamily="34" charset="-120"/>
+              </a:rPr>
+              <a:t>NEXT LESSON</a:t>
+            </a:r>
+            <a:endParaRPr lang="en-US" sz="1400" dirty="0"/>
+          </a:p>
+        </p:txBody>
+      </p:sp>
+      <p:pic>
+        <p:nvPicPr>
+          <p:cNvPr id="3" name="Image 0" descr="/home/claude/f4/img/minesec_sheet.png">    </p:cNvPr>
+          <p:cNvPicPr>
+            <a:picLocks noChangeAspect="1"/>
+          </p:cNvPicPr>
+          <p:nvPr/>
+        </p:nvPicPr>
+        <p:blipFill>
+          <a:blip r:embed="rId1"/>
+          <a:stretch>
+            <a:fillRect/>
+          </a:stretch>
+        </p:blipFill>
+        <p:spPr>
+          <a:xfrm>
+            <a:off x="0" y="658368"/>
+            <a:ext cx="5120640" cy="5833872"/>
+          </a:xfrm>
+          <a:prstGeom prst="rect">
+            <a:avLst/>
+          </a:prstGeom>
+        </p:spPr>
+      </p:pic>
+      <p:sp>
+        <p:nvSpPr>
+          <p:cNvPr id="4" name="Text 1"/>
+          <p:cNvSpPr/>
+          <p:nvPr/>
+        </p:nvSpPr>
+        <p:spPr>
+          <a:xfrm>
+            <a:off x="5349240" y="1005840"/>
+            <a:ext cx="6522415" cy="731520"/>
+          </a:xfrm>
+          <a:prstGeom prst="rect">
+            <a:avLst/>
+          </a:prstGeom>
+          <a:noFill/>
+          <a:ln/>
+        </p:spPr>
+        <p:txBody>
+          <a:bodyPr wrap="square" lIns="0" tIns="0" rIns="0" bIns="0" rtlCol="0" anchor="ctr">
+            <a:normAutofit/>
+          </a:bodyPr>
+          <a:lstStyle/>
+          <a:p>
+            <a:pPr algn="ctr" indent="0" marL="0">
+              <a:buNone/>
+            </a:pPr>
+            <a:r>
+              <a:rPr lang="en-US" sz="3600" b="1" dirty="0">
+                <a:solidFill>
+                  <a:srgbClr val="990011"/>
+                </a:solidFill>
+                <a:latin typeface="Times New Roman" pitchFamily="34" charset="0"/>
+                <a:ea typeface="Times New Roman" pitchFamily="34" charset="-122"/>
+                <a:cs typeface="Times New Roman" pitchFamily="34" charset="-120"/>
+              </a:rPr>
+              <a:t>Next Lesson</a:t>
+            </a:r>
+            <a:endParaRPr lang="en-US" sz="3600" dirty="0"/>
+          </a:p>
+        </p:txBody>
+      </p:sp>
+      <p:sp>
+        <p:nvSpPr>
+          <p:cNvPr id="5" name="Text 2"/>
+          <p:cNvSpPr/>
+          <p:nvPr/>
+        </p:nvSpPr>
+        <p:spPr>
+          <a:xfrm>
+            <a:off x="5349240" y="1783080"/>
+            <a:ext cx="6522415" cy="4663440"/>
+          </a:xfrm>
+          <a:prstGeom prst="rect">
+            <a:avLst/>
+          </a:prstGeom>
+          <a:noFill/>
+          <a:ln/>
+        </p:spPr>
+        <p:txBody>
+          <a:bodyPr wrap="square" lIns="0" tIns="0" rIns="0" bIns="0" rtlCol="0" anchor="ctr"/>
+          <a:lstStyle/>
+          <a:p>
+            <a:pPr algn="ctr" indent="0" marL="0">
+              <a:spcAft>
+                <a:spcPts val="800"/>
+              </a:spcAft>
+              <a:buNone/>
+            </a:pPr>
+            <a:r>
+              <a:rPr lang="en-US" sz="4000" b="1" dirty="0">
+                <a:solidFill>
+                  <a:srgbClr val="111111"/>
+                </a:solidFill>
+                <a:latin typeface="Times New Roman" pitchFamily="34" charset="0"/>
+                <a:ea typeface="Times New Roman" pitchFamily="34" charset="-122"/>
+                <a:cs typeface="Times New Roman" pitchFamily="34" charset="-120"/>
+              </a:rPr>
+              <a:t>Our next lesson will be on:</a:t>
+            </a:r>
+            <a:endParaRPr lang="en-US" sz="4000" dirty="0"/>
+          </a:p>
+          <a:p>
+            <a:pPr algn="ctr" indent="0" marL="0">
+              <a:spcAft>
+                <a:spcPts val="800"/>
+              </a:spcAft>
+              <a:buNone/>
+            </a:pPr>
+            <a:r>
+              <a:rPr lang="en-US" sz="4000" b="1" dirty="0">
+                <a:solidFill>
+                  <a:srgbClr val="990011"/>
+                </a:solidFill>
+                <a:latin typeface="Times New Roman" pitchFamily="34" charset="0"/>
+                <a:ea typeface="Times New Roman" pitchFamily="34" charset="-122"/>
+                <a:cs typeface="Times New Roman" pitchFamily="34" charset="-120"/>
+              </a:rPr>
+              <a:t>Further Study 6: Urban Problems in Cameroon</a:t>
+            </a:r>
+            <a:endParaRPr lang="en-US" sz="4000" dirty="0"/>
+          </a:p>
+        </p:txBody>
+      </p:sp>
+      <p:sp>
+        <p:nvSpPr>
+          <p:cNvPr id="25" name="Slide Number Placeholder 0"/>
+          <p:cNvSpPr>
+            <a:spLocks noGrp="1"/>
+          </p:cNvSpPr>
+          <p:nvPr>
+            <p:ph type="sldNum" sz="quarter" idx="4294967295"/>
+          </p:nvPr>
+        </p:nvSpPr>
+        <p:spPr>
+          <a:xfrm>
+            <a:off x="27432" y="91440"/>
+            <a:ext cx="585216" cy="475488"/>
+          </a:xfrm>
+          <a:prstGeom prst="rect">
+            <a:avLst/>
+          </a:prstGeom>
+          <a:extLst>
+            <a:ext uri="{C572A759-6A51-4108-AA02-DFA0A04FC94B}">
+              <ma14:wrappingTextBoxFlag xmlns:ma14="http://schemas.microsoft.com/office/mac/drawingml/2011/main" val="0"/>
+            </a:ext>
+          </a:extLst>
+        </p:spPr>
+        <p:txBody>
+          <a:bodyPr/>
+          <a:lstStyle>
+            <a:lvl1pPr>
+              <a:defRPr sz="2000">
+                <a:solidFill>
+                  <a:srgbClr val="FFFFFF"/>
+                </a:solidFill>
+                <a:latin typeface="Calibri"/>
+                <a:ea typeface="Calibri"/>
+                <a:cs typeface="Calibri"/>
+              </a:defRPr>
+            </a:lvl1pPr>
+          </a:lstStyle>
+          <a:p>
+            <a:pPr algn="ctr"/>
+            <a:fld id="{F7021451-1387-4CA6-816F-3879F97B5CBC}" type="slidenum">
+              <a:rPr b="1" lang="en-US"/>
+              <a:t>54</a:t>
+            </a:fld>
+            <a:endParaRPr lang="en-US"/>
+          </a:p>
+        </p:txBody>
+      </p:sp>
+    </p:spTree>
+  </p:cSld>
+  <p:clrMapOvr>
+    <a:masterClrMapping/>
+  </p:clrMapOvr>
+</p:sld>
+</file>
+
+<file path=ppt/slides/slide55.xml><?xml version="1.0" encoding="utf-8"?>
+<p:sld xmlns:a="http://schemas.openxmlformats.org/drawingml/2006/main" xmlns:r="http://schemas.openxmlformats.org/officeDocument/2006/relationships" xmlns:p="http://schemas.openxmlformats.org/presentationml/2006/main">
+  <p:cSld name="Slide 55">
+    <p:spTree>
+      <p:nvGrpSpPr>
+        <p:cNvPr id="1" name=""/>
+        <p:cNvGrpSpPr/>
+        <p:nvPr/>
+      </p:nvGrpSpPr>
+      <p:grpSpPr>
+        <a:xfrm>
+          <a:off x="0" y="0"/>
+          <a:ext cx="0" cy="0"/>
+          <a:chOff x="0" y="0"/>
+          <a:chExt cx="0" cy="0"/>
+        </a:xfrm>
+      </p:grpSpPr>
+      <p:sp>
+        <p:nvSpPr>
+          <p:cNvPr id="2" name="Text 0"/>
+          <p:cNvSpPr/>
+          <p:nvPr/>
+        </p:nvSpPr>
+        <p:spPr>
+          <a:xfrm>
+            <a:off x="457200" y="713232"/>
+            <a:ext cx="11368735" cy="274320"/>
+          </a:xfrm>
+          <a:prstGeom prst="rect">
+            <a:avLst/>
+          </a:prstGeom>
+          <a:noFill/>
+          <a:ln/>
+        </p:spPr>
+        <p:txBody>
+          <a:bodyPr wrap="square" lIns="0" tIns="0" rIns="0" bIns="0" rtlCol="0" anchor="ctr"/>
+          <a:lstStyle/>
+          <a:p>
+            <a:pPr algn="r" indent="0" marL="0">
+              <a:buNone/>
+            </a:pPr>
+            <a:r>
+              <a:rPr lang="en-US" sz="1400" b="1" dirty="0">
+                <a:solidFill>
+                  <a:srgbClr val="1C3F6E"/>
+                </a:solidFill>
+                <a:latin typeface="Calibri" pitchFamily="34" charset="0"/>
+                <a:ea typeface="Calibri" pitchFamily="34" charset="-122"/>
+                <a:cs typeface="Calibri" pitchFamily="34" charset="-120"/>
+              </a:rPr>
+              <a:t>BILINGUAL GAME</a:t>
+            </a:r>
+            <a:endParaRPr lang="en-US" sz="1400" dirty="0"/>
+          </a:p>
+        </p:txBody>
+      </p:sp>
+      <p:sp>
+        <p:nvSpPr>
+          <p:cNvPr id="3" name="Text 1"/>
+          <p:cNvSpPr/>
+          <p:nvPr/>
+        </p:nvSpPr>
+        <p:spPr>
+          <a:xfrm>
+            <a:off x="457200" y="1005840"/>
+            <a:ext cx="11277295" cy="731520"/>
+          </a:xfrm>
+          <a:prstGeom prst="rect">
+            <a:avLst/>
+          </a:prstGeom>
+          <a:noFill/>
+          <a:ln/>
+        </p:spPr>
+        <p:txBody>
+          <a:bodyPr wrap="square" lIns="0" tIns="0" rIns="0" bIns="0" rtlCol="0" anchor="ctr"/>
+          <a:lstStyle/>
+          <a:p>
+            <a:pPr algn="ctr" indent="0" marL="0">
+              <a:buNone/>
+            </a:pPr>
+            <a:r>
+              <a:rPr lang="en-US" sz="3600" b="1" dirty="0">
+                <a:solidFill>
+                  <a:srgbClr val="990011"/>
+                </a:solidFill>
+                <a:latin typeface="Times New Roman" pitchFamily="34" charset="0"/>
+                <a:ea typeface="Times New Roman" pitchFamily="34" charset="-122"/>
+                <a:cs typeface="Times New Roman" pitchFamily="34" charset="-120"/>
+              </a:rPr>
               <a:t>Bilingual Game (Jeu Bilingue)</a:t>
             </a:r>
             <a:endParaRPr lang="en-US" sz="3600" dirty="0"/>
@@ -17073,7 +20037,7 @@
       </p:sp>
       <p:graphicFrame>
         <p:nvGraphicFramePr>
-          <p:cNvPr id="49" name="Table 0"/>
+          <p:cNvPr id="56" name="Table 0"/>
           <p:cNvGraphicFramePr>
             <a:graphicFrameLocks noGrp="1"/>
           </p:cNvGraphicFramePr>
@@ -17943,7 +20907,7 @@
                           <a:ea typeface="Calibri" pitchFamily="34" charset="-122"/>
                           <a:cs typeface="Calibri" pitchFamily="34" charset="-120"/>
                         </a:rPr>
-                        <a:t>Administration</a:t>
+                        <a:t>Governor</a:t>
                       </a:r>
                       <a:endParaRPr lang="en-US" sz="2200" dirty="0">
                         <a:latin typeface="Calibri" charset="0"/>
@@ -18011,7 +20975,7 @@
                           <a:ea typeface="Calibri" pitchFamily="34" charset="-122"/>
                           <a:cs typeface="Calibri" pitchFamily="34" charset="-120"/>
                         </a:rPr>
-                        <a:t>L'administration</a:t>
+                        <a:t>Le gouverneur</a:t>
                       </a:r>
                       <a:endParaRPr lang="en-US" sz="2200" dirty="0">
                         <a:latin typeface="Calibri" charset="0"/>
@@ -18109,7 +21073,7 @@
             <a:pPr algn="ctr"/>
             <a:fld id="{F7021451-1387-4CA6-816F-3879F97B5CBC}" type="slidenum">
               <a:rPr b="1" lang="en-US"/>
-              <a:t>48</a:t>
+              <a:t>55</a:t>
             </a:fld>
             <a:endParaRPr lang="en-US"/>
           </a:p>
@@ -18123,9 +21087,9 @@
 </p:sld>
 </file>
 
-<file path=ppt/slides/slide49.xml><?xml version="1.0" encoding="utf-8"?>
+<file path=ppt/slides/slide56.xml><?xml version="1.0" encoding="utf-8"?>
 <p:sld xmlns:a="http://schemas.openxmlformats.org/drawingml/2006/main" xmlns:r="http://schemas.openxmlformats.org/officeDocument/2006/relationships" xmlns:p="http://schemas.openxmlformats.org/presentationml/2006/main">
-  <p:cSld name="Slide 49">
+  <p:cSld name="Slide 56">
     <p:spTree>
       <p:nvGrpSpPr>
         <p:cNvPr id="1" name=""/>
@@ -18220,7 +21184,7 @@
       </p:sp>
       <p:graphicFrame>
         <p:nvGraphicFramePr>
-          <p:cNvPr id="50" name="Table 0"/>
+          <p:cNvPr id="57" name="Table 0"/>
           <p:cNvGraphicFramePr>
             <a:graphicFrameLocks noGrp="1"/>
           </p:cNvGraphicFramePr>
@@ -18606,7 +21570,7 @@
                           <a:ea typeface="Calibri" pitchFamily="34" charset="-122"/>
                           <a:cs typeface="Calibri" pitchFamily="34" charset="-120"/>
                         </a:rPr>
-                        <a:t>Name the ten regions of Cameroon and their headquarters. Name the divisional headquarters of their region. Locate them on a base map.</a:t>
+                        <a:t>Name the ten regions of Cameroon and their headquarters. Name the divisions of the North Region and their headquarters. Locate and name them on a base map.</a:t>
                       </a:r>
                       <a:endParaRPr lang="en-US" sz="1600" dirty="0">
                         <a:latin typeface="Calibri" charset="0"/>
@@ -18842,7 +21806,7 @@
             <a:pPr algn="ctr"/>
             <a:fld id="{F7021451-1387-4CA6-816F-3879F97B5CBC}" type="slidenum">
               <a:rPr b="1" lang="en-US"/>
-              <a:t>49</a:t>
+              <a:t>56</a:t>
             </a:fld>
             <a:endParaRPr lang="en-US"/>
           </a:p>
@@ -18856,9 +21820,9 @@
 </p:sld>
 </file>
 
-<file path=ppt/slides/slide5.xml><?xml version="1.0" encoding="utf-8"?>
+<file path=ppt/slides/slide57.xml><?xml version="1.0" encoding="utf-8"?>
 <p:sld xmlns:a="http://schemas.openxmlformats.org/drawingml/2006/main" xmlns:r="http://schemas.openxmlformats.org/officeDocument/2006/relationships" xmlns:p="http://schemas.openxmlformats.org/presentationml/2006/main">
-  <p:cSld name="Slide 5">
+  <p:cSld name="Slide 57">
     <p:spTree>
       <p:nvGrpSpPr>
         <p:cNvPr id="1" name=""/>
@@ -18906,46 +21870,22 @@
                 <a:ea typeface="Calibri" pitchFamily="34" charset="-122"/>
                 <a:cs typeface="Calibri" pitchFamily="34" charset="-120"/>
               </a:rPr>
-              <a:t>HOMEWORK CORRECTION</a:t>
+              <a:t>LOGBOOK</a:t>
             </a:r>
             <a:endParaRPr lang="en-US" sz="1400" dirty="0"/>
           </a:p>
         </p:txBody>
       </p:sp>
-      <p:pic>
-        <p:nvPicPr>
-          <p:cNvPr id="3" name="Image 0" descr="/home/claude/f4/img/minesec_sheet.png">    </p:cNvPr>
-          <p:cNvPicPr>
-            <a:picLocks noChangeAspect="1"/>
-          </p:cNvPicPr>
-          <p:nvPr/>
-        </p:nvPicPr>
-        <p:blipFill>
-          <a:blip r:embed="rId1"/>
-          <a:stretch>
-            <a:fillRect/>
-          </a:stretch>
-        </p:blipFill>
-        <p:spPr>
-          <a:xfrm>
-            <a:off x="0" y="658368"/>
-            <a:ext cx="5120640" cy="5833872"/>
-          </a:xfrm>
-          <a:prstGeom prst="rect">
-            <a:avLst/>
-          </a:prstGeom>
-        </p:spPr>
-      </p:pic>
-      <p:sp>
-        <p:nvSpPr>
-          <p:cNvPr id="4" name="Text 1"/>
+      <p:sp>
+        <p:nvSpPr>
+          <p:cNvPr id="3" name="Text 1"/>
           <p:cNvSpPr/>
           <p:nvPr/>
         </p:nvSpPr>
         <p:spPr>
           <a:xfrm>
-            <a:off x="5349240" y="1005840"/>
-            <a:ext cx="6522415" cy="731520"/>
+            <a:off x="457200" y="1005840"/>
+            <a:ext cx="11277295" cy="731520"/>
           </a:xfrm>
           <a:prstGeom prst="rect">
             <a:avLst/>
@@ -18954,9 +21894,7 @@
           <a:ln/>
         </p:spPr>
         <p:txBody>
-          <a:bodyPr wrap="square" lIns="0" tIns="0" rIns="0" bIns="0" rtlCol="0" anchor="ctr">
-            <a:normAutofit/>
-          </a:bodyPr>
+          <a:bodyPr wrap="square" lIns="0" tIns="0" rIns="0" bIns="0" rtlCol="0" anchor="ctr"/>
           <a:lstStyle/>
           <a:p>
             <a:pPr algn="ctr" indent="0" marL="0">
@@ -18971,199 +21909,6 @@
                 <a:ea typeface="Times New Roman" pitchFamily="34" charset="-122"/>
                 <a:cs typeface="Times New Roman" pitchFamily="34" charset="-120"/>
               </a:rPr>
-              <a:t>Correction: Possible Answer</a:t>
-            </a:r>
-            <a:endParaRPr lang="en-US" sz="3600" dirty="0"/>
-          </a:p>
-        </p:txBody>
-      </p:sp>
-      <p:sp>
-        <p:nvSpPr>
-          <p:cNvPr id="5" name="Text 2"/>
-          <p:cNvSpPr/>
-          <p:nvPr/>
-        </p:nvSpPr>
-        <p:spPr>
-          <a:xfrm>
-            <a:off x="5349240" y="1783080"/>
-            <a:ext cx="6522415" cy="4663440"/>
-          </a:xfrm>
-          <a:prstGeom prst="rect">
-            <a:avLst/>
-          </a:prstGeom>
-          <a:noFill/>
-          <a:ln/>
-        </p:spPr>
-        <p:txBody>
-          <a:bodyPr wrap="square" lIns="0" tIns="0" rIns="0" bIns="0" rtlCol="0" anchor="t"/>
-          <a:lstStyle/>
-          <a:p>
-            <a:pPr algn="l" indent="0" marL="0">
-              <a:spcAft>
-                <a:spcPts val="800"/>
-              </a:spcAft>
-              <a:buNone/>
-            </a:pPr>
-            <a:r>
-              <a:rPr lang="en-US" sz="4000" dirty="0">
-                <a:solidFill>
-                  <a:srgbClr val="111111"/>
-                </a:solidFill>
-                <a:latin typeface="Times New Roman" pitchFamily="34" charset="0"/>
-                <a:ea typeface="Times New Roman" pitchFamily="34" charset="-122"/>
-                <a:cs typeface="Times New Roman" pitchFamily="34" charset="-120"/>
-              </a:rPr>
-              <a:t>Answers vary. Example: a shoe repairer earns about 2,000 FCFA a day; his main problem is irregular income and no place to work when it rains.</a:t>
-            </a:r>
-            <a:endParaRPr lang="en-US" sz="4000" dirty="0"/>
-          </a:p>
-        </p:txBody>
-      </p:sp>
-      <p:sp>
-        <p:nvSpPr>
-          <p:cNvPr id="25" name="Slide Number Placeholder 0"/>
-          <p:cNvSpPr>
-            <a:spLocks noGrp="1"/>
-          </p:cNvSpPr>
-          <p:nvPr>
-            <p:ph type="sldNum" sz="quarter" idx="4294967295"/>
-          </p:nvPr>
-        </p:nvSpPr>
-        <p:spPr>
-          <a:xfrm>
-            <a:off x="27432" y="91440"/>
-            <a:ext cx="585216" cy="475488"/>
-          </a:xfrm>
-          <a:prstGeom prst="rect">
-            <a:avLst/>
-          </a:prstGeom>
-          <a:extLst>
-            <a:ext uri="{C572A759-6A51-4108-AA02-DFA0A04FC94B}">
-              <ma14:wrappingTextBoxFlag xmlns:ma14="http://schemas.microsoft.com/office/mac/drawingml/2011/main" val="0"/>
-            </a:ext>
-          </a:extLst>
-        </p:spPr>
-        <p:txBody>
-          <a:bodyPr/>
-          <a:lstStyle>
-            <a:lvl1pPr>
-              <a:defRPr sz="2000">
-                <a:solidFill>
-                  <a:srgbClr val="FFFFFF"/>
-                </a:solidFill>
-                <a:latin typeface="Calibri"/>
-                <a:ea typeface="Calibri"/>
-                <a:cs typeface="Calibri"/>
-              </a:defRPr>
-            </a:lvl1pPr>
-          </a:lstStyle>
-          <a:p>
-            <a:pPr algn="ctr"/>
-            <a:fld id="{F7021451-1387-4CA6-816F-3879F97B5CBC}" type="slidenum">
-              <a:rPr b="1" lang="en-US"/>
-              <a:t>5</a:t>
-            </a:fld>
-            <a:endParaRPr lang="en-US"/>
-          </a:p>
-        </p:txBody>
-      </p:sp>
-    </p:spTree>
-  </p:cSld>
-  <p:clrMapOvr>
-    <a:masterClrMapping/>
-  </p:clrMapOvr>
-</p:sld>
-</file>
-
-<file path=ppt/slides/slide50.xml><?xml version="1.0" encoding="utf-8"?>
-<p:sld xmlns:a="http://schemas.openxmlformats.org/drawingml/2006/main" xmlns:r="http://schemas.openxmlformats.org/officeDocument/2006/relationships" xmlns:p="http://schemas.openxmlformats.org/presentationml/2006/main">
-  <p:cSld name="Slide 50">
-    <p:spTree>
-      <p:nvGrpSpPr>
-        <p:cNvPr id="1" name=""/>
-        <p:cNvGrpSpPr/>
-        <p:nvPr/>
-      </p:nvGrpSpPr>
-      <p:grpSpPr>
-        <a:xfrm>
-          <a:off x="0" y="0"/>
-          <a:ext cx="0" cy="0"/>
-          <a:chOff x="0" y="0"/>
-          <a:chExt cx="0" cy="0"/>
-        </a:xfrm>
-      </p:grpSpPr>
-      <p:sp>
-        <p:nvSpPr>
-          <p:cNvPr id="2" name="Text 0"/>
-          <p:cNvSpPr/>
-          <p:nvPr/>
-        </p:nvSpPr>
-        <p:spPr>
-          <a:xfrm>
-            <a:off x="457200" y="713232"/>
-            <a:ext cx="11368735" cy="274320"/>
-          </a:xfrm>
-          <a:prstGeom prst="rect">
-            <a:avLst/>
-          </a:prstGeom>
-          <a:noFill/>
-          <a:ln/>
-        </p:spPr>
-        <p:txBody>
-          <a:bodyPr wrap="square" lIns="0" tIns="0" rIns="0" bIns="0" rtlCol="0" anchor="ctr"/>
-          <a:lstStyle/>
-          <a:p>
-            <a:pPr algn="r" indent="0" marL="0">
-              <a:buNone/>
-            </a:pPr>
-            <a:r>
-              <a:rPr lang="en-US" sz="1400" b="1" dirty="0">
-                <a:solidFill>
-                  <a:srgbClr val="1C3F6E"/>
-                </a:solidFill>
-                <a:latin typeface="Calibri" pitchFamily="34" charset="0"/>
-                <a:ea typeface="Calibri" pitchFamily="34" charset="-122"/>
-                <a:cs typeface="Calibri" pitchFamily="34" charset="-120"/>
-              </a:rPr>
-              <a:t>LOGBOOK</a:t>
-            </a:r>
-            <a:endParaRPr lang="en-US" sz="1400" dirty="0"/>
-          </a:p>
-        </p:txBody>
-      </p:sp>
-      <p:sp>
-        <p:nvSpPr>
-          <p:cNvPr id="3" name="Text 1"/>
-          <p:cNvSpPr/>
-          <p:nvPr/>
-        </p:nvSpPr>
-        <p:spPr>
-          <a:xfrm>
-            <a:off x="457200" y="1005840"/>
-            <a:ext cx="11277295" cy="731520"/>
-          </a:xfrm>
-          <a:prstGeom prst="rect">
-            <a:avLst/>
-          </a:prstGeom>
-          <a:noFill/>
-          <a:ln/>
-        </p:spPr>
-        <p:txBody>
-          <a:bodyPr wrap="square" lIns="0" tIns="0" rIns="0" bIns="0" rtlCol="0" anchor="ctr"/>
-          <a:lstStyle/>
-          <a:p>
-            <a:pPr algn="ctr" indent="0" marL="0">
-              <a:buNone/>
-            </a:pPr>
-            <a:r>
-              <a:rPr lang="en-US" sz="3600" b="1" dirty="0">
-                <a:solidFill>
-                  <a:srgbClr val="990011"/>
-                </a:solidFill>
-                <a:latin typeface="Times New Roman" pitchFamily="34" charset="0"/>
-                <a:ea typeface="Times New Roman" pitchFamily="34" charset="-122"/>
-                <a:cs typeface="Times New Roman" pitchFamily="34" charset="-120"/>
-              </a:rPr>
               <a:t>Official Logbook (2/2)</a:t>
             </a:r>
             <a:endParaRPr lang="en-US" sz="3600" dirty="0"/>
@@ -19172,7 +21917,7 @@
       </p:sp>
       <p:graphicFrame>
         <p:nvGraphicFramePr>
-          <p:cNvPr id="51" name="Table 0"/>
+          <p:cNvPr id="58" name="Table 0"/>
           <p:cNvGraphicFramePr>
             <a:graphicFrameLocks noGrp="1"/>
           </p:cNvGraphicFramePr>
@@ -19282,7 +22027,7 @@
                           <a:ea typeface="Calibri" pitchFamily="34" charset="-122"/>
                           <a:cs typeface="Calibri" pitchFamily="34" charset="-120"/>
                         </a:rPr>
-                        <a:t>DEFINITIONS; Regional Headquarters of Cameroon; Divisional Headquarters of the North Region.</a:t>
+                        <a:t>DEFINITIONS; The Regional Headquarters of Cameroon; The Divisional Headquarters of the North Region; Practical Exercise.</a:t>
                       </a:r>
                       <a:endParaRPr lang="en-US" sz="1600" dirty="0">
                         <a:latin typeface="Calibri" charset="0"/>
@@ -19932,7 +22677,7 @@
             <a:pPr algn="ctr"/>
             <a:fld id="{F7021451-1387-4CA6-816F-3879F97B5CBC}" type="slidenum">
               <a:rPr b="1" lang="en-US"/>
-              <a:t>50</a:t>
+              <a:t>57</a:t>
             </a:fld>
             <a:endParaRPr lang="en-US"/>
           </a:p>
@@ -19946,9 +22691,9 @@
 </p:sld>
 </file>
 
-<file path=ppt/slides/slide51.xml><?xml version="1.0" encoding="utf-8"?>
+<file path=ppt/slides/slide58.xml><?xml version="1.0" encoding="utf-8"?>
 <p:sld xmlns:a="http://schemas.openxmlformats.org/drawingml/2006/main" xmlns:r="http://schemas.openxmlformats.org/officeDocument/2006/relationships" xmlns:p="http://schemas.openxmlformats.org/presentationml/2006/main">
-  <p:cSld name="Slide 51">
+  <p:cSld name="Slide 58">
     <p:spTree>
       <p:nvGrpSpPr>
         <p:cNvPr id="1" name=""/>
@@ -20257,7 +23002,7 @@
             <a:pPr algn="ctr"/>
             <a:fld id="{F7021451-1387-4CA6-816F-3879F97B5CBC}" type="slidenum">
               <a:rPr b="1" lang="en-US"/>
-              <a:t>51</a:t>
+              <a:t>58</a:t>
             </a:fld>
             <a:endParaRPr lang="en-US"/>
           </a:p>
@@ -20271,9 +23016,9 @@
 </p:sld>
 </file>
 
-<file path=ppt/slides/slide52.xml><?xml version="1.0" encoding="utf-8"?>
+<file path=ppt/slides/slide59.xml><?xml version="1.0" encoding="utf-8"?>
 <p:sld xmlns:a="http://schemas.openxmlformats.org/drawingml/2006/main" xmlns:r="http://schemas.openxmlformats.org/officeDocument/2006/relationships" xmlns:p="http://schemas.openxmlformats.org/presentationml/2006/main">
-  <p:cSld name="Slide 52">
+  <p:cSld name="Slide 59">
     <p:spTree>
       <p:nvGrpSpPr>
         <p:cNvPr id="1" name=""/>
@@ -20498,7 +23243,7 @@
             <a:pPr algn="ctr"/>
             <a:fld id="{F7021451-1387-4CA6-816F-3879F97B5CBC}" type="slidenum">
               <a:rPr b="1" lang="en-US"/>
-              <a:t>52</a:t>
+              <a:t>59</a:t>
             </a:fld>
             <a:endParaRPr lang="en-US"/>
           </a:p>
@@ -21044,7 +23789,7 @@
                 <a:ea typeface="Times New Roman" pitchFamily="34" charset="-122"/>
                 <a:cs typeface="Times New Roman" pitchFamily="34" charset="-120"/>
               </a:rPr>
-              <a:t>Name the divisional headquarters of their region.</a:t>
+              <a:t>Name the divisions of the North Region and their headquarters.</a:t>
             </a:r>
             <a:endParaRPr lang="en-US" sz="4000" dirty="0"/>
           </a:p>
@@ -21265,7 +24010,7 @@
                 <a:ea typeface="Times New Roman" pitchFamily="34" charset="-122"/>
                 <a:cs typeface="Times New Roman" pitchFamily="34" charset="-120"/>
               </a:rPr>
-              <a:t>Locate them on a base map.</a:t>
+              <a:t>Locate and name them on a base map.</a:t>
             </a:r>
             <a:endParaRPr lang="en-US" sz="4000" dirty="0"/>
           </a:p>

--- a/lecons/F2/16_F2_M2_PW04_Location_of_the_Regional_and_Divisional_Headquarters_of_Came.pptx
+++ b/lecons/F2/16_F2_M2_PW04_Location_of_the_Regional_and_Divisional_Headquarters_of_Came.pptx
@@ -14393,7 +14393,7 @@
               <a:buNone/>
             </a:pPr>
             <a:r>
-              <a:rPr lang="en-US" sz="4000" b="1" dirty="0">
+              <a:rPr lang="en-US" sz="3200" b="1" dirty="0">
                 <a:solidFill>
                   <a:srgbClr val="111111"/>
                 </a:solidFill>
@@ -14403,7 +14403,7 @@
               </a:rPr>
               <a:t>Topic: Space Occupation</a:t>
             </a:r>
-            <a:endParaRPr lang="en-US" sz="4000" dirty="0"/>
+            <a:endParaRPr lang="en-US" sz="3200" dirty="0"/>
           </a:p>
           <a:p>
             <a:pPr algn="l" indent="0" marL="0">
@@ -14413,7 +14413,7 @@
               <a:buNone/>
             </a:pPr>
             <a:r>
-              <a:rPr lang="en-US" sz="4000" b="1" dirty="0">
+              <a:rPr lang="en-US" sz="3200" b="1" dirty="0">
                 <a:solidFill>
                   <a:srgbClr val="111111"/>
                 </a:solidFill>
@@ -14423,7 +14423,7 @@
               </a:rPr>
               <a:t>Sub-topic: Towns and Country Sides of Africa</a:t>
             </a:r>
-            <a:endParaRPr lang="en-US" sz="4000" dirty="0"/>
+            <a:endParaRPr lang="en-US" sz="3200" dirty="0"/>
           </a:p>
           <a:p>
             <a:pPr algn="l" indent="0" marL="0">
@@ -14433,7 +14433,7 @@
               <a:buNone/>
             </a:pPr>
             <a:r>
-              <a:rPr lang="en-US" sz="4000" b="1" dirty="0">
+              <a:rPr lang="en-US" sz="3200" b="1" dirty="0">
                 <a:solidFill>
                   <a:srgbClr val="990011"/>
                 </a:solidFill>
@@ -14443,7 +14443,7 @@
               </a:rPr>
               <a:t>Practical Work 4: Location of the Regional and Divisional Headquarters of Cameroon</a:t>
             </a:r>
-            <a:endParaRPr lang="en-US" sz="4000" dirty="0"/>
+            <a:endParaRPr lang="en-US" sz="3200" dirty="0"/>
           </a:p>
         </p:txBody>
       </p:sp>

--- a/lecons/F2/16_F2_M2_PW04_Location_of_the_Regional_and_Divisional_Headquarters_of_Came.pptx
+++ b/lecons/F2/16_F2_M2_PW04_Location_of_the_Regional_and_Divisional_Headquarters_of_Came.pptx
@@ -3464,7 +3464,7 @@
           <a:p>
             <a:r>
               <a:rPr lang="en-US" dirty="0"/>
-              <a:t>Before we start the new lesson, let us correct the homework I gave you at the end of Further Study 5: Informal Sector Activities in African Cities. The question was: Interview one informal worker: his or her job, income and main problem. Take out your exercise books.</a:t>
+              <a:t>Before we start the new lesson, let us correct the homework I gave you at the end of Further Study 5: Informal Sector Activities in African Cities. The question was: Name the headquarters of the North and Far North Regions. Take out your exercise books.</a:t>
             </a:r>
             <a:endParaRPr lang="en-US" dirty="0"/>
           </a:p>
@@ -4432,7 +4432,7 @@
           <a:p>
             <a:r>
               <a:rPr lang="en-US" dirty="0"/>
-              <a:t>Here is a good answer. Answers vary. Example: a shoe repairer earns about 2,000 FCFA a day; the main problem is irregular income and no place to work when it rains. Compare it with your own answer and correct your work in red.</a:t>
+              <a:t>Here is a good answer. Garoua (North) and Maroua (Far North). Compare it with your own answer and correct your work in red.</a:t>
             </a:r>
             <a:endParaRPr lang="en-US" dirty="0"/>
           </a:p>
@@ -4784,7 +4784,7 @@
           <a:p>
             <a:r>
               <a:rPr lang="en-US" dirty="0"/>
-              <a:t>For your homework: On a base map of Cameroon, locate and name the ten regional headquarters. We shall correct it at the beginning of our next lesson.</a:t>
+              <a:t>For your homework: Give three urban problems of Cameroonian towns. We shall correct it at the beginning of our next lesson.</a:t>
             </a:r>
             <a:endParaRPr lang="en-US" dirty="0"/>
           </a:p>
@@ -15582,7 +15582,7 @@
                 <a:ea typeface="Times New Roman" pitchFamily="34" charset="-122"/>
                 <a:cs typeface="Times New Roman" pitchFamily="34" charset="-120"/>
               </a:rPr>
-              <a:t>Interview one informal worker: his or her job, income and main problem.</a:t>
+              <a:t>Name the headquarters of the North and Far North Regions.</a:t>
             </a:r>
             <a:endParaRPr lang="en-US" sz="4000" dirty="0"/>
           </a:p>
@@ -18717,7 +18717,7 @@
                 <a:ea typeface="Times New Roman" pitchFamily="34" charset="-122"/>
                 <a:cs typeface="Times New Roman" pitchFamily="34" charset="-120"/>
               </a:rPr>
-              <a:t>Answers vary. Example: a shoe repairer earns about 2,000 FCFA a day; the main problem is irregular income and no place to work when it rains.</a:t>
+              <a:t>Garoua (North) and Maroua (Far North).</a:t>
             </a:r>
             <a:endParaRPr lang="en-US" sz="4000" dirty="0"/>
           </a:p>
@@ -19639,7 +19639,7 @@
                 <a:ea typeface="Times New Roman" pitchFamily="34" charset="-122"/>
                 <a:cs typeface="Times New Roman" pitchFamily="34" charset="-120"/>
               </a:rPr>
-              <a:t>On a base map of Cameroon, locate and name the ten regional headquarters.</a:t>
+              <a:t>Give three urban problems of Cameroonian towns.</a:t>
             </a:r>
             <a:endParaRPr lang="en-US" sz="4000" dirty="0"/>
           </a:p>
@@ -22303,7 +22303,7 @@
                           <a:ea typeface="Calibri" pitchFamily="34" charset="-122"/>
                           <a:cs typeface="Calibri" pitchFamily="34" charset="-120"/>
                         </a:rPr>
-                        <a:t>On a base map of Cameroon, locate and name the ten regional headquarters.</a:t>
+                        <a:t>Give three urban problems of Cameroonian towns.</a:t>
                       </a:r>
                       <a:endParaRPr lang="en-US" sz="1600" dirty="0">
                         <a:latin typeface="Calibri" charset="0"/>
